--- a/solution_presentation.pptx
+++ b/solution_presentation.pptx
@@ -245,13 +245,13 @@
                 <c:formatCode>General</c:formatCode>
                 <c:ptCount val="3"/>
                 <c:pt idx="0">
-                  <c:v>27.500000000000004</c:v>
+                  <c:v>25.0</c:v>
                 </c:pt>
                 <c:pt idx="1">
-                  <c:v>33.3333</c:v>
+                  <c:v>30.0</c:v>
                 </c:pt>
                 <c:pt idx="2">
-                  <c:v>33.3333</c:v>
+                  <c:v>16.666700000000002</c:v>
                 </c:pt>
               </c:numCache>
             </c:numRef>
@@ -4096,7 +4096,7 @@
                 </a:solidFill>
                 <a:latin typeface="Cambria"/>
               </a:rPr>
-              <a:t>33.3%</a:t>
+              <a:t>30.0%</a:t>
             </a:r>
           </a:p>
         </p:txBody>
@@ -4166,7 +4166,7 @@
                 </a:solidFill>
                 <a:latin typeface="Cambria"/>
               </a:rPr>
-              <a:t>0.309 px</a:t>
+              <a:t>0.291 px</a:t>
             </a:r>
           </a:p>
         </p:txBody>
@@ -4236,7 +4236,7 @@
                 </a:solidFill>
                 <a:latin typeface="Cambria"/>
               </a:rPr>
-              <a:t>46.7%</a:t>
+              <a:t>50.0%</a:t>
             </a:r>
           </a:p>
         </p:txBody>
@@ -6696,7 +6696,7 @@
         </p:nvGraphicFramePr>
         <p:xfrm>
           <a:off x="548640" y="1572768"/>
-          <a:ext cx="6949440" cy="2743200"/>
+          <a:ext cx="6949440" cy="3017520"/>
         </p:xfrm>
         <a:graphic>
           <a:graphicData uri="http://schemas.openxmlformats.org/drawingml/2006/table">
@@ -7285,7 +7285,7 @@
                           </a:solidFill>
                           <a:latin typeface="Calibri"/>
                         </a:rPr>
-                        <a:t>the whole gain</a:t>
+                        <a:t>solves rotation/scale</a:t>
                       </a:r>
                     </a:p>
                   </a:txBody>
@@ -7310,7 +7310,7 @@
                           </a:solidFill>
                           <a:latin typeface="Calibri"/>
                         </a:rPr>
-                        <a:t>+ pose: spectral lattice</a:t>
+                        <a:t>+ per-candidate pose refit   ← shipped</a:t>
                       </a:r>
                     </a:p>
                   </a:txBody>
@@ -7333,7 +7333,7 @@
                           </a:solidFill>
                           <a:latin typeface="Calibri"/>
                         </a:rPr>
-                        <a:t>22.5%</a:t>
+                        <a:t>25.0%</a:t>
                       </a:r>
                     </a:p>
                   </a:txBody>
@@ -7356,7 +7356,7 @@
                           </a:solidFill>
                           <a:latin typeface="Calibri"/>
                         </a:rPr>
-                        <a:t>50.0%</a:t>
+                        <a:t>30.0%</a:t>
                       </a:r>
                     </a:p>
                   </a:txBody>
@@ -7379,7 +7379,7 @@
                           </a:solidFill>
                           <a:latin typeface="Calibri"/>
                         </a:rPr>
-                        <a:t>60.0%</a:t>
+                        <a:t>16.7%</a:t>
                       </a:r>
                     </a:p>
                   </a:txBody>
@@ -7402,7 +7402,7 @@
                           </a:solidFill>
                           <a:latin typeface="Calibri"/>
                         </a:rPr>
-                        <a:t>less accurate</a:t>
+                        <a:t>solves selection</a:t>
                       </a:r>
                     </a:p>
                   </a:txBody>
@@ -7427,7 +7427,7 @@
                           </a:solidFill>
                           <a:latin typeface="Calibri"/>
                         </a:rPr>
-                        <a:t>+ PADM residual re-ranking</a:t>
+                        <a:t>+ pose: spectral lattice</a:t>
                       </a:r>
                     </a:p>
                   </a:txBody>
@@ -7450,7 +7450,7 @@
                           </a:solidFill>
                           <a:latin typeface="Calibri"/>
                         </a:rPr>
-                        <a:t>20.0%</a:t>
+                        <a:t>22.5%</a:t>
                       </a:r>
                     </a:p>
                   </a:txBody>
@@ -7473,7 +7473,7 @@
                           </a:solidFill>
                           <a:latin typeface="Calibri"/>
                         </a:rPr>
-                        <a:t>70.0%</a:t>
+                        <a:t>50.0%</a:t>
                       </a:r>
                     </a:p>
                   </a:txBody>
@@ -7496,7 +7496,7 @@
                           </a:solidFill>
                           <a:latin typeface="Calibri"/>
                         </a:rPr>
-                        <a:t>80.0%</a:t>
+                        <a:t>60.0%</a:t>
                       </a:r>
                     </a:p>
                   </a:txBody>
@@ -7519,7 +7519,7 @@
                           </a:solidFill>
                           <a:latin typeface="Calibri"/>
                         </a:rPr>
-                        <a:t>overfit</a:t>
+                        <a:t>less accurate</a:t>
                       </a:r>
                     </a:p>
                   </a:txBody>
@@ -7544,7 +7544,7 @@
                           </a:solidFill>
                           <a:latin typeface="Calibri"/>
                         </a:rPr>
-                        <a:t>+ max-likelihood re-ranking</a:t>
+                        <a:t>+ PADM residual re-ranking</a:t>
                       </a:r>
                     </a:p>
                   </a:txBody>
@@ -7567,7 +7567,7 @@
                           </a:solidFill>
                           <a:latin typeface="Calibri"/>
                         </a:rPr>
-                        <a:t>22.5%</a:t>
+                        <a:t>20.0%</a:t>
                       </a:r>
                     </a:p>
                   </a:txBody>
@@ -7590,7 +7590,7 @@
                           </a:solidFill>
                           <a:latin typeface="Calibri"/>
                         </a:rPr>
-                        <a:t>43.3%</a:t>
+                        <a:t>70.0%</a:t>
                       </a:r>
                     </a:p>
                   </a:txBody>
@@ -7613,7 +7613,7 @@
                           </a:solidFill>
                           <a:latin typeface="Calibri"/>
                         </a:rPr>
-                        <a:t>50.0%</a:t>
+                        <a:t>80.0%</a:t>
                       </a:r>
                     </a:p>
                   </a:txBody>
@@ -7636,7 +7636,7 @@
                           </a:solidFill>
                           <a:latin typeface="Calibri"/>
                         </a:rPr>
-                        <a:t>no gain</a:t>
+                        <a:t>overfit</a:t>
                       </a:r>
                     </a:p>
                   </a:txBody>
@@ -7661,7 +7661,7 @@
                           </a:solidFill>
                           <a:latin typeface="Calibri"/>
                         </a:rPr>
-                        <a:t>+ coarse-level consensus</a:t>
+                        <a:t>+ max-likelihood re-ranking</a:t>
                       </a:r>
                     </a:p>
                   </a:txBody>
@@ -7684,7 +7684,7 @@
                           </a:solidFill>
                           <a:latin typeface="Calibri"/>
                         </a:rPr>
-                        <a:t>62.5%</a:t>
+                        <a:t>22.5%</a:t>
                       </a:r>
                     </a:p>
                   </a:txBody>
@@ -7707,7 +7707,7 @@
                           </a:solidFill>
                           <a:latin typeface="Calibri"/>
                         </a:rPr>
-                        <a:t>76.7%</a:t>
+                        <a:t>43.3%</a:t>
                       </a:r>
                     </a:p>
                   </a:txBody>
@@ -7730,7 +7730,241 @@
                           </a:solidFill>
                           <a:latin typeface="Calibri"/>
                         </a:rPr>
+                        <a:t>50.0%</a:t>
+                      </a:r>
+                    </a:p>
+                  </a:txBody>
+                  <a:tcPr marL="54864" marR="54864" marT="18288" marB="18288" anchor="ctr">
+                    <a:solidFill>
+                      <a:srgbClr val="ECF1F4"/>
+                    </a:solidFill>
+                  </a:tcPr>
+                </a:tc>
+                <a:tc>
+                  <a:txBody>
+                    <a:bodyPr wrap="square"/>
+                    <a:lstStyle/>
+                    <a:p>
+                      <a:pPr algn="ctr"/>
+                      <a:r>
+                        <a:rPr sz="1050" b="0">
+                          <a:solidFill>
+                            <a:srgbClr val="35424D"/>
+                          </a:solidFill>
+                          <a:latin typeface="Calibri"/>
+                        </a:rPr>
+                        <a:t>no gain</a:t>
+                      </a:r>
+                    </a:p>
+                  </a:txBody>
+                  <a:tcPr marL="54864" marR="54864" marT="18288" marB="18288" anchor="ctr">
+                    <a:solidFill>
+                      <a:srgbClr val="ECF1F4"/>
+                    </a:solidFill>
+                  </a:tcPr>
+                </a:tc>
+              </a:tr>
+              <a:tr h="274320">
+                <a:tc>
+                  <a:txBody>
+                    <a:bodyPr wrap="square"/>
+                    <a:lstStyle/>
+                    <a:p>
+                      <a:pPr algn="l"/>
+                      <a:r>
+                        <a:rPr sz="1050" b="0">
+                          <a:solidFill>
+                            <a:srgbClr val="35424D"/>
+                          </a:solidFill>
+                          <a:latin typeface="Calibri"/>
+                        </a:rPr>
+                        <a:t>+ coarse-level consensus</a:t>
+                      </a:r>
+                    </a:p>
+                  </a:txBody>
+                  <a:tcPr marL="54864" marR="54864" marT="18288" marB="18288" anchor="ctr">
+                    <a:solidFill>
+                      <a:srgbClr val="FFFFFF"/>
+                    </a:solidFill>
+                  </a:tcPr>
+                </a:tc>
+                <a:tc>
+                  <a:txBody>
+                    <a:bodyPr wrap="square"/>
+                    <a:lstStyle/>
+                    <a:p>
+                      <a:pPr algn="ctr"/>
+                      <a:r>
+                        <a:rPr sz="1050" b="0">
+                          <a:solidFill>
+                            <a:srgbClr val="35424D"/>
+                          </a:solidFill>
+                          <a:latin typeface="Calibri"/>
+                        </a:rPr>
+                        <a:t>62.5%</a:t>
+                      </a:r>
+                    </a:p>
+                  </a:txBody>
+                  <a:tcPr marL="54864" marR="54864" marT="18288" marB="18288" anchor="ctr">
+                    <a:solidFill>
+                      <a:srgbClr val="FFFFFF"/>
+                    </a:solidFill>
+                  </a:tcPr>
+                </a:tc>
+                <a:tc>
+                  <a:txBody>
+                    <a:bodyPr wrap="square"/>
+                    <a:lstStyle/>
+                    <a:p>
+                      <a:pPr algn="ctr"/>
+                      <a:r>
+                        <a:rPr sz="1050" b="0">
+                          <a:solidFill>
+                            <a:srgbClr val="35424D"/>
+                          </a:solidFill>
+                          <a:latin typeface="Calibri"/>
+                        </a:rPr>
+                        <a:t>76.7%</a:t>
+                      </a:r>
+                    </a:p>
+                  </a:txBody>
+                  <a:tcPr marL="54864" marR="54864" marT="18288" marB="18288" anchor="ctr">
+                    <a:solidFill>
+                      <a:srgbClr val="FFFFFF"/>
+                    </a:solidFill>
+                  </a:tcPr>
+                </a:tc>
+                <a:tc>
+                  <a:txBody>
+                    <a:bodyPr wrap="square"/>
+                    <a:lstStyle/>
+                    <a:p>
+                      <a:pPr algn="ctr"/>
+                      <a:r>
+                        <a:rPr sz="1050" b="0">
+                          <a:solidFill>
+                            <a:srgbClr val="35424D"/>
+                          </a:solidFill>
+                          <a:latin typeface="Calibri"/>
+                        </a:rPr>
                         <a:t>36.7%</a:t>
+                      </a:r>
+                    </a:p>
+                  </a:txBody>
+                  <a:tcPr marL="54864" marR="54864" marT="18288" marB="18288" anchor="ctr">
+                    <a:solidFill>
+                      <a:srgbClr val="FFFFFF"/>
+                    </a:solidFill>
+                  </a:tcPr>
+                </a:tc>
+                <a:tc>
+                  <a:txBody>
+                    <a:bodyPr wrap="square"/>
+                    <a:lstStyle/>
+                    <a:p>
+                      <a:pPr algn="ctr"/>
+                      <a:r>
+                        <a:rPr sz="1050" b="0">
+                          <a:solidFill>
+                            <a:srgbClr val="35424D"/>
+                          </a:solidFill>
+                          <a:latin typeface="Calibri"/>
+                        </a:rPr>
+                        <a:t>harmful</a:t>
+                      </a:r>
+                    </a:p>
+                  </a:txBody>
+                  <a:tcPr marL="54864" marR="54864" marT="18288" marB="18288" anchor="ctr">
+                    <a:solidFill>
+                      <a:srgbClr val="FFFFFF"/>
+                    </a:solidFill>
+                  </a:tcPr>
+                </a:tc>
+              </a:tr>
+              <a:tr h="274320">
+                <a:tc>
+                  <a:txBody>
+                    <a:bodyPr wrap="square"/>
+                    <a:lstStyle/>
+                    <a:p>
+                      <a:pPr algn="l"/>
+                      <a:r>
+                        <a:rPr sz="1050" b="0">
+                          <a:solidFill>
+                            <a:srgbClr val="35424D"/>
+                          </a:solidFill>
+                          <a:latin typeface="Calibri"/>
+                        </a:rPr>
+                        <a:t>+ row destriping</a:t>
+                      </a:r>
+                    </a:p>
+                  </a:txBody>
+                  <a:tcPr marL="54864" marR="54864" marT="18288" marB="18288" anchor="ctr">
+                    <a:solidFill>
+                      <a:srgbClr val="ECF1F4"/>
+                    </a:solidFill>
+                  </a:tcPr>
+                </a:tc>
+                <a:tc>
+                  <a:txBody>
+                    <a:bodyPr wrap="square"/>
+                    <a:lstStyle/>
+                    <a:p>
+                      <a:pPr algn="ctr"/>
+                      <a:r>
+                        <a:rPr sz="1050" b="0">
+                          <a:solidFill>
+                            <a:srgbClr val="35424D"/>
+                          </a:solidFill>
+                          <a:latin typeface="Calibri"/>
+                        </a:rPr>
+                        <a:t>35.0%</a:t>
+                      </a:r>
+                    </a:p>
+                  </a:txBody>
+                  <a:tcPr marL="54864" marR="54864" marT="18288" marB="18288" anchor="ctr">
+                    <a:solidFill>
+                      <a:srgbClr val="ECF1F4"/>
+                    </a:solidFill>
+                  </a:tcPr>
+                </a:tc>
+                <a:tc>
+                  <a:txBody>
+                    <a:bodyPr wrap="square"/>
+                    <a:lstStyle/>
+                    <a:p>
+                      <a:pPr algn="ctr"/>
+                      <a:r>
+                        <a:rPr sz="1050" b="0">
+                          <a:solidFill>
+                            <a:srgbClr val="35424D"/>
+                          </a:solidFill>
+                          <a:latin typeface="Calibri"/>
+                        </a:rPr>
+                        <a:t>90.0%</a:t>
+                      </a:r>
+                    </a:p>
+                  </a:txBody>
+                  <a:tcPr marL="54864" marR="54864" marT="18288" marB="18288" anchor="ctr">
+                    <a:solidFill>
+                      <a:srgbClr val="ECF1F4"/>
+                    </a:solidFill>
+                  </a:tcPr>
+                </a:tc>
+                <a:tc>
+                  <a:txBody>
+                    <a:bodyPr wrap="square"/>
+                    <a:lstStyle/>
+                    <a:p>
+                      <a:pPr algn="ctr"/>
+                      <a:r>
+                        <a:rPr sz="1050" b="0">
+                          <a:solidFill>
+                            <a:srgbClr val="35424D"/>
+                          </a:solidFill>
+                          <a:latin typeface="Calibri"/>
+                        </a:rPr>
+                        <a:t>90.0%</a:t>
                       </a:r>
                     </a:p>
                   </a:txBody>
@@ -7764,123 +7998,6 @@
                   </a:tcPr>
                 </a:tc>
               </a:tr>
-              <a:tr h="274320">
-                <a:tc>
-                  <a:txBody>
-                    <a:bodyPr wrap="square"/>
-                    <a:lstStyle/>
-                    <a:p>
-                      <a:pPr algn="l"/>
-                      <a:r>
-                        <a:rPr sz="1050" b="0">
-                          <a:solidFill>
-                            <a:srgbClr val="35424D"/>
-                          </a:solidFill>
-                          <a:latin typeface="Calibri"/>
-                        </a:rPr>
-                        <a:t>+ row destriping</a:t>
-                      </a:r>
-                    </a:p>
-                  </a:txBody>
-                  <a:tcPr marL="54864" marR="54864" marT="18288" marB="18288" anchor="ctr">
-                    <a:solidFill>
-                      <a:srgbClr val="FFFFFF"/>
-                    </a:solidFill>
-                  </a:tcPr>
-                </a:tc>
-                <a:tc>
-                  <a:txBody>
-                    <a:bodyPr wrap="square"/>
-                    <a:lstStyle/>
-                    <a:p>
-                      <a:pPr algn="ctr"/>
-                      <a:r>
-                        <a:rPr sz="1050" b="0">
-                          <a:solidFill>
-                            <a:srgbClr val="35424D"/>
-                          </a:solidFill>
-                          <a:latin typeface="Calibri"/>
-                        </a:rPr>
-                        <a:t>35.0%</a:t>
-                      </a:r>
-                    </a:p>
-                  </a:txBody>
-                  <a:tcPr marL="54864" marR="54864" marT="18288" marB="18288" anchor="ctr">
-                    <a:solidFill>
-                      <a:srgbClr val="FFFFFF"/>
-                    </a:solidFill>
-                  </a:tcPr>
-                </a:tc>
-                <a:tc>
-                  <a:txBody>
-                    <a:bodyPr wrap="square"/>
-                    <a:lstStyle/>
-                    <a:p>
-                      <a:pPr algn="ctr"/>
-                      <a:r>
-                        <a:rPr sz="1050" b="0">
-                          <a:solidFill>
-                            <a:srgbClr val="35424D"/>
-                          </a:solidFill>
-                          <a:latin typeface="Calibri"/>
-                        </a:rPr>
-                        <a:t>90.0%</a:t>
-                      </a:r>
-                    </a:p>
-                  </a:txBody>
-                  <a:tcPr marL="54864" marR="54864" marT="18288" marB="18288" anchor="ctr">
-                    <a:solidFill>
-                      <a:srgbClr val="FFFFFF"/>
-                    </a:solidFill>
-                  </a:tcPr>
-                </a:tc>
-                <a:tc>
-                  <a:txBody>
-                    <a:bodyPr wrap="square"/>
-                    <a:lstStyle/>
-                    <a:p>
-                      <a:pPr algn="ctr"/>
-                      <a:r>
-                        <a:rPr sz="1050" b="0">
-                          <a:solidFill>
-                            <a:srgbClr val="35424D"/>
-                          </a:solidFill>
-                          <a:latin typeface="Calibri"/>
-                        </a:rPr>
-                        <a:t>90.0%</a:t>
-                      </a:r>
-                    </a:p>
-                  </a:txBody>
-                  <a:tcPr marL="54864" marR="54864" marT="18288" marB="18288" anchor="ctr">
-                    <a:solidFill>
-                      <a:srgbClr val="FFFFFF"/>
-                    </a:solidFill>
-                  </a:tcPr>
-                </a:tc>
-                <a:tc>
-                  <a:txBody>
-                    <a:bodyPr wrap="square"/>
-                    <a:lstStyle/>
-                    <a:p>
-                      <a:pPr algn="ctr"/>
-                      <a:r>
-                        <a:rPr sz="1050" b="0">
-                          <a:solidFill>
-                            <a:srgbClr val="35424D"/>
-                          </a:solidFill>
-                          <a:latin typeface="Calibri"/>
-                        </a:rPr>
-                        <a:t>harmful</a:t>
-                      </a:r>
-                    </a:p>
-                  </a:txBody>
-                  <a:tcPr marL="54864" marR="54864" marT="18288" marB="18288" anchor="ctr">
-                    <a:solidFill>
-                      <a:srgbClr val="FFFFFF"/>
-                    </a:solidFill>
-                  </a:tcPr>
-                </a:tc>
-              </a:tr>
             </a:tbl>
           </a:graphicData>
         </a:graphic>
@@ -7893,7 +8010,7 @@
         </p:nvSpPr>
         <p:spPr>
           <a:xfrm>
-            <a:off x="548640" y="4416552"/>
+            <a:off x="548640" y="4690872"/>
             <a:ext cx="6949440" cy="256032"/>
           </a:xfrm>
           <a:prstGeom prst="rect">
@@ -7990,13 +8107,13 @@
           <a:p>
             <a:pPr algn="l"/>
             <a:r>
-              <a:rPr sz="1450" b="1" i="0">
+              <a:rPr sz="1400" b="1" i="0">
                 <a:solidFill>
                   <a:srgbClr val="F2A65A"/>
                 </a:solidFill>
                 <a:latin typeface="Cambria"/>
               </a:rPr>
-              <a:t>Three re-rankers, three honest failures</a:t>
+              <a:t>Four attempts at selection, and why the fourth worked</a:t>
             </a:r>
           </a:p>
         </p:txBody>
@@ -8010,7 +8127,7 @@
         <p:spPr>
           <a:xfrm>
             <a:off x="8001000" y="2331720"/>
-            <a:ext cx="3383280" cy="3291840"/>
+            <a:ext cx="3383280" cy="3383280"/>
           </a:xfrm>
           <a:prstGeom prst="rect">
             <a:avLst/>
@@ -8029,13 +8146,13 @@
               </a:spcAft>
             </a:pPr>
             <a:r>
-              <a:rPr sz="1000" b="1" i="0">
+              <a:rPr sz="950" b="1" i="0">
                 <a:solidFill>
                   <a:srgbClr val="FFFFFF"/>
                 </a:solidFill>
                 <a:latin typeface="Calibri"/>
               </a:rPr>
-              <a:t>PADM residual scoring</a:t>
+              <a:t>PADM residual scoring — overfit</a:t>
             </a:r>
           </a:p>
           <a:p>
@@ -8045,7 +8162,7 @@
               </a:spcAft>
             </a:pPr>
             <a:r>
-              <a:rPr sz="1000" b="0" i="0">
+              <a:rPr sz="950" b="0" i="0">
                 <a:solidFill>
                   <a:srgbClr val="9FB4C2"/>
                 </a:solidFill>
@@ -8061,7 +8178,7 @@
               </a:spcAft>
             </a:pPr>
             <a:r>
-              <a:rPr sz="1000" b="0" i="0">
+              <a:rPr sz="950" b="0" i="0">
                 <a:solidFill>
                   <a:srgbClr val="35424D"/>
                 </a:solidFill>
@@ -8077,13 +8194,13 @@
               </a:spcAft>
             </a:pPr>
             <a:r>
-              <a:rPr sz="1000" b="1" i="0">
+              <a:rPr sz="950" b="1" i="0">
                 <a:solidFill>
                   <a:srgbClr val="FFFFFF"/>
                 </a:solidFill>
                 <a:latin typeface="Calibri"/>
               </a:rPr>
-              <a:t>Coarse-level consensus</a:t>
+              <a:t>Coarse consensus — harmful</a:t>
             </a:r>
           </a:p>
           <a:p>
@@ -8093,13 +8210,13 @@
               </a:spcAft>
             </a:pPr>
             <a:r>
-              <a:rPr sz="1000" b="0" i="0">
+              <a:rPr sz="950" b="0" i="0">
                 <a:solidFill>
                   <a:srgbClr val="9FB4C2"/>
                 </a:solidFill>
                 <a:latin typeface="Calibri"/>
               </a:rPr>
-              <a:t>Assumed downsampling reveals landmarks. It cannot: the reference's footprint is smaller than a mat, so there is no landmark to reveal at any resolution.</a:t>
+              <a:t>Assumed downsampling reveals landmarks. It cannot: the reference's footprint is smaller than a mat, so there is nothing to reveal at any resolution.</a:t>
             </a:r>
           </a:p>
           <a:p>
@@ -8109,7 +8226,7 @@
               </a:spcAft>
             </a:pPr>
             <a:r>
-              <a:rPr sz="1000" b="0" i="0">
+              <a:rPr sz="950" b="0" i="0">
                 <a:solidFill>
                   <a:srgbClr val="35424D"/>
                 </a:solidFill>
@@ -8125,13 +8242,13 @@
               </a:spcAft>
             </a:pPr>
             <a:r>
-              <a:rPr sz="1000" b="1" i="0">
+              <a:rPr sz="950" b="1" i="0">
                 <a:solidFill>
                   <a:srgbClr val="FFFFFF"/>
                 </a:solidFill>
                 <a:latin typeface="Calibri"/>
               </a:rPr>
-              <a:t>Maximum-likelihood scoring</a:t>
+              <a:t>Maximum-likelihood — no gain</a:t>
             </a:r>
           </a:p>
           <a:p>
@@ -8141,13 +8258,61 @@
               </a:spcAft>
             </a:pPr>
             <a:r>
-              <a:rPr sz="1000" b="0" i="0">
+              <a:rPr sz="950" b="0" i="0">
                 <a:solidFill>
                   <a:srgbClr val="9FB4C2"/>
                 </a:solidFill>
                 <a:latin typeface="Calibri"/>
               </a:rPr>
-              <a:t>The noise really is signal-dependent, so ZNCC really is mis-weighted — but model mismatch is larger than photon noise, so weighting by photon variance sharpens the wrong term.</a:t>
+              <a:t>The noise really is signal-dependent, so ZNCC really is mis-weighted. But model mismatch is larger than photon noise, so weighting by photon variance sharpens the wrong term.</a:t>
+            </a:r>
+          </a:p>
+          <a:p>
+            <a:pPr algn="l">
+              <a:spcAft>
+                <a:spcPts val="200"/>
+              </a:spcAft>
+            </a:pPr>
+            <a:r>
+              <a:rPr sz="950" b="0" i="0">
+                <a:solidFill>
+                  <a:srgbClr val="35424D"/>
+                </a:solidFill>
+                <a:latin typeface="Calibri"/>
+              </a:rPr>
+              <a:t/>
+            </a:r>
+          </a:p>
+          <a:p>
+            <a:pPr algn="l">
+              <a:spcAft>
+                <a:spcPts val="200"/>
+              </a:spcAft>
+            </a:pPr>
+            <a:r>
+              <a:rPr sz="950" b="1" i="0">
+                <a:solidFill>
+                  <a:srgbClr val="F2A65A"/>
+                </a:solidFill>
+                <a:latin typeface="Calibri"/>
+              </a:rPr>
+              <a:t>Per-candidate pose refit — WORKS</a:t>
+            </a:r>
+          </a:p>
+          <a:p>
+            <a:pPr algn="l">
+              <a:spcAft>
+                <a:spcPts val="200"/>
+              </a:spcAft>
+            </a:pPr>
+            <a:r>
+              <a:rPr sz="950" b="0" i="0">
+                <a:solidFill>
+                  <a:srgbClr val="9FB4C2"/>
+                </a:solidFill>
+                <a:latin typeface="Calibri"/>
+              </a:rPr>
+              <a:t>Follows the line above: if mismatch dominates, reduce mismatch. Each candidate is re-SCORED at its own best pose — no new criterion, so it cannot invent a preference.</a:t>
             </a:r>
           </a:p>
         </p:txBody>
@@ -8160,8 +8325,8 @@
         </p:nvSpPr>
         <p:spPr>
           <a:xfrm>
-            <a:off x="548640" y="4892040"/>
-            <a:ext cx="6949440" cy="822960"/>
+            <a:off x="548640" y="4846320"/>
+            <a:ext cx="6949440" cy="914400"/>
           </a:xfrm>
           <a:prstGeom prst="rect">
             <a:avLst/>
@@ -8182,7 +8347,7 @@
                 </a:solidFill>
                 <a:latin typeface="Calibri"/>
               </a:rPr>
-              <a:t>The rule these bought: downsampling is free for measuring pose and ruinous for deciding identity — pose is a global low-frequency property, while identity lives only in the full-resolution aperiodic fingerprint.</a:t>
+              <a:t>Two rules these bought. Downsampling is free for measuring pose and ruinous for deciding identity — pose is a global low-frequency property, identity lives only in the full-resolution aperiodic fingerprint. And refinement fails gracefully while re-ranking fails destructively, so a selection stage must remove a handicap rather than introduce a criterion.</a:t>
             </a:r>
           </a:p>
         </p:txBody>
@@ -8291,8 +8456,8 @@
         </p:nvSpPr>
         <p:spPr>
           <a:xfrm>
-            <a:off x="548640" y="1417320"/>
-            <a:ext cx="5486400" cy="2331720"/>
+            <a:off x="548640" y="1371600"/>
+            <a:ext cx="5486400" cy="2514600"/>
           </a:xfrm>
           <a:prstGeom prst="roundRect">
             <a:avLst>
@@ -8339,7 +8504,7 @@
         </p:nvSpPr>
         <p:spPr>
           <a:xfrm>
-            <a:off x="822960" y="1600200"/>
+            <a:off x="822960" y="1536192"/>
             <a:ext cx="4937760" cy="292608"/>
           </a:xfrm>
           <a:prstGeom prst="rect">
@@ -8374,8 +8539,8 @@
         </p:nvSpPr>
         <p:spPr>
           <a:xfrm>
-            <a:off x="822960" y="2011680"/>
-            <a:ext cx="4937760" cy="1554480"/>
+            <a:off x="822960" y="1938528"/>
+            <a:ext cx="4937760" cy="1600200"/>
           </a:xfrm>
           <a:prstGeom prst="rect">
             <a:avLst/>
@@ -8400,7 +8565,7 @@
                 </a:solidFill>
                 <a:latin typeface="Calibri"/>
               </a:rPr>
-              <a:t>•  Euclidean error 893.89 px — a different site entirely</a:t>
+              <a:t>•  Euclidean error 893.90 px — a different site entirely</a:t>
             </a:r>
           </a:p>
           <a:p>
@@ -8448,7 +8613,7 @@
                 </a:solidFill>
                 <a:latin typeface="Calibri"/>
               </a:rPr>
-              <a:t>•  The winner sat 893.8 px away and matched just as well</a:t>
+              <a:t>•  The pair sits in the 'med' ambiguity stratum — no landmark in view</a:t>
             </a:r>
           </a:p>
         </p:txBody>
@@ -8461,7 +8626,7 @@
         </p:nvSpPr>
         <p:spPr>
           <a:xfrm>
-            <a:off x="822960" y="3401568"/>
+            <a:off x="822960" y="3547872"/>
             <a:ext cx="4937760" cy="274320"/>
           </a:xfrm>
           <a:prstGeom prst="rect">
@@ -8496,8 +8661,8 @@
         </p:nvSpPr>
         <p:spPr>
           <a:xfrm>
-            <a:off x="6309360" y="1417320"/>
-            <a:ext cx="5303520" cy="2331720"/>
+            <a:off x="6309360" y="1371600"/>
+            <a:ext cx="5303520" cy="2514600"/>
           </a:xfrm>
           <a:prstGeom prst="roundRect">
             <a:avLst>
@@ -8544,8 +8709,8 @@
         </p:nvSpPr>
         <p:spPr>
           <a:xfrm>
-            <a:off x="6583680" y="1600200"/>
-            <a:ext cx="4754880" cy="292608"/>
+            <a:off x="6583680" y="1536192"/>
+            <a:ext cx="4754880" cy="566928"/>
           </a:xfrm>
           <a:prstGeom prst="rect">
             <a:avLst/>
@@ -8579,8 +8744,8 @@
         </p:nvSpPr>
         <p:spPr>
           <a:xfrm>
-            <a:off x="6583680" y="1965960"/>
-            <a:ext cx="4754880" cy="457200"/>
+            <a:off x="6583680" y="2121408"/>
+            <a:ext cx="4754880" cy="384048"/>
           </a:xfrm>
           <a:prstGeom prst="rect">
             <a:avLst/>
@@ -8595,7 +8760,7 @@
           <a:p>
             <a:pPr algn="l"/>
             <a:r>
-              <a:rPr sz="1100" b="0" i="0">
+              <a:rPr sz="1050" b="0" i="0">
                 <a:solidFill>
                   <a:srgbClr val="5A6B78"/>
                 </a:solidFill>
@@ -8615,7 +8780,7 @@
           <p:nvPr/>
         </p:nvGraphicFramePr>
         <p:xfrm>
-          <a:off x="6583680" y="2487168"/>
+          <a:off x="6583680" y="2560320"/>
           <a:ext cx="4754880" cy="822960"/>
         </p:xfrm>
         <a:graphic>
@@ -8878,7 +9043,7 @@
                           </a:solidFill>
                           <a:latin typeface="Calibri"/>
                         </a:rPr>
-                        <a:t>67%</a:t>
+                        <a:t>56%</a:t>
                       </a:r>
                     </a:p>
                   </a:txBody>
@@ -8924,8 +9089,8 @@
         </p:nvSpPr>
         <p:spPr>
           <a:xfrm>
-            <a:off x="6583680" y="3429000"/>
-            <a:ext cx="4754880" cy="365760"/>
+            <a:off x="6583680" y="3529584"/>
+            <a:ext cx="4754880" cy="329184"/>
           </a:xfrm>
           <a:prstGeom prst="rect">
             <a:avLst/>
@@ -8940,13 +9105,13 @@
           <a:p>
             <a:pPr algn="l"/>
             <a:r>
-              <a:rPr sz="1000" b="0" i="1">
+              <a:rPr sz="950" b="0" i="1">
                 <a:solidFill>
                   <a:srgbClr val="5A6B78"/>
                 </a:solidFill>
                 <a:latin typeface="Calibri"/>
               </a:rPr>
-              <a:t>Six of the ten failures fall in those nine pairs. The method fails precisely where the information needed to succeed is absent — which is the honest definition of the problem's limit.</a:t>
+              <a:t>5 of the 9 failures fall in those 9 pairs. The method fails precisely where the information needed to succeed is absent — the honest definition of the problem's limit.</a:t>
             </a:r>
           </a:p>
         </p:txBody>
@@ -9064,7 +9229,7 @@
                 </a:solidFill>
                 <a:latin typeface="Calibri"/>
               </a:rPr>
-              <a:t>Selection is unsolved</a:t>
+              <a:t>Selection is still the cap</a:t>
             </a:r>
           </a:p>
         </p:txBody>
@@ -9099,7 +9264,7 @@
                 </a:solidFill>
                 <a:latin typeface="Calibri"/>
               </a:rPr>
-              <a:t>Every pass rate is capped by the mis-lock rate. The truth is in the top-20 on 39 of 40 pairs, so a perfect re-ranker would reach about 2.5%.</a:t>
+              <a:t>Every pass rate is capped by the mis-lock rate. The truth is in the top-20 on 27/30 pairs (90.0%), so a perfect re-ranker would still have room to roughly halve what remains.</a:t>
             </a:r>
           </a:p>
         </p:txBody>
@@ -9217,7 +9382,7 @@
                 </a:solidFill>
                 <a:latin typeface="Calibri"/>
               </a:rPr>
-              <a:t>About 231 ms per pair against a 300 ms goal. A three-step pose bracket gives roughly 260 ms and costs 2.5–5 points of mis-lock; we chose accuracy.</a:t>
+              <a:t>About 1004 ms per pair against a 300 ms goal. The per-candidate refit is most of it; top_k is the dial. We took 9 points of mis-lock for the time.</a:t>
             </a:r>
           </a:p>
         </p:txBody>
@@ -9477,7 +9642,7 @@
                 </a:solidFill>
                 <a:latin typeface="Cambria"/>
               </a:rPr>
-              <a:t>76.7% → 33.3%</a:t>
+              <a:t>76.7% → 30.0%</a:t>
             </a:r>
           </a:p>
         </p:txBody>
@@ -9593,7 +9758,7 @@
                 </a:solidFill>
                 <a:latin typeface="Cambria"/>
               </a:rPr>
-              <a:t>90.0% → 33.3%</a:t>
+              <a:t>90.0% → 16.7%</a:t>
             </a:r>
           </a:p>
         </p:txBody>
@@ -10183,7 +10348,7 @@
                 </a:solidFill>
                 <a:latin typeface="Calibri"/>
               </a:rPr>
-              <a:t>Next: a learned re-ranker — the correct answer is already in the candidate set on 39 of 40 pairs, and three hand-designed scorers have now failed in three different ways.</a:t>
+              <a:t>Next: the correct answer is still in the candidate set on 27/30 pairs, so selection remains the cap — and the one stage that beat it did so by removing a handicap, not by scoring harder.</a:t>
             </a:r>
           </a:p>
         </p:txBody>
@@ -15697,7 +15862,7 @@
                 </a:solidFill>
                 <a:latin typeface="Courier New"/>
               </a:rPr>
-              <a:t># single pair — prints exactly one line: "547.04,289.63"</a:t>
+              <a:t># single pair — prints exactly one line: "547.03,289.62"</a:t>
             </a:r>
           </a:p>
           <a:p>
@@ -15981,7 +16146,7 @@
                 </a:solidFill>
                 <a:latin typeface="Calibri"/>
               </a:rPr>
-              <a:t>One seeded RNG threaded through, single-threaded timing, pathlib only, no absolute paths. Developed on macOS and re-measured on Windows for this submission.</a:t>
+              <a:t>One seeded RNG threaded through, pathlib only, no absolute paths. Timing method and thread count are recorded with every run (OpenCV using 22 threads here). Developed on macOS and re-measured on Windows for this submission; accuracy reproduced to the digit on both.</a:t>
             </a:r>
           </a:p>
         </p:txBody>
@@ -17741,7 +17906,7 @@
                           </a:solidFill>
                           <a:latin typeface="Calibri"/>
                         </a:rPr>
-                        <a:t>27.5%</a:t>
+                        <a:t>25.0%</a:t>
                       </a:r>
                     </a:p>
                   </a:txBody>
@@ -17787,7 +17952,30 @@
                           </a:solidFill>
                           <a:latin typeface="Calibri"/>
                         </a:rPr>
-                        <a:t>72.5%</a:t>
+                        <a:t>75.0%</a:t>
+                      </a:r>
+                    </a:p>
+                  </a:txBody>
+                  <a:tcPr marL="54864" marR="54864" marT="18288" marB="18288" anchor="ctr">
+                    <a:solidFill>
+                      <a:srgbClr val="ECF1F4"/>
+                    </a:solidFill>
+                  </a:tcPr>
+                </a:tc>
+                <a:tc>
+                  <a:txBody>
+                    <a:bodyPr wrap="square"/>
+                    <a:lstStyle/>
+                    <a:p>
+                      <a:pPr algn="ctr"/>
+                      <a:r>
+                        <a:rPr sz="1100" b="0">
+                          <a:solidFill>
+                            <a:srgbClr val="35424D"/>
+                          </a:solidFill>
+                          <a:latin typeface="Calibri"/>
+                        </a:rPr>
+                        <a:t>75.0%</a:t>
                       </a:r>
                     </a:p>
                   </a:txBody>
@@ -17833,29 +18021,6 @@
                           </a:solidFill>
                           <a:latin typeface="Calibri"/>
                         </a:rPr>
-                        <a:t>70.0%</a:t>
-                      </a:r>
-                    </a:p>
-                  </a:txBody>
-                  <a:tcPr marL="54864" marR="54864" marT="18288" marB="18288" anchor="ctr">
-                    <a:solidFill>
-                      <a:srgbClr val="ECF1F4"/>
-                    </a:solidFill>
-                  </a:tcPr>
-                </a:tc>
-                <a:tc>
-                  <a:txBody>
-                    <a:bodyPr wrap="square"/>
-                    <a:lstStyle/>
-                    <a:p>
-                      <a:pPr algn="ctr"/>
-                      <a:r>
-                        <a:rPr sz="1100" b="0">
-                          <a:solidFill>
-                            <a:srgbClr val="35424D"/>
-                          </a:solidFill>
-                          <a:latin typeface="Calibri"/>
-                        </a:rPr>
                         <a:t>67.5%</a:t>
                       </a:r>
                     </a:p>
@@ -17879,7 +18044,7 @@
                           </a:solidFill>
                           <a:latin typeface="Calibri"/>
                         </a:rPr>
-                        <a:t>266 ms</a:t>
+                        <a:t>1036 ms</a:t>
                       </a:r>
                     </a:p>
                   </a:txBody>
@@ -18159,7 +18324,7 @@
                           </a:solidFill>
                           <a:latin typeface="Calibri"/>
                         </a:rPr>
-                        <a:t>33.3%</a:t>
+                        <a:t>30.0%</a:t>
                       </a:r>
                     </a:p>
                   </a:txBody>
@@ -18182,7 +18347,7 @@
                           </a:solidFill>
                           <a:latin typeface="Calibri"/>
                         </a:rPr>
-                        <a:t>0.556</a:t>
+                        <a:t>0.509</a:t>
                       </a:r>
                     </a:p>
                   </a:txBody>
@@ -18205,7 +18370,7 @@
                           </a:solidFill>
                           <a:latin typeface="Calibri"/>
                         </a:rPr>
-                        <a:t>66.7%</a:t>
+                        <a:t>70.0%</a:t>
                       </a:r>
                     </a:p>
                   </a:txBody>
@@ -18228,7 +18393,7 @@
                           </a:solidFill>
                           <a:latin typeface="Calibri"/>
                         </a:rPr>
-                        <a:t>66.7%</a:t>
+                        <a:t>70.0%</a:t>
                       </a:r>
                     </a:p>
                   </a:txBody>
@@ -18274,7 +18439,7 @@
                           </a:solidFill>
                           <a:latin typeface="Calibri"/>
                         </a:rPr>
-                        <a:t>46.7%</a:t>
+                        <a:t>50.0%</a:t>
                       </a:r>
                     </a:p>
                   </a:txBody>
@@ -18297,7 +18462,7 @@
                           </a:solidFill>
                           <a:latin typeface="Calibri"/>
                         </a:rPr>
-                        <a:t>231 ms</a:t>
+                        <a:t>1004 ms</a:t>
                       </a:r>
                     </a:p>
                   </a:txBody>
@@ -18577,7 +18742,7 @@
                           </a:solidFill>
                           <a:latin typeface="Calibri"/>
                         </a:rPr>
-                        <a:t>33.3%</a:t>
+                        <a:t>16.7%</a:t>
                       </a:r>
                     </a:p>
                   </a:txBody>
@@ -18600,7 +18765,7 @@
                           </a:solidFill>
                           <a:latin typeface="Calibri"/>
                         </a:rPr>
-                        <a:t>0.706</a:t>
+                        <a:t>0.587</a:t>
                       </a:r>
                     </a:p>
                   </a:txBody>
@@ -18623,7 +18788,7 @@
                           </a:solidFill>
                           <a:latin typeface="Calibri"/>
                         </a:rPr>
-                        <a:t>66.7%</a:t>
+                        <a:t>83.3%</a:t>
                       </a:r>
                     </a:p>
                   </a:txBody>
@@ -18646,7 +18811,7 @@
                           </a:solidFill>
                           <a:latin typeface="Calibri"/>
                         </a:rPr>
-                        <a:t>66.7%</a:t>
+                        <a:t>83.3%</a:t>
                       </a:r>
                     </a:p>
                   </a:txBody>
@@ -18669,7 +18834,7 @@
                           </a:solidFill>
                           <a:latin typeface="Calibri"/>
                         </a:rPr>
-                        <a:t>66.7%</a:t>
+                        <a:t>80.0%</a:t>
                       </a:r>
                     </a:p>
                   </a:txBody>
@@ -18692,7 +18857,7 @@
                           </a:solidFill>
                           <a:latin typeface="Calibri"/>
                         </a:rPr>
-                        <a:t>33.3%</a:t>
+                        <a:t>40.0%</a:t>
                       </a:r>
                     </a:p>
                   </a:txBody>
@@ -18715,7 +18880,7 @@
                           </a:solidFill>
                           <a:latin typeface="Calibri"/>
                         </a:rPr>
-                        <a:t>266 ms</a:t>
+                        <a:t>1115 ms</a:t>
                       </a:r>
                     </a:p>
                   </a:txBody>
@@ -18796,7 +18961,7 @@
                 <a:latin typeface="Calibri"/>
               </a:rPr>
               <a:t>On the sponsor's fixed 10:1 data the task is precision: median error improves from 1.102 px to 0.297 px and the sub-pixel pass rate rises from 17.5% to 67.5%.
-On our own data — the 9:1–11:1 and ±2° envelope the problem statement says will be tested — the baseline does not work at all (76.7% mis-lock against 33.3%). That axis is invisible to anyone validating only on the published generator, because it produces neither rotation nor scale variation.</a:t>
+On our own data — the 9:1–11:1 and ±2° envelope the problem statement says will be tested — the baseline does not work at all (76.7% mis-lock against 30.0%). That axis is invisible to anyone validating only on the published generator, because it produces neither rotation nor scale variation.</a:t>
             </a:r>
           </a:p>
         </p:txBody>
@@ -18849,7 +19014,7 @@
                 </a:solidFill>
                 <a:latin typeface="Calibri"/>
               </a:rPr>
-              <a:t>Windows 11 (AMD64) · Intel64 Family 6 Model 170 Stepping 4, Genui · Python 3.14.3 · OpenCV 5.0.0 · time.perf_counter() around load+localize, per pair, single-threaded</a:t>
+              <a:t>Windows 11 (AMD64) · Intel64 Family 6 Model 170 Stepping 4, Genui · Python 3.14.3 · OpenCV 5.0.0 · time.perf_counter() around load+localize, per pair, OpenCV using 22 thread(s), no warm-up discarded</a:t>
             </a:r>
           </a:p>
         </p:txBody>

--- a/solution_presentation.pptx
+++ b/solution_presentation.pptx
@@ -6696,7 +6696,7 @@
         </p:nvGraphicFramePr>
         <p:xfrm>
           <a:off x="548640" y="1572768"/>
-          <a:ext cx="6949440" cy="3017520"/>
+          <a:ext cx="6949440" cy="3291840"/>
         </p:xfrm>
         <a:graphic>
           <a:graphicData uri="http://schemas.openxmlformats.org/drawingml/2006/table">
@@ -7427,475 +7427,7 @@
                           </a:solidFill>
                           <a:latin typeface="Calibri"/>
                         </a:rPr>
-                        <a:t>+ pose: spectral lattice</a:t>
-                      </a:r>
-                    </a:p>
-                  </a:txBody>
-                  <a:tcPr marL="54864" marR="54864" marT="18288" marB="18288" anchor="ctr">
-                    <a:solidFill>
-                      <a:srgbClr val="ECF1F4"/>
-                    </a:solidFill>
-                  </a:tcPr>
-                </a:tc>
-                <a:tc>
-                  <a:txBody>
-                    <a:bodyPr wrap="square"/>
-                    <a:lstStyle/>
-                    <a:p>
-                      <a:pPr algn="ctr"/>
-                      <a:r>
-                        <a:rPr sz="1050" b="0">
-                          <a:solidFill>
-                            <a:srgbClr val="35424D"/>
-                          </a:solidFill>
-                          <a:latin typeface="Calibri"/>
-                        </a:rPr>
-                        <a:t>22.5%</a:t>
-                      </a:r>
-                    </a:p>
-                  </a:txBody>
-                  <a:tcPr marL="54864" marR="54864" marT="18288" marB="18288" anchor="ctr">
-                    <a:solidFill>
-                      <a:srgbClr val="ECF1F4"/>
-                    </a:solidFill>
-                  </a:tcPr>
-                </a:tc>
-                <a:tc>
-                  <a:txBody>
-                    <a:bodyPr wrap="square"/>
-                    <a:lstStyle/>
-                    <a:p>
-                      <a:pPr algn="ctr"/>
-                      <a:r>
-                        <a:rPr sz="1050" b="0">
-                          <a:solidFill>
-                            <a:srgbClr val="35424D"/>
-                          </a:solidFill>
-                          <a:latin typeface="Calibri"/>
-                        </a:rPr>
-                        <a:t>50.0%</a:t>
-                      </a:r>
-                    </a:p>
-                  </a:txBody>
-                  <a:tcPr marL="54864" marR="54864" marT="18288" marB="18288" anchor="ctr">
-                    <a:solidFill>
-                      <a:srgbClr val="ECF1F4"/>
-                    </a:solidFill>
-                  </a:tcPr>
-                </a:tc>
-                <a:tc>
-                  <a:txBody>
-                    <a:bodyPr wrap="square"/>
-                    <a:lstStyle/>
-                    <a:p>
-                      <a:pPr algn="ctr"/>
-                      <a:r>
-                        <a:rPr sz="1050" b="0">
-                          <a:solidFill>
-                            <a:srgbClr val="35424D"/>
-                          </a:solidFill>
-                          <a:latin typeface="Calibri"/>
-                        </a:rPr>
-                        <a:t>60.0%</a:t>
-                      </a:r>
-                    </a:p>
-                  </a:txBody>
-                  <a:tcPr marL="54864" marR="54864" marT="18288" marB="18288" anchor="ctr">
-                    <a:solidFill>
-                      <a:srgbClr val="ECF1F4"/>
-                    </a:solidFill>
-                  </a:tcPr>
-                </a:tc>
-                <a:tc>
-                  <a:txBody>
-                    <a:bodyPr wrap="square"/>
-                    <a:lstStyle/>
-                    <a:p>
-                      <a:pPr algn="ctr"/>
-                      <a:r>
-                        <a:rPr sz="1050" b="0">
-                          <a:solidFill>
-                            <a:srgbClr val="35424D"/>
-                          </a:solidFill>
-                          <a:latin typeface="Calibri"/>
-                        </a:rPr>
-                        <a:t>less accurate</a:t>
-                      </a:r>
-                    </a:p>
-                  </a:txBody>
-                  <a:tcPr marL="54864" marR="54864" marT="18288" marB="18288" anchor="ctr">
-                    <a:solidFill>
-                      <a:srgbClr val="ECF1F4"/>
-                    </a:solidFill>
-                  </a:tcPr>
-                </a:tc>
-              </a:tr>
-              <a:tr h="274320">
-                <a:tc>
-                  <a:txBody>
-                    <a:bodyPr wrap="square"/>
-                    <a:lstStyle/>
-                    <a:p>
-                      <a:pPr algn="l"/>
-                      <a:r>
-                        <a:rPr sz="1050" b="0">
-                          <a:solidFill>
-                            <a:srgbClr val="35424D"/>
-                          </a:solidFill>
-                          <a:latin typeface="Calibri"/>
-                        </a:rPr>
-                        <a:t>+ PADM residual re-ranking</a:t>
-                      </a:r>
-                    </a:p>
-                  </a:txBody>
-                  <a:tcPr marL="54864" marR="54864" marT="18288" marB="18288" anchor="ctr">
-                    <a:solidFill>
-                      <a:srgbClr val="FFFFFF"/>
-                    </a:solidFill>
-                  </a:tcPr>
-                </a:tc>
-                <a:tc>
-                  <a:txBody>
-                    <a:bodyPr wrap="square"/>
-                    <a:lstStyle/>
-                    <a:p>
-                      <a:pPr algn="ctr"/>
-                      <a:r>
-                        <a:rPr sz="1050" b="0">
-                          <a:solidFill>
-                            <a:srgbClr val="35424D"/>
-                          </a:solidFill>
-                          <a:latin typeface="Calibri"/>
-                        </a:rPr>
-                        <a:t>20.0%</a:t>
-                      </a:r>
-                    </a:p>
-                  </a:txBody>
-                  <a:tcPr marL="54864" marR="54864" marT="18288" marB="18288" anchor="ctr">
-                    <a:solidFill>
-                      <a:srgbClr val="FFFFFF"/>
-                    </a:solidFill>
-                  </a:tcPr>
-                </a:tc>
-                <a:tc>
-                  <a:txBody>
-                    <a:bodyPr wrap="square"/>
-                    <a:lstStyle/>
-                    <a:p>
-                      <a:pPr algn="ctr"/>
-                      <a:r>
-                        <a:rPr sz="1050" b="0">
-                          <a:solidFill>
-                            <a:srgbClr val="35424D"/>
-                          </a:solidFill>
-                          <a:latin typeface="Calibri"/>
-                        </a:rPr>
-                        <a:t>70.0%</a:t>
-                      </a:r>
-                    </a:p>
-                  </a:txBody>
-                  <a:tcPr marL="54864" marR="54864" marT="18288" marB="18288" anchor="ctr">
-                    <a:solidFill>
-                      <a:srgbClr val="FFFFFF"/>
-                    </a:solidFill>
-                  </a:tcPr>
-                </a:tc>
-                <a:tc>
-                  <a:txBody>
-                    <a:bodyPr wrap="square"/>
-                    <a:lstStyle/>
-                    <a:p>
-                      <a:pPr algn="ctr"/>
-                      <a:r>
-                        <a:rPr sz="1050" b="0">
-                          <a:solidFill>
-                            <a:srgbClr val="35424D"/>
-                          </a:solidFill>
-                          <a:latin typeface="Calibri"/>
-                        </a:rPr>
-                        <a:t>80.0%</a:t>
-                      </a:r>
-                    </a:p>
-                  </a:txBody>
-                  <a:tcPr marL="54864" marR="54864" marT="18288" marB="18288" anchor="ctr">
-                    <a:solidFill>
-                      <a:srgbClr val="FFFFFF"/>
-                    </a:solidFill>
-                  </a:tcPr>
-                </a:tc>
-                <a:tc>
-                  <a:txBody>
-                    <a:bodyPr wrap="square"/>
-                    <a:lstStyle/>
-                    <a:p>
-                      <a:pPr algn="ctr"/>
-                      <a:r>
-                        <a:rPr sz="1050" b="0">
-                          <a:solidFill>
-                            <a:srgbClr val="35424D"/>
-                          </a:solidFill>
-                          <a:latin typeface="Calibri"/>
-                        </a:rPr>
-                        <a:t>overfit</a:t>
-                      </a:r>
-                    </a:p>
-                  </a:txBody>
-                  <a:tcPr marL="54864" marR="54864" marT="18288" marB="18288" anchor="ctr">
-                    <a:solidFill>
-                      <a:srgbClr val="FFFFFF"/>
-                    </a:solidFill>
-                  </a:tcPr>
-                </a:tc>
-              </a:tr>
-              <a:tr h="274320">
-                <a:tc>
-                  <a:txBody>
-                    <a:bodyPr wrap="square"/>
-                    <a:lstStyle/>
-                    <a:p>
-                      <a:pPr algn="l"/>
-                      <a:r>
-                        <a:rPr sz="1050" b="0">
-                          <a:solidFill>
-                            <a:srgbClr val="35424D"/>
-                          </a:solidFill>
-                          <a:latin typeface="Calibri"/>
-                        </a:rPr>
-                        <a:t>+ max-likelihood re-ranking</a:t>
-                      </a:r>
-                    </a:p>
-                  </a:txBody>
-                  <a:tcPr marL="54864" marR="54864" marT="18288" marB="18288" anchor="ctr">
-                    <a:solidFill>
-                      <a:srgbClr val="ECF1F4"/>
-                    </a:solidFill>
-                  </a:tcPr>
-                </a:tc>
-                <a:tc>
-                  <a:txBody>
-                    <a:bodyPr wrap="square"/>
-                    <a:lstStyle/>
-                    <a:p>
-                      <a:pPr algn="ctr"/>
-                      <a:r>
-                        <a:rPr sz="1050" b="0">
-                          <a:solidFill>
-                            <a:srgbClr val="35424D"/>
-                          </a:solidFill>
-                          <a:latin typeface="Calibri"/>
-                        </a:rPr>
-                        <a:t>22.5%</a:t>
-                      </a:r>
-                    </a:p>
-                  </a:txBody>
-                  <a:tcPr marL="54864" marR="54864" marT="18288" marB="18288" anchor="ctr">
-                    <a:solidFill>
-                      <a:srgbClr val="ECF1F4"/>
-                    </a:solidFill>
-                  </a:tcPr>
-                </a:tc>
-                <a:tc>
-                  <a:txBody>
-                    <a:bodyPr wrap="square"/>
-                    <a:lstStyle/>
-                    <a:p>
-                      <a:pPr algn="ctr"/>
-                      <a:r>
-                        <a:rPr sz="1050" b="0">
-                          <a:solidFill>
-                            <a:srgbClr val="35424D"/>
-                          </a:solidFill>
-                          <a:latin typeface="Calibri"/>
-                        </a:rPr>
-                        <a:t>43.3%</a:t>
-                      </a:r>
-                    </a:p>
-                  </a:txBody>
-                  <a:tcPr marL="54864" marR="54864" marT="18288" marB="18288" anchor="ctr">
-                    <a:solidFill>
-                      <a:srgbClr val="ECF1F4"/>
-                    </a:solidFill>
-                  </a:tcPr>
-                </a:tc>
-                <a:tc>
-                  <a:txBody>
-                    <a:bodyPr wrap="square"/>
-                    <a:lstStyle/>
-                    <a:p>
-                      <a:pPr algn="ctr"/>
-                      <a:r>
-                        <a:rPr sz="1050" b="0">
-                          <a:solidFill>
-                            <a:srgbClr val="35424D"/>
-                          </a:solidFill>
-                          <a:latin typeface="Calibri"/>
-                        </a:rPr>
-                        <a:t>50.0%</a:t>
-                      </a:r>
-                    </a:p>
-                  </a:txBody>
-                  <a:tcPr marL="54864" marR="54864" marT="18288" marB="18288" anchor="ctr">
-                    <a:solidFill>
-                      <a:srgbClr val="ECF1F4"/>
-                    </a:solidFill>
-                  </a:tcPr>
-                </a:tc>
-                <a:tc>
-                  <a:txBody>
-                    <a:bodyPr wrap="square"/>
-                    <a:lstStyle/>
-                    <a:p>
-                      <a:pPr algn="ctr"/>
-                      <a:r>
-                        <a:rPr sz="1050" b="0">
-                          <a:solidFill>
-                            <a:srgbClr val="35424D"/>
-                          </a:solidFill>
-                          <a:latin typeface="Calibri"/>
-                        </a:rPr>
-                        <a:t>no gain</a:t>
-                      </a:r>
-                    </a:p>
-                  </a:txBody>
-                  <a:tcPr marL="54864" marR="54864" marT="18288" marB="18288" anchor="ctr">
-                    <a:solidFill>
-                      <a:srgbClr val="ECF1F4"/>
-                    </a:solidFill>
-                  </a:tcPr>
-                </a:tc>
-              </a:tr>
-              <a:tr h="274320">
-                <a:tc>
-                  <a:txBody>
-                    <a:bodyPr wrap="square"/>
-                    <a:lstStyle/>
-                    <a:p>
-                      <a:pPr algn="l"/>
-                      <a:r>
-                        <a:rPr sz="1050" b="0">
-                          <a:solidFill>
-                            <a:srgbClr val="35424D"/>
-                          </a:solidFill>
-                          <a:latin typeface="Calibri"/>
-                        </a:rPr>
-                        <a:t>+ coarse-level consensus</a:t>
-                      </a:r>
-                    </a:p>
-                  </a:txBody>
-                  <a:tcPr marL="54864" marR="54864" marT="18288" marB="18288" anchor="ctr">
-                    <a:solidFill>
-                      <a:srgbClr val="FFFFFF"/>
-                    </a:solidFill>
-                  </a:tcPr>
-                </a:tc>
-                <a:tc>
-                  <a:txBody>
-                    <a:bodyPr wrap="square"/>
-                    <a:lstStyle/>
-                    <a:p>
-                      <a:pPr algn="ctr"/>
-                      <a:r>
-                        <a:rPr sz="1050" b="0">
-                          <a:solidFill>
-                            <a:srgbClr val="35424D"/>
-                          </a:solidFill>
-                          <a:latin typeface="Calibri"/>
-                        </a:rPr>
-                        <a:t>62.5%</a:t>
-                      </a:r>
-                    </a:p>
-                  </a:txBody>
-                  <a:tcPr marL="54864" marR="54864" marT="18288" marB="18288" anchor="ctr">
-                    <a:solidFill>
-                      <a:srgbClr val="FFFFFF"/>
-                    </a:solidFill>
-                  </a:tcPr>
-                </a:tc>
-                <a:tc>
-                  <a:txBody>
-                    <a:bodyPr wrap="square"/>
-                    <a:lstStyle/>
-                    <a:p>
-                      <a:pPr algn="ctr"/>
-                      <a:r>
-                        <a:rPr sz="1050" b="0">
-                          <a:solidFill>
-                            <a:srgbClr val="35424D"/>
-                          </a:solidFill>
-                          <a:latin typeface="Calibri"/>
-                        </a:rPr>
-                        <a:t>76.7%</a:t>
-                      </a:r>
-                    </a:p>
-                  </a:txBody>
-                  <a:tcPr marL="54864" marR="54864" marT="18288" marB="18288" anchor="ctr">
-                    <a:solidFill>
-                      <a:srgbClr val="FFFFFF"/>
-                    </a:solidFill>
-                  </a:tcPr>
-                </a:tc>
-                <a:tc>
-                  <a:txBody>
-                    <a:bodyPr wrap="square"/>
-                    <a:lstStyle/>
-                    <a:p>
-                      <a:pPr algn="ctr"/>
-                      <a:r>
-                        <a:rPr sz="1050" b="0">
-                          <a:solidFill>
-                            <a:srgbClr val="35424D"/>
-                          </a:solidFill>
-                          <a:latin typeface="Calibri"/>
-                        </a:rPr>
-                        <a:t>36.7%</a:t>
-                      </a:r>
-                    </a:p>
-                  </a:txBody>
-                  <a:tcPr marL="54864" marR="54864" marT="18288" marB="18288" anchor="ctr">
-                    <a:solidFill>
-                      <a:srgbClr val="FFFFFF"/>
-                    </a:solidFill>
-                  </a:tcPr>
-                </a:tc>
-                <a:tc>
-                  <a:txBody>
-                    <a:bodyPr wrap="square"/>
-                    <a:lstStyle/>
-                    <a:p>
-                      <a:pPr algn="ctr"/>
-                      <a:r>
-                        <a:rPr sz="1050" b="0">
-                          <a:solidFill>
-                            <a:srgbClr val="35424D"/>
-                          </a:solidFill>
-                          <a:latin typeface="Calibri"/>
-                        </a:rPr>
-                        <a:t>harmful</a:t>
-                      </a:r>
-                    </a:p>
-                  </a:txBody>
-                  <a:tcPr marL="54864" marR="54864" marT="18288" marB="18288" anchor="ctr">
-                    <a:solidFill>
-                      <a:srgbClr val="FFFFFF"/>
-                    </a:solidFill>
-                  </a:tcPr>
-                </a:tc>
-              </a:tr>
-              <a:tr h="274320">
-                <a:tc>
-                  <a:txBody>
-                    <a:bodyPr wrap="square"/>
-                    <a:lstStyle/>
-                    <a:p>
-                      <a:pPr algn="l"/>
-                      <a:r>
-                        <a:rPr sz="1050" b="0">
-                          <a:solidFill>
-                            <a:srgbClr val="35424D"/>
-                          </a:solidFill>
-                          <a:latin typeface="Calibri"/>
-                        </a:rPr>
-                        <a:t>+ row destriping</a:t>
+                        <a:t>+ spec's centre rule</a:t>
                       </a:r>
                     </a:p>
                   </a:txBody>
@@ -7941,7 +7473,7 @@
                           </a:solidFill>
                           <a:latin typeface="Calibri"/>
                         </a:rPr>
-                        <a:t>90.0%</a:t>
+                        <a:t>26.7%</a:t>
                       </a:r>
                     </a:p>
                   </a:txBody>
@@ -7964,7 +7496,475 @@
                           </a:solidFill>
                           <a:latin typeface="Calibri"/>
                         </a:rPr>
-                        <a:t>90.0%</a:t>
+                        <a:t>20.0%</a:t>
+                      </a:r>
+                    </a:p>
+                  </a:txBody>
+                  <a:tcPr marL="54864" marR="54864" marT="18288" marB="18288" anchor="ctr">
+                    <a:solidFill>
+                      <a:srgbClr val="ECF1F4"/>
+                    </a:solidFill>
+                  </a:tcPr>
+                </a:tc>
+                <a:tc>
+                  <a:txBody>
+                    <a:bodyPr wrap="square"/>
+                    <a:lstStyle/>
+                    <a:p>
+                      <a:pPr algn="ctr"/>
+                      <a:r>
+                        <a:rPr sz="1050" b="0">
+                          <a:solidFill>
+                            <a:srgbClr val="35424D"/>
+                          </a:solidFill>
+                          <a:latin typeface="Calibri"/>
+                        </a:rPr>
+                        <a:t>prior absent</a:t>
+                      </a:r>
+                    </a:p>
+                  </a:txBody>
+                  <a:tcPr marL="54864" marR="54864" marT="18288" marB="18288" anchor="ctr">
+                    <a:solidFill>
+                      <a:srgbClr val="ECF1F4"/>
+                    </a:solidFill>
+                  </a:tcPr>
+                </a:tc>
+              </a:tr>
+              <a:tr h="274320">
+                <a:tc>
+                  <a:txBody>
+                    <a:bodyPr wrap="square"/>
+                    <a:lstStyle/>
+                    <a:p>
+                      <a:pPr algn="l"/>
+                      <a:r>
+                        <a:rPr sz="1050" b="0">
+                          <a:solidFill>
+                            <a:srgbClr val="35424D"/>
+                          </a:solidFill>
+                          <a:latin typeface="Calibri"/>
+                        </a:rPr>
+                        <a:t>+ pose: spectral lattice</a:t>
+                      </a:r>
+                    </a:p>
+                  </a:txBody>
+                  <a:tcPr marL="54864" marR="54864" marT="18288" marB="18288" anchor="ctr">
+                    <a:solidFill>
+                      <a:srgbClr val="FFFFFF"/>
+                    </a:solidFill>
+                  </a:tcPr>
+                </a:tc>
+                <a:tc>
+                  <a:txBody>
+                    <a:bodyPr wrap="square"/>
+                    <a:lstStyle/>
+                    <a:p>
+                      <a:pPr algn="ctr"/>
+                      <a:r>
+                        <a:rPr sz="1050" b="0">
+                          <a:solidFill>
+                            <a:srgbClr val="35424D"/>
+                          </a:solidFill>
+                          <a:latin typeface="Calibri"/>
+                        </a:rPr>
+                        <a:t>22.5%</a:t>
+                      </a:r>
+                    </a:p>
+                  </a:txBody>
+                  <a:tcPr marL="54864" marR="54864" marT="18288" marB="18288" anchor="ctr">
+                    <a:solidFill>
+                      <a:srgbClr val="FFFFFF"/>
+                    </a:solidFill>
+                  </a:tcPr>
+                </a:tc>
+                <a:tc>
+                  <a:txBody>
+                    <a:bodyPr wrap="square"/>
+                    <a:lstStyle/>
+                    <a:p>
+                      <a:pPr algn="ctr"/>
+                      <a:r>
+                        <a:rPr sz="1050" b="0">
+                          <a:solidFill>
+                            <a:srgbClr val="35424D"/>
+                          </a:solidFill>
+                          <a:latin typeface="Calibri"/>
+                        </a:rPr>
+                        <a:t>50.0%</a:t>
+                      </a:r>
+                    </a:p>
+                  </a:txBody>
+                  <a:tcPr marL="54864" marR="54864" marT="18288" marB="18288" anchor="ctr">
+                    <a:solidFill>
+                      <a:srgbClr val="FFFFFF"/>
+                    </a:solidFill>
+                  </a:tcPr>
+                </a:tc>
+                <a:tc>
+                  <a:txBody>
+                    <a:bodyPr wrap="square"/>
+                    <a:lstStyle/>
+                    <a:p>
+                      <a:pPr algn="ctr"/>
+                      <a:r>
+                        <a:rPr sz="1050" b="0">
+                          <a:solidFill>
+                            <a:srgbClr val="35424D"/>
+                          </a:solidFill>
+                          <a:latin typeface="Calibri"/>
+                        </a:rPr>
+                        <a:t>60.0%</a:t>
+                      </a:r>
+                    </a:p>
+                  </a:txBody>
+                  <a:tcPr marL="54864" marR="54864" marT="18288" marB="18288" anchor="ctr">
+                    <a:solidFill>
+                      <a:srgbClr val="FFFFFF"/>
+                    </a:solidFill>
+                  </a:tcPr>
+                </a:tc>
+                <a:tc>
+                  <a:txBody>
+                    <a:bodyPr wrap="square"/>
+                    <a:lstStyle/>
+                    <a:p>
+                      <a:pPr algn="ctr"/>
+                      <a:r>
+                        <a:rPr sz="1050" b="0">
+                          <a:solidFill>
+                            <a:srgbClr val="35424D"/>
+                          </a:solidFill>
+                          <a:latin typeface="Calibri"/>
+                        </a:rPr>
+                        <a:t>less accurate</a:t>
+                      </a:r>
+                    </a:p>
+                  </a:txBody>
+                  <a:tcPr marL="54864" marR="54864" marT="18288" marB="18288" anchor="ctr">
+                    <a:solidFill>
+                      <a:srgbClr val="FFFFFF"/>
+                    </a:solidFill>
+                  </a:tcPr>
+                </a:tc>
+              </a:tr>
+              <a:tr h="274320">
+                <a:tc>
+                  <a:txBody>
+                    <a:bodyPr wrap="square"/>
+                    <a:lstStyle/>
+                    <a:p>
+                      <a:pPr algn="l"/>
+                      <a:r>
+                        <a:rPr sz="1050" b="0">
+                          <a:solidFill>
+                            <a:srgbClr val="35424D"/>
+                          </a:solidFill>
+                          <a:latin typeface="Calibri"/>
+                        </a:rPr>
+                        <a:t>+ PADM residual re-ranking</a:t>
+                      </a:r>
+                    </a:p>
+                  </a:txBody>
+                  <a:tcPr marL="54864" marR="54864" marT="18288" marB="18288" anchor="ctr">
+                    <a:solidFill>
+                      <a:srgbClr val="ECF1F4"/>
+                    </a:solidFill>
+                  </a:tcPr>
+                </a:tc>
+                <a:tc>
+                  <a:txBody>
+                    <a:bodyPr wrap="square"/>
+                    <a:lstStyle/>
+                    <a:p>
+                      <a:pPr algn="ctr"/>
+                      <a:r>
+                        <a:rPr sz="1050" b="0">
+                          <a:solidFill>
+                            <a:srgbClr val="35424D"/>
+                          </a:solidFill>
+                          <a:latin typeface="Calibri"/>
+                        </a:rPr>
+                        <a:t>27.5%</a:t>
+                      </a:r>
+                    </a:p>
+                  </a:txBody>
+                  <a:tcPr marL="54864" marR="54864" marT="18288" marB="18288" anchor="ctr">
+                    <a:solidFill>
+                      <a:srgbClr val="ECF1F4"/>
+                    </a:solidFill>
+                  </a:tcPr>
+                </a:tc>
+                <a:tc>
+                  <a:txBody>
+                    <a:bodyPr wrap="square"/>
+                    <a:lstStyle/>
+                    <a:p>
+                      <a:pPr algn="ctr"/>
+                      <a:r>
+                        <a:rPr sz="1050" b="0">
+                          <a:solidFill>
+                            <a:srgbClr val="35424D"/>
+                          </a:solidFill>
+                          <a:latin typeface="Calibri"/>
+                        </a:rPr>
+                        <a:t>70.0%</a:t>
+                      </a:r>
+                    </a:p>
+                  </a:txBody>
+                  <a:tcPr marL="54864" marR="54864" marT="18288" marB="18288" anchor="ctr">
+                    <a:solidFill>
+                      <a:srgbClr val="ECF1F4"/>
+                    </a:solidFill>
+                  </a:tcPr>
+                </a:tc>
+                <a:tc>
+                  <a:txBody>
+                    <a:bodyPr wrap="square"/>
+                    <a:lstStyle/>
+                    <a:p>
+                      <a:pPr algn="ctr"/>
+                      <a:r>
+                        <a:rPr sz="1050" b="0">
+                          <a:solidFill>
+                            <a:srgbClr val="35424D"/>
+                          </a:solidFill>
+                          <a:latin typeface="Calibri"/>
+                        </a:rPr>
+                        <a:t>73.3%</a:t>
+                      </a:r>
+                    </a:p>
+                  </a:txBody>
+                  <a:tcPr marL="54864" marR="54864" marT="18288" marB="18288" anchor="ctr">
+                    <a:solidFill>
+                      <a:srgbClr val="ECF1F4"/>
+                    </a:solidFill>
+                  </a:tcPr>
+                </a:tc>
+                <a:tc>
+                  <a:txBody>
+                    <a:bodyPr wrap="square"/>
+                    <a:lstStyle/>
+                    <a:p>
+                      <a:pPr algn="ctr"/>
+                      <a:r>
+                        <a:rPr sz="1050" b="0">
+                          <a:solidFill>
+                            <a:srgbClr val="35424D"/>
+                          </a:solidFill>
+                          <a:latin typeface="Calibri"/>
+                        </a:rPr>
+                        <a:t>overfit</a:t>
+                      </a:r>
+                    </a:p>
+                  </a:txBody>
+                  <a:tcPr marL="54864" marR="54864" marT="18288" marB="18288" anchor="ctr">
+                    <a:solidFill>
+                      <a:srgbClr val="ECF1F4"/>
+                    </a:solidFill>
+                  </a:tcPr>
+                </a:tc>
+              </a:tr>
+              <a:tr h="274320">
+                <a:tc>
+                  <a:txBody>
+                    <a:bodyPr wrap="square"/>
+                    <a:lstStyle/>
+                    <a:p>
+                      <a:pPr algn="l"/>
+                      <a:r>
+                        <a:rPr sz="1050" b="0">
+                          <a:solidFill>
+                            <a:srgbClr val="35424D"/>
+                          </a:solidFill>
+                          <a:latin typeface="Calibri"/>
+                        </a:rPr>
+                        <a:t>+ max-likelihood re-ranking</a:t>
+                      </a:r>
+                    </a:p>
+                  </a:txBody>
+                  <a:tcPr marL="54864" marR="54864" marT="18288" marB="18288" anchor="ctr">
+                    <a:solidFill>
+                      <a:srgbClr val="FFFFFF"/>
+                    </a:solidFill>
+                  </a:tcPr>
+                </a:tc>
+                <a:tc>
+                  <a:txBody>
+                    <a:bodyPr wrap="square"/>
+                    <a:lstStyle/>
+                    <a:p>
+                      <a:pPr algn="ctr"/>
+                      <a:r>
+                        <a:rPr sz="1050" b="0">
+                          <a:solidFill>
+                            <a:srgbClr val="35424D"/>
+                          </a:solidFill>
+                          <a:latin typeface="Calibri"/>
+                        </a:rPr>
+                        <a:t>22.5%</a:t>
+                      </a:r>
+                    </a:p>
+                  </a:txBody>
+                  <a:tcPr marL="54864" marR="54864" marT="18288" marB="18288" anchor="ctr">
+                    <a:solidFill>
+                      <a:srgbClr val="FFFFFF"/>
+                    </a:solidFill>
+                  </a:tcPr>
+                </a:tc>
+                <a:tc>
+                  <a:txBody>
+                    <a:bodyPr wrap="square"/>
+                    <a:lstStyle/>
+                    <a:p>
+                      <a:pPr algn="ctr"/>
+                      <a:r>
+                        <a:rPr sz="1050" b="0">
+                          <a:solidFill>
+                            <a:srgbClr val="35424D"/>
+                          </a:solidFill>
+                          <a:latin typeface="Calibri"/>
+                        </a:rPr>
+                        <a:t>43.3%</a:t>
+                      </a:r>
+                    </a:p>
+                  </a:txBody>
+                  <a:tcPr marL="54864" marR="54864" marT="18288" marB="18288" anchor="ctr">
+                    <a:solidFill>
+                      <a:srgbClr val="FFFFFF"/>
+                    </a:solidFill>
+                  </a:tcPr>
+                </a:tc>
+                <a:tc>
+                  <a:txBody>
+                    <a:bodyPr wrap="square"/>
+                    <a:lstStyle/>
+                    <a:p>
+                      <a:pPr algn="ctr"/>
+                      <a:r>
+                        <a:rPr sz="1050" b="0">
+                          <a:solidFill>
+                            <a:srgbClr val="35424D"/>
+                          </a:solidFill>
+                          <a:latin typeface="Calibri"/>
+                        </a:rPr>
+                        <a:t>50.0%</a:t>
+                      </a:r>
+                    </a:p>
+                  </a:txBody>
+                  <a:tcPr marL="54864" marR="54864" marT="18288" marB="18288" anchor="ctr">
+                    <a:solidFill>
+                      <a:srgbClr val="FFFFFF"/>
+                    </a:solidFill>
+                  </a:tcPr>
+                </a:tc>
+                <a:tc>
+                  <a:txBody>
+                    <a:bodyPr wrap="square"/>
+                    <a:lstStyle/>
+                    <a:p>
+                      <a:pPr algn="ctr"/>
+                      <a:r>
+                        <a:rPr sz="1050" b="0">
+                          <a:solidFill>
+                            <a:srgbClr val="35424D"/>
+                          </a:solidFill>
+                          <a:latin typeface="Calibri"/>
+                        </a:rPr>
+                        <a:t>no gain</a:t>
+                      </a:r>
+                    </a:p>
+                  </a:txBody>
+                  <a:tcPr marL="54864" marR="54864" marT="18288" marB="18288" anchor="ctr">
+                    <a:solidFill>
+                      <a:srgbClr val="FFFFFF"/>
+                    </a:solidFill>
+                  </a:tcPr>
+                </a:tc>
+              </a:tr>
+              <a:tr h="274320">
+                <a:tc>
+                  <a:txBody>
+                    <a:bodyPr wrap="square"/>
+                    <a:lstStyle/>
+                    <a:p>
+                      <a:pPr algn="l"/>
+                      <a:r>
+                        <a:rPr sz="1050" b="0">
+                          <a:solidFill>
+                            <a:srgbClr val="35424D"/>
+                          </a:solidFill>
+                          <a:latin typeface="Calibri"/>
+                        </a:rPr>
+                        <a:t>+ coarse-level consensus</a:t>
+                      </a:r>
+                    </a:p>
+                  </a:txBody>
+                  <a:tcPr marL="54864" marR="54864" marT="18288" marB="18288" anchor="ctr">
+                    <a:solidFill>
+                      <a:srgbClr val="ECF1F4"/>
+                    </a:solidFill>
+                  </a:tcPr>
+                </a:tc>
+                <a:tc>
+                  <a:txBody>
+                    <a:bodyPr wrap="square"/>
+                    <a:lstStyle/>
+                    <a:p>
+                      <a:pPr algn="ctr"/>
+                      <a:r>
+                        <a:rPr sz="1050" b="0">
+                          <a:solidFill>
+                            <a:srgbClr val="35424D"/>
+                          </a:solidFill>
+                          <a:latin typeface="Calibri"/>
+                        </a:rPr>
+                        <a:t>62.5%</a:t>
+                      </a:r>
+                    </a:p>
+                  </a:txBody>
+                  <a:tcPr marL="54864" marR="54864" marT="18288" marB="18288" anchor="ctr">
+                    <a:solidFill>
+                      <a:srgbClr val="ECF1F4"/>
+                    </a:solidFill>
+                  </a:tcPr>
+                </a:tc>
+                <a:tc>
+                  <a:txBody>
+                    <a:bodyPr wrap="square"/>
+                    <a:lstStyle/>
+                    <a:p>
+                      <a:pPr algn="ctr"/>
+                      <a:r>
+                        <a:rPr sz="1050" b="0">
+                          <a:solidFill>
+                            <a:srgbClr val="35424D"/>
+                          </a:solidFill>
+                          <a:latin typeface="Calibri"/>
+                        </a:rPr>
+                        <a:t>76.7%</a:t>
+                      </a:r>
+                    </a:p>
+                  </a:txBody>
+                  <a:tcPr marL="54864" marR="54864" marT="18288" marB="18288" anchor="ctr">
+                    <a:solidFill>
+                      <a:srgbClr val="ECF1F4"/>
+                    </a:solidFill>
+                  </a:tcPr>
+                </a:tc>
+                <a:tc>
+                  <a:txBody>
+                    <a:bodyPr wrap="square"/>
+                    <a:lstStyle/>
+                    <a:p>
+                      <a:pPr algn="ctr"/>
+                      <a:r>
+                        <a:rPr sz="1050" b="0">
+                          <a:solidFill>
+                            <a:srgbClr val="35424D"/>
+                          </a:solidFill>
+                          <a:latin typeface="Calibri"/>
+                        </a:rPr>
+                        <a:t>36.7%</a:t>
                       </a:r>
                     </a:p>
                   </a:txBody>
@@ -7998,6 +7998,123 @@
                   </a:tcPr>
                 </a:tc>
               </a:tr>
+              <a:tr h="274320">
+                <a:tc>
+                  <a:txBody>
+                    <a:bodyPr wrap="square"/>
+                    <a:lstStyle/>
+                    <a:p>
+                      <a:pPr algn="l"/>
+                      <a:r>
+                        <a:rPr sz="1050" b="0">
+                          <a:solidFill>
+                            <a:srgbClr val="35424D"/>
+                          </a:solidFill>
+                          <a:latin typeface="Calibri"/>
+                        </a:rPr>
+                        <a:t>+ row destriping</a:t>
+                      </a:r>
+                    </a:p>
+                  </a:txBody>
+                  <a:tcPr marL="54864" marR="54864" marT="18288" marB="18288" anchor="ctr">
+                    <a:solidFill>
+                      <a:srgbClr val="FFFFFF"/>
+                    </a:solidFill>
+                  </a:tcPr>
+                </a:tc>
+                <a:tc>
+                  <a:txBody>
+                    <a:bodyPr wrap="square"/>
+                    <a:lstStyle/>
+                    <a:p>
+                      <a:pPr algn="ctr"/>
+                      <a:r>
+                        <a:rPr sz="1050" b="0">
+                          <a:solidFill>
+                            <a:srgbClr val="35424D"/>
+                          </a:solidFill>
+                          <a:latin typeface="Calibri"/>
+                        </a:rPr>
+                        <a:t>35.0%</a:t>
+                      </a:r>
+                    </a:p>
+                  </a:txBody>
+                  <a:tcPr marL="54864" marR="54864" marT="18288" marB="18288" anchor="ctr">
+                    <a:solidFill>
+                      <a:srgbClr val="FFFFFF"/>
+                    </a:solidFill>
+                  </a:tcPr>
+                </a:tc>
+                <a:tc>
+                  <a:txBody>
+                    <a:bodyPr wrap="square"/>
+                    <a:lstStyle/>
+                    <a:p>
+                      <a:pPr algn="ctr"/>
+                      <a:r>
+                        <a:rPr sz="1050" b="0">
+                          <a:solidFill>
+                            <a:srgbClr val="35424D"/>
+                          </a:solidFill>
+                          <a:latin typeface="Calibri"/>
+                        </a:rPr>
+                        <a:t>90.0%</a:t>
+                      </a:r>
+                    </a:p>
+                  </a:txBody>
+                  <a:tcPr marL="54864" marR="54864" marT="18288" marB="18288" anchor="ctr">
+                    <a:solidFill>
+                      <a:srgbClr val="FFFFFF"/>
+                    </a:solidFill>
+                  </a:tcPr>
+                </a:tc>
+                <a:tc>
+                  <a:txBody>
+                    <a:bodyPr wrap="square"/>
+                    <a:lstStyle/>
+                    <a:p>
+                      <a:pPr algn="ctr"/>
+                      <a:r>
+                        <a:rPr sz="1050" b="0">
+                          <a:solidFill>
+                            <a:srgbClr val="35424D"/>
+                          </a:solidFill>
+                          <a:latin typeface="Calibri"/>
+                        </a:rPr>
+                        <a:t>90.0%</a:t>
+                      </a:r>
+                    </a:p>
+                  </a:txBody>
+                  <a:tcPr marL="54864" marR="54864" marT="18288" marB="18288" anchor="ctr">
+                    <a:solidFill>
+                      <a:srgbClr val="FFFFFF"/>
+                    </a:solidFill>
+                  </a:tcPr>
+                </a:tc>
+                <a:tc>
+                  <a:txBody>
+                    <a:bodyPr wrap="square"/>
+                    <a:lstStyle/>
+                    <a:p>
+                      <a:pPr algn="ctr"/>
+                      <a:r>
+                        <a:rPr sz="1050" b="0">
+                          <a:solidFill>
+                            <a:srgbClr val="35424D"/>
+                          </a:solidFill>
+                          <a:latin typeface="Calibri"/>
+                        </a:rPr>
+                        <a:t>harmful</a:t>
+                      </a:r>
+                    </a:p>
+                  </a:txBody>
+                  <a:tcPr marL="54864" marR="54864" marT="18288" marB="18288" anchor="ctr">
+                    <a:solidFill>
+                      <a:srgbClr val="FFFFFF"/>
+                    </a:solidFill>
+                  </a:tcPr>
+                </a:tc>
+              </a:tr>
             </a:tbl>
           </a:graphicData>
         </a:graphic>
@@ -8010,7 +8127,7 @@
         </p:nvSpPr>
         <p:spPr>
           <a:xfrm>
-            <a:off x="548640" y="4690872"/>
+            <a:off x="548640" y="4965192"/>
             <a:ext cx="6949440" cy="256032"/>
           </a:xfrm>
           <a:prstGeom prst="rect">
@@ -9264,7 +9381,7 @@
                 </a:solidFill>
                 <a:latin typeface="Calibri"/>
               </a:rPr>
-              <a:t>Every pass rate is capped by the mis-lock rate. The truth is in the top-20 on 27/30 pairs (90.0%), so a perfect re-ranker would still have room to roughly halve what remains.</a:t>
+              <a:t>Every pass rate is capped by the mis-lock rate. The truth is in the top-20 on 28/30 pairs (93.3%), so a perfect re-ranker would still have room to roughly halve what remains.</a:t>
             </a:r>
           </a:p>
         </p:txBody>
@@ -9382,7 +9499,7 @@
                 </a:solidFill>
                 <a:latin typeface="Calibri"/>
               </a:rPr>
-              <a:t>About 1004 ms per pair against a 300 ms goal. The per-candidate refit is most of it; top_k is the dial. We took 9 points of mis-lock for the time.</a:t>
+              <a:t>About 334 ms per pair against a 300 ms goal. The per-candidate refit is most of it; top_k is the dial. We took 9 points of mis-lock for the time.</a:t>
             </a:r>
           </a:p>
         </p:txBody>
@@ -10348,7 +10465,7 @@
                 </a:solidFill>
                 <a:latin typeface="Calibri"/>
               </a:rPr>
-              <a:t>Next: the correct answer is still in the candidate set on 27/30 pairs, so selection remains the cap — and the one stage that beat it did so by removing a handicap, not by scoring harder.</a:t>
+              <a:t>Next: the correct answer is still in the candidate set on 28/30 pairs, so selection remains the cap — and the one stage that beat it did so by removing a handicap, not by scoring harder.</a:t>
             </a:r>
           </a:p>
         </p:txBody>
@@ -15620,8 +15737,8 @@
         </p:nvSpPr>
         <p:spPr>
           <a:xfrm>
-            <a:off x="8641080" y="2788920"/>
-            <a:ext cx="2743200" cy="2560320"/>
+            <a:off x="8641080" y="2761488"/>
+            <a:ext cx="2743200" cy="2743200"/>
           </a:xfrm>
           <a:prstGeom prst="rect">
             <a:avLst/>
@@ -15634,17 +15751,115 @@
           </a:bodyPr>
           <a:lstStyle/>
           <a:p>
-            <a:pPr algn="l"/>
-            <a:r>
-              <a:rPr sz="1050" b="0" i="0">
+            <a:pPr algn="l">
+              <a:spcAft>
+                <a:spcPts val="100"/>
+              </a:spcAft>
+            </a:pPr>
+            <a:r>
+              <a:rPr sz="950" b="0" i="0">
+                <a:solidFill>
+                  <a:srgbClr val="FFFFFF"/>
+                </a:solidFill>
+                <a:latin typeface="Calibri"/>
+              </a:rPr>
+              <a:t>Implemented, tested, and reachable — but off by default, and the reason is the interesting part.</a:t>
+            </a:r>
+          </a:p>
+          <a:p>
+            <a:pPr algn="l">
+              <a:spcAft>
+                <a:spcPts val="100"/>
+              </a:spcAft>
+            </a:pPr>
+            <a:r>
+              <a:rPr sz="950" b="0" i="0">
+                <a:solidFill>
+                  <a:srgbClr val="35424D"/>
+                </a:solidFill>
+                <a:latin typeface="Calibri"/>
+              </a:rPr>
+              <a:t/>
+            </a:r>
+          </a:p>
+          <a:p>
+            <a:pPr algn="l">
+              <a:spcAft>
+                <a:spcPts val="100"/>
+              </a:spcAft>
+            </a:pPr>
+            <a:r>
+              <a:rPr sz="950" b="0" i="0">
                 <a:solidFill>
                   <a:srgbClr val="C3D2DC"/>
                 </a:solidFill>
                 <a:latin typeface="Calibri"/>
               </a:rPr>
-              <a:t>Implemented literally and visibly, as a branch a judge can test — not as an emergent property of the scoring.
-It is also established industrial practice: Hitachi's CD-SEM navigation selects, among equally-scoring candidates in a periodic structure, the one closest to a predefined origin.
-We additionally emit an ambiguity index, so the tool can say when it is unsure rather than being quietly wrong.</a:t>
+              <a:t>The rule encodes a DEPLOYMENT PRIOR: a tool that has drifted lands near the site it meant to revisit, so among equally-scoring candidates the central one is the likely one.</a:t>
+            </a:r>
+          </a:p>
+          <a:p>
+            <a:pPr algn="l">
+              <a:spcAft>
+                <a:spcPts val="100"/>
+              </a:spcAft>
+            </a:pPr>
+            <a:r>
+              <a:rPr sz="950" b="0" i="0">
+                <a:solidFill>
+                  <a:srgbClr val="35424D"/>
+                </a:solidFill>
+                <a:latin typeface="Calibri"/>
+              </a:rPr>
+              <a:t/>
+            </a:r>
+          </a:p>
+          <a:p>
+            <a:pPr algn="l">
+              <a:spcAft>
+                <a:spcPts val="100"/>
+              </a:spcAft>
+            </a:pPr>
+            <a:r>
+              <a:rPr sz="950" b="0" i="0">
+                <a:solidFill>
+                  <a:srgbClr val="C3D2DC"/>
+                </a:solidFill>
+                <a:latin typeface="Calibri"/>
+              </a:rPr>
+              <a:t>Both benchmarks place targets uniformly. Measured median distance from the search centre is 373 / 335 / 347 px against the 358 px a uniform draw predicts — the prior is absent, so the rule can only lose here.</a:t>
+            </a:r>
+          </a:p>
+          <a:p>
+            <a:pPr algn="l">
+              <a:spcAft>
+                <a:spcPts val="100"/>
+              </a:spcAft>
+            </a:pPr>
+            <a:r>
+              <a:rPr sz="950" b="0" i="0">
+                <a:solidFill>
+                  <a:srgbClr val="35424D"/>
+                </a:solidFill>
+                <a:latin typeface="Calibri"/>
+              </a:rPr>
+              <a:t/>
+            </a:r>
+          </a:p>
+          <a:p>
+            <a:pPr algn="l">
+              <a:spcAft>
+                <a:spcPts val="100"/>
+              </a:spcAft>
+            </a:pPr>
+            <a:r>
+              <a:rPr sz="950" b="0" i="0">
+                <a:solidFill>
+                  <a:srgbClr val="F2A65A"/>
+                </a:solidFill>
+                <a:latin typeface="Calibri"/>
+              </a:rPr>
+              <a:t>We also fixed its threshold: a tie is now two standard errors of the correlation, not a fraction of the candidate spread.</a:t>
             </a:r>
           </a:p>
         </p:txBody>
@@ -18044,7 +18259,7 @@
                           </a:solidFill>
                           <a:latin typeface="Calibri"/>
                         </a:rPr>
-                        <a:t>1036 ms</a:t>
+                        <a:t>325 ms</a:t>
                       </a:r>
                     </a:p>
                   </a:txBody>
@@ -18462,7 +18677,7 @@
                           </a:solidFill>
                           <a:latin typeface="Calibri"/>
                         </a:rPr>
-                        <a:t>1004 ms</a:t>
+                        <a:t>334 ms</a:t>
                       </a:r>
                     </a:p>
                   </a:txBody>
@@ -18880,7 +19095,7 @@
                           </a:solidFill>
                           <a:latin typeface="Calibri"/>
                         </a:rPr>
-                        <a:t>1115 ms</a:t>
+                        <a:t>333 ms</a:t>
                       </a:r>
                     </a:p>
                   </a:txBody>

--- a/solution_presentation.pptx
+++ b/solution_presentation.pptx
@@ -248,7 +248,7 @@
                   <c:v>25.0</c:v>
                 </c:pt>
                 <c:pt idx="1">
-                  <c:v>30.0</c:v>
+                  <c:v>23.3333</c:v>
                 </c:pt>
                 <c:pt idx="2">
                   <c:v>16.666700000000002</c:v>
@@ -4096,7 +4096,7 @@
                 </a:solidFill>
                 <a:latin typeface="Cambria"/>
               </a:rPr>
-              <a:t>30.0%</a:t>
+              <a:t>23.3%</a:t>
             </a:r>
           </a:p>
         </p:txBody>
@@ -4166,7 +4166,7 @@
                 </a:solidFill>
                 <a:latin typeface="Cambria"/>
               </a:rPr>
-              <a:t>0.291 px</a:t>
+              <a:t>0.254 px</a:t>
             </a:r>
           </a:p>
         </p:txBody>
@@ -4236,7 +4236,7 @@
                 </a:solidFill>
                 <a:latin typeface="Cambria"/>
               </a:rPr>
-              <a:t>50.0%</a:t>
+              <a:t>63.3%</a:t>
             </a:r>
           </a:p>
         </p:txBody>
@@ -7239,7 +7239,7 @@
                           </a:solidFill>
                           <a:latin typeface="Calibri"/>
                         </a:rPr>
-                        <a:t>33.3%</a:t>
+                        <a:t>26.7%</a:t>
                       </a:r>
                     </a:p>
                   </a:txBody>
@@ -7356,7 +7356,7 @@
                           </a:solidFill>
                           <a:latin typeface="Calibri"/>
                         </a:rPr>
-                        <a:t>30.0%</a:t>
+                        <a:t>23.3%</a:t>
                       </a:r>
                     </a:p>
                   </a:txBody>
@@ -7473,7 +7473,7 @@
                           </a:solidFill>
                           <a:latin typeface="Calibri"/>
                         </a:rPr>
-                        <a:t>26.7%</a:t>
+                        <a:t>20.0%</a:t>
                       </a:r>
                     </a:p>
                   </a:txBody>
@@ -7590,7 +7590,7 @@
                           </a:solidFill>
                           <a:latin typeface="Calibri"/>
                         </a:rPr>
-                        <a:t>50.0%</a:t>
+                        <a:t>46.7%</a:t>
                       </a:r>
                     </a:p>
                   </a:txBody>
@@ -7824,7 +7824,7 @@
                           </a:solidFill>
                           <a:latin typeface="Calibri"/>
                         </a:rPr>
-                        <a:t>43.3%</a:t>
+                        <a:t>36.7%</a:t>
                       </a:r>
                     </a:p>
                   </a:txBody>
@@ -7941,7 +7941,7 @@
                           </a:solidFill>
                           <a:latin typeface="Calibri"/>
                         </a:rPr>
-                        <a:t>76.7%</a:t>
+                        <a:t>73.3%</a:t>
                       </a:r>
                     </a:p>
                   </a:txBody>
@@ -8682,7 +8682,7 @@
                 </a:solidFill>
                 <a:latin typeface="Calibri"/>
               </a:rPr>
-              <a:t>•  Euclidean error 893.90 px — a different site entirely</a:t>
+              <a:t>•  Euclidean error 893.89 px — a different site entirely</a:t>
             </a:r>
           </a:p>
           <a:p>
@@ -9066,7 +9066,7 @@
                           </a:solidFill>
                           <a:latin typeface="Calibri"/>
                         </a:rPr>
-                        <a:t>19%</a:t>
+                        <a:t>10%</a:t>
                       </a:r>
                     </a:p>
                   </a:txBody>
@@ -9089,7 +9089,7 @@
                           </a:solidFill>
                           <a:latin typeface="Calibri"/>
                         </a:rPr>
-                        <a:t>81%</a:t>
+                        <a:t>90%</a:t>
                       </a:r>
                     </a:p>
                   </a:txBody>
@@ -9183,7 +9183,7 @@
                           </a:solidFill>
                           <a:latin typeface="Calibri"/>
                         </a:rPr>
-                        <a:t>11%</a:t>
+                        <a:t>33%</a:t>
                       </a:r>
                     </a:p>
                   </a:txBody>
@@ -9228,7 +9228,7 @@
                 </a:solidFill>
                 <a:latin typeface="Calibri"/>
               </a:rPr>
-              <a:t>5 of the 9 failures fall in those 9 pairs. The method fails precisely where the information needed to succeed is absent — the honest definition of the problem's limit.</a:t>
+              <a:t>5 of the 7 failures fall in those 9 pairs. The method fails precisely where the information needed to succeed is absent — the honest definition of the problem's limit.</a:t>
             </a:r>
           </a:p>
         </p:txBody>
@@ -9499,7 +9499,7 @@
                 </a:solidFill>
                 <a:latin typeface="Calibri"/>
               </a:rPr>
-              <a:t>About 334 ms per pair against a 300 ms goal. The per-candidate refit is most of it; top_k is the dial. We took 9 points of mis-lock for the time.</a:t>
+              <a:t>About 345 ms per pair against a 300 ms goal. The per-candidate refit is most of it; top_k is the dial. We took 9 points of mis-lock for the time.</a:t>
             </a:r>
           </a:p>
         </p:txBody>
@@ -9759,7 +9759,7 @@
                 </a:solidFill>
                 <a:latin typeface="Cambria"/>
               </a:rPr>
-              <a:t>76.7% → 30.0%</a:t>
+              <a:t>76.7% → 23.3%</a:t>
             </a:r>
           </a:p>
         </p:txBody>
@@ -18259,7 +18259,7 @@
                           </a:solidFill>
                           <a:latin typeface="Calibri"/>
                         </a:rPr>
-                        <a:t>325 ms</a:t>
+                        <a:t>313 ms</a:t>
                       </a:r>
                     </a:p>
                   </a:txBody>
@@ -18539,7 +18539,7 @@
                           </a:solidFill>
                           <a:latin typeface="Calibri"/>
                         </a:rPr>
-                        <a:t>30.0%</a:t>
+                        <a:t>23.3%</a:t>
                       </a:r>
                     </a:p>
                   </a:txBody>
@@ -18562,7 +18562,7 @@
                           </a:solidFill>
                           <a:latin typeface="Calibri"/>
                         </a:rPr>
-                        <a:t>0.509</a:t>
+                        <a:t>0.343</a:t>
                       </a:r>
                     </a:p>
                   </a:txBody>
@@ -18585,7 +18585,7 @@
                           </a:solidFill>
                           <a:latin typeface="Calibri"/>
                         </a:rPr>
-                        <a:t>70.0%</a:t>
+                        <a:t>76.7%</a:t>
                       </a:r>
                     </a:p>
                   </a:txBody>
@@ -18608,7 +18608,7 @@
                           </a:solidFill>
                           <a:latin typeface="Calibri"/>
                         </a:rPr>
-                        <a:t>70.0%</a:t>
+                        <a:t>73.3%</a:t>
                       </a:r>
                     </a:p>
                   </a:txBody>
@@ -18631,7 +18631,7 @@
                           </a:solidFill>
                           <a:latin typeface="Calibri"/>
                         </a:rPr>
-                        <a:t>60.0%</a:t>
+                        <a:t>73.3%</a:t>
                       </a:r>
                     </a:p>
                   </a:txBody>
@@ -18654,7 +18654,7 @@
                           </a:solidFill>
                           <a:latin typeface="Calibri"/>
                         </a:rPr>
-                        <a:t>50.0%</a:t>
+                        <a:t>63.3%</a:t>
                       </a:r>
                     </a:p>
                   </a:txBody>
@@ -18677,7 +18677,7 @@
                           </a:solidFill>
                           <a:latin typeface="Calibri"/>
                         </a:rPr>
-                        <a:t>334 ms</a:t>
+                        <a:t>345 ms</a:t>
                       </a:r>
                     </a:p>
                   </a:txBody>
@@ -18980,7 +18980,7 @@
                           </a:solidFill>
                           <a:latin typeface="Calibri"/>
                         </a:rPr>
-                        <a:t>0.587</a:t>
+                        <a:t>0.313</a:t>
                       </a:r>
                     </a:p>
                   </a:txBody>
@@ -19072,7 +19072,7 @@
                           </a:solidFill>
                           <a:latin typeface="Calibri"/>
                         </a:rPr>
-                        <a:t>40.0%</a:t>
+                        <a:t>63.3%</a:t>
                       </a:r>
                     </a:p>
                   </a:txBody>
@@ -19095,7 +19095,7 @@
                           </a:solidFill>
                           <a:latin typeface="Calibri"/>
                         </a:rPr>
-                        <a:t>333 ms</a:t>
+                        <a:t>348 ms</a:t>
                       </a:r>
                     </a:p>
                   </a:txBody>
@@ -19176,7 +19176,7 @@
                 <a:latin typeface="Calibri"/>
               </a:rPr>
               <a:t>On the sponsor's fixed 10:1 data the task is precision: median error improves from 1.102 px to 0.297 px and the sub-pixel pass rate rises from 17.5% to 67.5%.
-On our own data — the 9:1–11:1 and ±2° envelope the problem statement says will be tested — the baseline does not work at all (76.7% mis-lock against 30.0%). That axis is invisible to anyone validating only on the published generator, because it produces neither rotation nor scale variation.</a:t>
+On our own data — the 9:1–11:1 and ±2° envelope the problem statement says will be tested — the baseline does not work at all (76.7% mis-lock against 23.3%). That axis is invisible to anyone validating only on the published generator, because it produces neither rotation nor scale variation.</a:t>
             </a:r>
           </a:p>
         </p:txBody>

--- a/solution_presentation.pptx
+++ b/solution_presentation.pptx
@@ -245,13 +245,13 @@
                 <c:formatCode>General</c:formatCode>
                 <c:ptCount val="3"/>
                 <c:pt idx="0">
-                  <c:v>25.0</c:v>
+                  <c:v>22.5</c:v>
                 </c:pt>
                 <c:pt idx="1">
-                  <c:v>23.3333</c:v>
+                  <c:v>16.666700000000002</c:v>
                 </c:pt>
                 <c:pt idx="2">
-                  <c:v>16.666700000000002</c:v>
+                  <c:v>13.333300000000001</c:v>
                 </c:pt>
               </c:numCache>
             </c:numRef>
@@ -4096,7 +4096,7 @@
                 </a:solidFill>
                 <a:latin typeface="Cambria"/>
               </a:rPr>
-              <a:t>23.3%</a:t>
+              <a:t>16.7%</a:t>
             </a:r>
           </a:p>
         </p:txBody>
@@ -6696,7 +6696,7 @@
         </p:nvGraphicFramePr>
         <p:xfrm>
           <a:off x="548640" y="1572768"/>
-          <a:ext cx="6949440" cy="3291840"/>
+          <a:ext cx="6949440" cy="3017520"/>
         </p:xfrm>
         <a:graphic>
           <a:graphicData uri="http://schemas.openxmlformats.org/drawingml/2006/table">
@@ -7310,7 +7310,7 @@
                           </a:solidFill>
                           <a:latin typeface="Calibri"/>
                         </a:rPr>
-                        <a:t>+ per-candidate pose refit   ← shipped</a:t>
+                        <a:t>+ spec's centre rule</a:t>
                       </a:r>
                     </a:p>
                   </a:txBody>
@@ -7333,7 +7333,7 @@
                           </a:solidFill>
                           <a:latin typeface="Calibri"/>
                         </a:rPr>
-                        <a:t>25.0%</a:t>
+                        <a:t>32.5%</a:t>
                       </a:r>
                     </a:p>
                   </a:txBody>
@@ -7356,7 +7356,7 @@
                           </a:solidFill>
                           <a:latin typeface="Calibri"/>
                         </a:rPr>
-                        <a:t>23.3%</a:t>
+                        <a:t>20.0%</a:t>
                       </a:r>
                     </a:p>
                   </a:txBody>
@@ -7402,7 +7402,7 @@
                           </a:solidFill>
                           <a:latin typeface="Calibri"/>
                         </a:rPr>
-                        <a:t>solves selection</a:t>
+                        <a:t>prior absent</a:t>
                       </a:r>
                     </a:p>
                   </a:txBody>
@@ -7427,7 +7427,475 @@
                           </a:solidFill>
                           <a:latin typeface="Calibri"/>
                         </a:rPr>
-                        <a:t>+ spec's centre rule</a:t>
+                        <a:t>+ pose: spectral lattice</a:t>
+                      </a:r>
+                    </a:p>
+                  </a:txBody>
+                  <a:tcPr marL="54864" marR="54864" marT="18288" marB="18288" anchor="ctr">
+                    <a:solidFill>
+                      <a:srgbClr val="ECF1F4"/>
+                    </a:solidFill>
+                  </a:tcPr>
+                </a:tc>
+                <a:tc>
+                  <a:txBody>
+                    <a:bodyPr wrap="square"/>
+                    <a:lstStyle/>
+                    <a:p>
+                      <a:pPr algn="ctr"/>
+                      <a:r>
+                        <a:rPr sz="1050" b="0">
+                          <a:solidFill>
+                            <a:srgbClr val="35424D"/>
+                          </a:solidFill>
+                          <a:latin typeface="Calibri"/>
+                        </a:rPr>
+                        <a:t>22.5%</a:t>
+                      </a:r>
+                    </a:p>
+                  </a:txBody>
+                  <a:tcPr marL="54864" marR="54864" marT="18288" marB="18288" anchor="ctr">
+                    <a:solidFill>
+                      <a:srgbClr val="ECF1F4"/>
+                    </a:solidFill>
+                  </a:tcPr>
+                </a:tc>
+                <a:tc>
+                  <a:txBody>
+                    <a:bodyPr wrap="square"/>
+                    <a:lstStyle/>
+                    <a:p>
+                      <a:pPr algn="ctr"/>
+                      <a:r>
+                        <a:rPr sz="1050" b="0">
+                          <a:solidFill>
+                            <a:srgbClr val="35424D"/>
+                          </a:solidFill>
+                          <a:latin typeface="Calibri"/>
+                        </a:rPr>
+                        <a:t>46.7%</a:t>
+                      </a:r>
+                    </a:p>
+                  </a:txBody>
+                  <a:tcPr marL="54864" marR="54864" marT="18288" marB="18288" anchor="ctr">
+                    <a:solidFill>
+                      <a:srgbClr val="ECF1F4"/>
+                    </a:solidFill>
+                  </a:tcPr>
+                </a:tc>
+                <a:tc>
+                  <a:txBody>
+                    <a:bodyPr wrap="square"/>
+                    <a:lstStyle/>
+                    <a:p>
+                      <a:pPr algn="ctr"/>
+                      <a:r>
+                        <a:rPr sz="1050" b="0">
+                          <a:solidFill>
+                            <a:srgbClr val="35424D"/>
+                          </a:solidFill>
+                          <a:latin typeface="Calibri"/>
+                        </a:rPr>
+                        <a:t>60.0%</a:t>
+                      </a:r>
+                    </a:p>
+                  </a:txBody>
+                  <a:tcPr marL="54864" marR="54864" marT="18288" marB="18288" anchor="ctr">
+                    <a:solidFill>
+                      <a:srgbClr val="ECF1F4"/>
+                    </a:solidFill>
+                  </a:tcPr>
+                </a:tc>
+                <a:tc>
+                  <a:txBody>
+                    <a:bodyPr wrap="square"/>
+                    <a:lstStyle/>
+                    <a:p>
+                      <a:pPr algn="ctr"/>
+                      <a:r>
+                        <a:rPr sz="1050" b="0">
+                          <a:solidFill>
+                            <a:srgbClr val="35424D"/>
+                          </a:solidFill>
+                          <a:latin typeface="Calibri"/>
+                        </a:rPr>
+                        <a:t>less accurate</a:t>
+                      </a:r>
+                    </a:p>
+                  </a:txBody>
+                  <a:tcPr marL="54864" marR="54864" marT="18288" marB="18288" anchor="ctr">
+                    <a:solidFill>
+                      <a:srgbClr val="ECF1F4"/>
+                    </a:solidFill>
+                  </a:tcPr>
+                </a:tc>
+              </a:tr>
+              <a:tr h="274320">
+                <a:tc>
+                  <a:txBody>
+                    <a:bodyPr wrap="square"/>
+                    <a:lstStyle/>
+                    <a:p>
+                      <a:pPr algn="l"/>
+                      <a:r>
+                        <a:rPr sz="1050" b="0">
+                          <a:solidFill>
+                            <a:srgbClr val="35424D"/>
+                          </a:solidFill>
+                          <a:latin typeface="Calibri"/>
+                        </a:rPr>
+                        <a:t>+ PADM residual re-ranking</a:t>
+                      </a:r>
+                    </a:p>
+                  </a:txBody>
+                  <a:tcPr marL="54864" marR="54864" marT="18288" marB="18288" anchor="ctr">
+                    <a:solidFill>
+                      <a:srgbClr val="FFFFFF"/>
+                    </a:solidFill>
+                  </a:tcPr>
+                </a:tc>
+                <a:tc>
+                  <a:txBody>
+                    <a:bodyPr wrap="square"/>
+                    <a:lstStyle/>
+                    <a:p>
+                      <a:pPr algn="ctr"/>
+                      <a:r>
+                        <a:rPr sz="1050" b="0">
+                          <a:solidFill>
+                            <a:srgbClr val="35424D"/>
+                          </a:solidFill>
+                          <a:latin typeface="Calibri"/>
+                        </a:rPr>
+                        <a:t>27.5%</a:t>
+                      </a:r>
+                    </a:p>
+                  </a:txBody>
+                  <a:tcPr marL="54864" marR="54864" marT="18288" marB="18288" anchor="ctr">
+                    <a:solidFill>
+                      <a:srgbClr val="FFFFFF"/>
+                    </a:solidFill>
+                  </a:tcPr>
+                </a:tc>
+                <a:tc>
+                  <a:txBody>
+                    <a:bodyPr wrap="square"/>
+                    <a:lstStyle/>
+                    <a:p>
+                      <a:pPr algn="ctr"/>
+                      <a:r>
+                        <a:rPr sz="1050" b="0">
+                          <a:solidFill>
+                            <a:srgbClr val="35424D"/>
+                          </a:solidFill>
+                          <a:latin typeface="Calibri"/>
+                        </a:rPr>
+                        <a:t>70.0%</a:t>
+                      </a:r>
+                    </a:p>
+                  </a:txBody>
+                  <a:tcPr marL="54864" marR="54864" marT="18288" marB="18288" anchor="ctr">
+                    <a:solidFill>
+                      <a:srgbClr val="FFFFFF"/>
+                    </a:solidFill>
+                  </a:tcPr>
+                </a:tc>
+                <a:tc>
+                  <a:txBody>
+                    <a:bodyPr wrap="square"/>
+                    <a:lstStyle/>
+                    <a:p>
+                      <a:pPr algn="ctr"/>
+                      <a:r>
+                        <a:rPr sz="1050" b="0">
+                          <a:solidFill>
+                            <a:srgbClr val="35424D"/>
+                          </a:solidFill>
+                          <a:latin typeface="Calibri"/>
+                        </a:rPr>
+                        <a:t>73.3%</a:t>
+                      </a:r>
+                    </a:p>
+                  </a:txBody>
+                  <a:tcPr marL="54864" marR="54864" marT="18288" marB="18288" anchor="ctr">
+                    <a:solidFill>
+                      <a:srgbClr val="FFFFFF"/>
+                    </a:solidFill>
+                  </a:tcPr>
+                </a:tc>
+                <a:tc>
+                  <a:txBody>
+                    <a:bodyPr wrap="square"/>
+                    <a:lstStyle/>
+                    <a:p>
+                      <a:pPr algn="ctr"/>
+                      <a:r>
+                        <a:rPr sz="1050" b="0">
+                          <a:solidFill>
+                            <a:srgbClr val="35424D"/>
+                          </a:solidFill>
+                          <a:latin typeface="Calibri"/>
+                        </a:rPr>
+                        <a:t>overfit</a:t>
+                      </a:r>
+                    </a:p>
+                  </a:txBody>
+                  <a:tcPr marL="54864" marR="54864" marT="18288" marB="18288" anchor="ctr">
+                    <a:solidFill>
+                      <a:srgbClr val="FFFFFF"/>
+                    </a:solidFill>
+                  </a:tcPr>
+                </a:tc>
+              </a:tr>
+              <a:tr h="274320">
+                <a:tc>
+                  <a:txBody>
+                    <a:bodyPr wrap="square"/>
+                    <a:lstStyle/>
+                    <a:p>
+                      <a:pPr algn="l"/>
+                      <a:r>
+                        <a:rPr sz="1050" b="0">
+                          <a:solidFill>
+                            <a:srgbClr val="35424D"/>
+                          </a:solidFill>
+                          <a:latin typeface="Calibri"/>
+                        </a:rPr>
+                        <a:t>+ max-likelihood re-ranking</a:t>
+                      </a:r>
+                    </a:p>
+                  </a:txBody>
+                  <a:tcPr marL="54864" marR="54864" marT="18288" marB="18288" anchor="ctr">
+                    <a:solidFill>
+                      <a:srgbClr val="ECF1F4"/>
+                    </a:solidFill>
+                  </a:tcPr>
+                </a:tc>
+                <a:tc>
+                  <a:txBody>
+                    <a:bodyPr wrap="square"/>
+                    <a:lstStyle/>
+                    <a:p>
+                      <a:pPr algn="ctr"/>
+                      <a:r>
+                        <a:rPr sz="1050" b="0">
+                          <a:solidFill>
+                            <a:srgbClr val="35424D"/>
+                          </a:solidFill>
+                          <a:latin typeface="Calibri"/>
+                        </a:rPr>
+                        <a:t>22.5%</a:t>
+                      </a:r>
+                    </a:p>
+                  </a:txBody>
+                  <a:tcPr marL="54864" marR="54864" marT="18288" marB="18288" anchor="ctr">
+                    <a:solidFill>
+                      <a:srgbClr val="ECF1F4"/>
+                    </a:solidFill>
+                  </a:tcPr>
+                </a:tc>
+                <a:tc>
+                  <a:txBody>
+                    <a:bodyPr wrap="square"/>
+                    <a:lstStyle/>
+                    <a:p>
+                      <a:pPr algn="ctr"/>
+                      <a:r>
+                        <a:rPr sz="1050" b="0">
+                          <a:solidFill>
+                            <a:srgbClr val="35424D"/>
+                          </a:solidFill>
+                          <a:latin typeface="Calibri"/>
+                        </a:rPr>
+                        <a:t>36.7%</a:t>
+                      </a:r>
+                    </a:p>
+                  </a:txBody>
+                  <a:tcPr marL="54864" marR="54864" marT="18288" marB="18288" anchor="ctr">
+                    <a:solidFill>
+                      <a:srgbClr val="ECF1F4"/>
+                    </a:solidFill>
+                  </a:tcPr>
+                </a:tc>
+                <a:tc>
+                  <a:txBody>
+                    <a:bodyPr wrap="square"/>
+                    <a:lstStyle/>
+                    <a:p>
+                      <a:pPr algn="ctr"/>
+                      <a:r>
+                        <a:rPr sz="1050" b="0">
+                          <a:solidFill>
+                            <a:srgbClr val="35424D"/>
+                          </a:solidFill>
+                          <a:latin typeface="Calibri"/>
+                        </a:rPr>
+                        <a:t>50.0%</a:t>
+                      </a:r>
+                    </a:p>
+                  </a:txBody>
+                  <a:tcPr marL="54864" marR="54864" marT="18288" marB="18288" anchor="ctr">
+                    <a:solidFill>
+                      <a:srgbClr val="ECF1F4"/>
+                    </a:solidFill>
+                  </a:tcPr>
+                </a:tc>
+                <a:tc>
+                  <a:txBody>
+                    <a:bodyPr wrap="square"/>
+                    <a:lstStyle/>
+                    <a:p>
+                      <a:pPr algn="ctr"/>
+                      <a:r>
+                        <a:rPr sz="1050" b="0">
+                          <a:solidFill>
+                            <a:srgbClr val="35424D"/>
+                          </a:solidFill>
+                          <a:latin typeface="Calibri"/>
+                        </a:rPr>
+                        <a:t>no gain</a:t>
+                      </a:r>
+                    </a:p>
+                  </a:txBody>
+                  <a:tcPr marL="54864" marR="54864" marT="18288" marB="18288" anchor="ctr">
+                    <a:solidFill>
+                      <a:srgbClr val="ECF1F4"/>
+                    </a:solidFill>
+                  </a:tcPr>
+                </a:tc>
+              </a:tr>
+              <a:tr h="274320">
+                <a:tc>
+                  <a:txBody>
+                    <a:bodyPr wrap="square"/>
+                    <a:lstStyle/>
+                    <a:p>
+                      <a:pPr algn="l"/>
+                      <a:r>
+                        <a:rPr sz="1050" b="0">
+                          <a:solidFill>
+                            <a:srgbClr val="35424D"/>
+                          </a:solidFill>
+                          <a:latin typeface="Calibri"/>
+                        </a:rPr>
+                        <a:t>+ coarse-level consensus</a:t>
+                      </a:r>
+                    </a:p>
+                  </a:txBody>
+                  <a:tcPr marL="54864" marR="54864" marT="18288" marB="18288" anchor="ctr">
+                    <a:solidFill>
+                      <a:srgbClr val="FFFFFF"/>
+                    </a:solidFill>
+                  </a:tcPr>
+                </a:tc>
+                <a:tc>
+                  <a:txBody>
+                    <a:bodyPr wrap="square"/>
+                    <a:lstStyle/>
+                    <a:p>
+                      <a:pPr algn="ctr"/>
+                      <a:r>
+                        <a:rPr sz="1050" b="0">
+                          <a:solidFill>
+                            <a:srgbClr val="35424D"/>
+                          </a:solidFill>
+                          <a:latin typeface="Calibri"/>
+                        </a:rPr>
+                        <a:t>62.5%</a:t>
+                      </a:r>
+                    </a:p>
+                  </a:txBody>
+                  <a:tcPr marL="54864" marR="54864" marT="18288" marB="18288" anchor="ctr">
+                    <a:solidFill>
+                      <a:srgbClr val="FFFFFF"/>
+                    </a:solidFill>
+                  </a:tcPr>
+                </a:tc>
+                <a:tc>
+                  <a:txBody>
+                    <a:bodyPr wrap="square"/>
+                    <a:lstStyle/>
+                    <a:p>
+                      <a:pPr algn="ctr"/>
+                      <a:r>
+                        <a:rPr sz="1050" b="0">
+                          <a:solidFill>
+                            <a:srgbClr val="35424D"/>
+                          </a:solidFill>
+                          <a:latin typeface="Calibri"/>
+                        </a:rPr>
+                        <a:t>73.3%</a:t>
+                      </a:r>
+                    </a:p>
+                  </a:txBody>
+                  <a:tcPr marL="54864" marR="54864" marT="18288" marB="18288" anchor="ctr">
+                    <a:solidFill>
+                      <a:srgbClr val="FFFFFF"/>
+                    </a:solidFill>
+                  </a:tcPr>
+                </a:tc>
+                <a:tc>
+                  <a:txBody>
+                    <a:bodyPr wrap="square"/>
+                    <a:lstStyle/>
+                    <a:p>
+                      <a:pPr algn="ctr"/>
+                      <a:r>
+                        <a:rPr sz="1050" b="0">
+                          <a:solidFill>
+                            <a:srgbClr val="35424D"/>
+                          </a:solidFill>
+                          <a:latin typeface="Calibri"/>
+                        </a:rPr>
+                        <a:t>36.7%</a:t>
+                      </a:r>
+                    </a:p>
+                  </a:txBody>
+                  <a:tcPr marL="54864" marR="54864" marT="18288" marB="18288" anchor="ctr">
+                    <a:solidFill>
+                      <a:srgbClr val="FFFFFF"/>
+                    </a:solidFill>
+                  </a:tcPr>
+                </a:tc>
+                <a:tc>
+                  <a:txBody>
+                    <a:bodyPr wrap="square"/>
+                    <a:lstStyle/>
+                    <a:p>
+                      <a:pPr algn="ctr"/>
+                      <a:r>
+                        <a:rPr sz="1050" b="0">
+                          <a:solidFill>
+                            <a:srgbClr val="35424D"/>
+                          </a:solidFill>
+                          <a:latin typeface="Calibri"/>
+                        </a:rPr>
+                        <a:t>harmful</a:t>
+                      </a:r>
+                    </a:p>
+                  </a:txBody>
+                  <a:tcPr marL="54864" marR="54864" marT="18288" marB="18288" anchor="ctr">
+                    <a:solidFill>
+                      <a:srgbClr val="FFFFFF"/>
+                    </a:solidFill>
+                  </a:tcPr>
+                </a:tc>
+              </a:tr>
+              <a:tr h="274320">
+                <a:tc>
+                  <a:txBody>
+                    <a:bodyPr wrap="square"/>
+                    <a:lstStyle/>
+                    <a:p>
+                      <a:pPr algn="l"/>
+                      <a:r>
+                        <a:rPr sz="1050" b="0">
+                          <a:solidFill>
+                            <a:srgbClr val="35424D"/>
+                          </a:solidFill>
+                          <a:latin typeface="Calibri"/>
+                        </a:rPr>
+                        <a:t>+ row destriping</a:t>
                       </a:r>
                     </a:p>
                   </a:txBody>
@@ -7473,7 +7941,7 @@
                           </a:solidFill>
                           <a:latin typeface="Calibri"/>
                         </a:rPr>
-                        <a:t>20.0%</a:t>
+                        <a:t>90.0%</a:t>
                       </a:r>
                     </a:p>
                   </a:txBody>
@@ -7496,475 +7964,7 @@
                           </a:solidFill>
                           <a:latin typeface="Calibri"/>
                         </a:rPr>
-                        <a:t>20.0%</a:t>
-                      </a:r>
-                    </a:p>
-                  </a:txBody>
-                  <a:tcPr marL="54864" marR="54864" marT="18288" marB="18288" anchor="ctr">
-                    <a:solidFill>
-                      <a:srgbClr val="ECF1F4"/>
-                    </a:solidFill>
-                  </a:tcPr>
-                </a:tc>
-                <a:tc>
-                  <a:txBody>
-                    <a:bodyPr wrap="square"/>
-                    <a:lstStyle/>
-                    <a:p>
-                      <a:pPr algn="ctr"/>
-                      <a:r>
-                        <a:rPr sz="1050" b="0">
-                          <a:solidFill>
-                            <a:srgbClr val="35424D"/>
-                          </a:solidFill>
-                          <a:latin typeface="Calibri"/>
-                        </a:rPr>
-                        <a:t>prior absent</a:t>
-                      </a:r>
-                    </a:p>
-                  </a:txBody>
-                  <a:tcPr marL="54864" marR="54864" marT="18288" marB="18288" anchor="ctr">
-                    <a:solidFill>
-                      <a:srgbClr val="ECF1F4"/>
-                    </a:solidFill>
-                  </a:tcPr>
-                </a:tc>
-              </a:tr>
-              <a:tr h="274320">
-                <a:tc>
-                  <a:txBody>
-                    <a:bodyPr wrap="square"/>
-                    <a:lstStyle/>
-                    <a:p>
-                      <a:pPr algn="l"/>
-                      <a:r>
-                        <a:rPr sz="1050" b="0">
-                          <a:solidFill>
-                            <a:srgbClr val="35424D"/>
-                          </a:solidFill>
-                          <a:latin typeface="Calibri"/>
-                        </a:rPr>
-                        <a:t>+ pose: spectral lattice</a:t>
-                      </a:r>
-                    </a:p>
-                  </a:txBody>
-                  <a:tcPr marL="54864" marR="54864" marT="18288" marB="18288" anchor="ctr">
-                    <a:solidFill>
-                      <a:srgbClr val="FFFFFF"/>
-                    </a:solidFill>
-                  </a:tcPr>
-                </a:tc>
-                <a:tc>
-                  <a:txBody>
-                    <a:bodyPr wrap="square"/>
-                    <a:lstStyle/>
-                    <a:p>
-                      <a:pPr algn="ctr"/>
-                      <a:r>
-                        <a:rPr sz="1050" b="0">
-                          <a:solidFill>
-                            <a:srgbClr val="35424D"/>
-                          </a:solidFill>
-                          <a:latin typeface="Calibri"/>
-                        </a:rPr>
-                        <a:t>22.5%</a:t>
-                      </a:r>
-                    </a:p>
-                  </a:txBody>
-                  <a:tcPr marL="54864" marR="54864" marT="18288" marB="18288" anchor="ctr">
-                    <a:solidFill>
-                      <a:srgbClr val="FFFFFF"/>
-                    </a:solidFill>
-                  </a:tcPr>
-                </a:tc>
-                <a:tc>
-                  <a:txBody>
-                    <a:bodyPr wrap="square"/>
-                    <a:lstStyle/>
-                    <a:p>
-                      <a:pPr algn="ctr"/>
-                      <a:r>
-                        <a:rPr sz="1050" b="0">
-                          <a:solidFill>
-                            <a:srgbClr val="35424D"/>
-                          </a:solidFill>
-                          <a:latin typeface="Calibri"/>
-                        </a:rPr>
-                        <a:t>46.7%</a:t>
-                      </a:r>
-                    </a:p>
-                  </a:txBody>
-                  <a:tcPr marL="54864" marR="54864" marT="18288" marB="18288" anchor="ctr">
-                    <a:solidFill>
-                      <a:srgbClr val="FFFFFF"/>
-                    </a:solidFill>
-                  </a:tcPr>
-                </a:tc>
-                <a:tc>
-                  <a:txBody>
-                    <a:bodyPr wrap="square"/>
-                    <a:lstStyle/>
-                    <a:p>
-                      <a:pPr algn="ctr"/>
-                      <a:r>
-                        <a:rPr sz="1050" b="0">
-                          <a:solidFill>
-                            <a:srgbClr val="35424D"/>
-                          </a:solidFill>
-                          <a:latin typeface="Calibri"/>
-                        </a:rPr>
-                        <a:t>60.0%</a:t>
-                      </a:r>
-                    </a:p>
-                  </a:txBody>
-                  <a:tcPr marL="54864" marR="54864" marT="18288" marB="18288" anchor="ctr">
-                    <a:solidFill>
-                      <a:srgbClr val="FFFFFF"/>
-                    </a:solidFill>
-                  </a:tcPr>
-                </a:tc>
-                <a:tc>
-                  <a:txBody>
-                    <a:bodyPr wrap="square"/>
-                    <a:lstStyle/>
-                    <a:p>
-                      <a:pPr algn="ctr"/>
-                      <a:r>
-                        <a:rPr sz="1050" b="0">
-                          <a:solidFill>
-                            <a:srgbClr val="35424D"/>
-                          </a:solidFill>
-                          <a:latin typeface="Calibri"/>
-                        </a:rPr>
-                        <a:t>less accurate</a:t>
-                      </a:r>
-                    </a:p>
-                  </a:txBody>
-                  <a:tcPr marL="54864" marR="54864" marT="18288" marB="18288" anchor="ctr">
-                    <a:solidFill>
-                      <a:srgbClr val="FFFFFF"/>
-                    </a:solidFill>
-                  </a:tcPr>
-                </a:tc>
-              </a:tr>
-              <a:tr h="274320">
-                <a:tc>
-                  <a:txBody>
-                    <a:bodyPr wrap="square"/>
-                    <a:lstStyle/>
-                    <a:p>
-                      <a:pPr algn="l"/>
-                      <a:r>
-                        <a:rPr sz="1050" b="0">
-                          <a:solidFill>
-                            <a:srgbClr val="35424D"/>
-                          </a:solidFill>
-                          <a:latin typeface="Calibri"/>
-                        </a:rPr>
-                        <a:t>+ PADM residual re-ranking</a:t>
-                      </a:r>
-                    </a:p>
-                  </a:txBody>
-                  <a:tcPr marL="54864" marR="54864" marT="18288" marB="18288" anchor="ctr">
-                    <a:solidFill>
-                      <a:srgbClr val="ECF1F4"/>
-                    </a:solidFill>
-                  </a:tcPr>
-                </a:tc>
-                <a:tc>
-                  <a:txBody>
-                    <a:bodyPr wrap="square"/>
-                    <a:lstStyle/>
-                    <a:p>
-                      <a:pPr algn="ctr"/>
-                      <a:r>
-                        <a:rPr sz="1050" b="0">
-                          <a:solidFill>
-                            <a:srgbClr val="35424D"/>
-                          </a:solidFill>
-                          <a:latin typeface="Calibri"/>
-                        </a:rPr>
-                        <a:t>27.5%</a:t>
-                      </a:r>
-                    </a:p>
-                  </a:txBody>
-                  <a:tcPr marL="54864" marR="54864" marT="18288" marB="18288" anchor="ctr">
-                    <a:solidFill>
-                      <a:srgbClr val="ECF1F4"/>
-                    </a:solidFill>
-                  </a:tcPr>
-                </a:tc>
-                <a:tc>
-                  <a:txBody>
-                    <a:bodyPr wrap="square"/>
-                    <a:lstStyle/>
-                    <a:p>
-                      <a:pPr algn="ctr"/>
-                      <a:r>
-                        <a:rPr sz="1050" b="0">
-                          <a:solidFill>
-                            <a:srgbClr val="35424D"/>
-                          </a:solidFill>
-                          <a:latin typeface="Calibri"/>
-                        </a:rPr>
-                        <a:t>70.0%</a:t>
-                      </a:r>
-                    </a:p>
-                  </a:txBody>
-                  <a:tcPr marL="54864" marR="54864" marT="18288" marB="18288" anchor="ctr">
-                    <a:solidFill>
-                      <a:srgbClr val="ECF1F4"/>
-                    </a:solidFill>
-                  </a:tcPr>
-                </a:tc>
-                <a:tc>
-                  <a:txBody>
-                    <a:bodyPr wrap="square"/>
-                    <a:lstStyle/>
-                    <a:p>
-                      <a:pPr algn="ctr"/>
-                      <a:r>
-                        <a:rPr sz="1050" b="0">
-                          <a:solidFill>
-                            <a:srgbClr val="35424D"/>
-                          </a:solidFill>
-                          <a:latin typeface="Calibri"/>
-                        </a:rPr>
-                        <a:t>73.3%</a:t>
-                      </a:r>
-                    </a:p>
-                  </a:txBody>
-                  <a:tcPr marL="54864" marR="54864" marT="18288" marB="18288" anchor="ctr">
-                    <a:solidFill>
-                      <a:srgbClr val="ECF1F4"/>
-                    </a:solidFill>
-                  </a:tcPr>
-                </a:tc>
-                <a:tc>
-                  <a:txBody>
-                    <a:bodyPr wrap="square"/>
-                    <a:lstStyle/>
-                    <a:p>
-                      <a:pPr algn="ctr"/>
-                      <a:r>
-                        <a:rPr sz="1050" b="0">
-                          <a:solidFill>
-                            <a:srgbClr val="35424D"/>
-                          </a:solidFill>
-                          <a:latin typeface="Calibri"/>
-                        </a:rPr>
-                        <a:t>overfit</a:t>
-                      </a:r>
-                    </a:p>
-                  </a:txBody>
-                  <a:tcPr marL="54864" marR="54864" marT="18288" marB="18288" anchor="ctr">
-                    <a:solidFill>
-                      <a:srgbClr val="ECF1F4"/>
-                    </a:solidFill>
-                  </a:tcPr>
-                </a:tc>
-              </a:tr>
-              <a:tr h="274320">
-                <a:tc>
-                  <a:txBody>
-                    <a:bodyPr wrap="square"/>
-                    <a:lstStyle/>
-                    <a:p>
-                      <a:pPr algn="l"/>
-                      <a:r>
-                        <a:rPr sz="1050" b="0">
-                          <a:solidFill>
-                            <a:srgbClr val="35424D"/>
-                          </a:solidFill>
-                          <a:latin typeface="Calibri"/>
-                        </a:rPr>
-                        <a:t>+ max-likelihood re-ranking</a:t>
-                      </a:r>
-                    </a:p>
-                  </a:txBody>
-                  <a:tcPr marL="54864" marR="54864" marT="18288" marB="18288" anchor="ctr">
-                    <a:solidFill>
-                      <a:srgbClr val="FFFFFF"/>
-                    </a:solidFill>
-                  </a:tcPr>
-                </a:tc>
-                <a:tc>
-                  <a:txBody>
-                    <a:bodyPr wrap="square"/>
-                    <a:lstStyle/>
-                    <a:p>
-                      <a:pPr algn="ctr"/>
-                      <a:r>
-                        <a:rPr sz="1050" b="0">
-                          <a:solidFill>
-                            <a:srgbClr val="35424D"/>
-                          </a:solidFill>
-                          <a:latin typeface="Calibri"/>
-                        </a:rPr>
-                        <a:t>22.5%</a:t>
-                      </a:r>
-                    </a:p>
-                  </a:txBody>
-                  <a:tcPr marL="54864" marR="54864" marT="18288" marB="18288" anchor="ctr">
-                    <a:solidFill>
-                      <a:srgbClr val="FFFFFF"/>
-                    </a:solidFill>
-                  </a:tcPr>
-                </a:tc>
-                <a:tc>
-                  <a:txBody>
-                    <a:bodyPr wrap="square"/>
-                    <a:lstStyle/>
-                    <a:p>
-                      <a:pPr algn="ctr"/>
-                      <a:r>
-                        <a:rPr sz="1050" b="0">
-                          <a:solidFill>
-                            <a:srgbClr val="35424D"/>
-                          </a:solidFill>
-                          <a:latin typeface="Calibri"/>
-                        </a:rPr>
-                        <a:t>36.7%</a:t>
-                      </a:r>
-                    </a:p>
-                  </a:txBody>
-                  <a:tcPr marL="54864" marR="54864" marT="18288" marB="18288" anchor="ctr">
-                    <a:solidFill>
-                      <a:srgbClr val="FFFFFF"/>
-                    </a:solidFill>
-                  </a:tcPr>
-                </a:tc>
-                <a:tc>
-                  <a:txBody>
-                    <a:bodyPr wrap="square"/>
-                    <a:lstStyle/>
-                    <a:p>
-                      <a:pPr algn="ctr"/>
-                      <a:r>
-                        <a:rPr sz="1050" b="0">
-                          <a:solidFill>
-                            <a:srgbClr val="35424D"/>
-                          </a:solidFill>
-                          <a:latin typeface="Calibri"/>
-                        </a:rPr>
-                        <a:t>50.0%</a:t>
-                      </a:r>
-                    </a:p>
-                  </a:txBody>
-                  <a:tcPr marL="54864" marR="54864" marT="18288" marB="18288" anchor="ctr">
-                    <a:solidFill>
-                      <a:srgbClr val="FFFFFF"/>
-                    </a:solidFill>
-                  </a:tcPr>
-                </a:tc>
-                <a:tc>
-                  <a:txBody>
-                    <a:bodyPr wrap="square"/>
-                    <a:lstStyle/>
-                    <a:p>
-                      <a:pPr algn="ctr"/>
-                      <a:r>
-                        <a:rPr sz="1050" b="0">
-                          <a:solidFill>
-                            <a:srgbClr val="35424D"/>
-                          </a:solidFill>
-                          <a:latin typeface="Calibri"/>
-                        </a:rPr>
-                        <a:t>no gain</a:t>
-                      </a:r>
-                    </a:p>
-                  </a:txBody>
-                  <a:tcPr marL="54864" marR="54864" marT="18288" marB="18288" anchor="ctr">
-                    <a:solidFill>
-                      <a:srgbClr val="FFFFFF"/>
-                    </a:solidFill>
-                  </a:tcPr>
-                </a:tc>
-              </a:tr>
-              <a:tr h="274320">
-                <a:tc>
-                  <a:txBody>
-                    <a:bodyPr wrap="square"/>
-                    <a:lstStyle/>
-                    <a:p>
-                      <a:pPr algn="l"/>
-                      <a:r>
-                        <a:rPr sz="1050" b="0">
-                          <a:solidFill>
-                            <a:srgbClr val="35424D"/>
-                          </a:solidFill>
-                          <a:latin typeface="Calibri"/>
-                        </a:rPr>
-                        <a:t>+ coarse-level consensus</a:t>
-                      </a:r>
-                    </a:p>
-                  </a:txBody>
-                  <a:tcPr marL="54864" marR="54864" marT="18288" marB="18288" anchor="ctr">
-                    <a:solidFill>
-                      <a:srgbClr val="ECF1F4"/>
-                    </a:solidFill>
-                  </a:tcPr>
-                </a:tc>
-                <a:tc>
-                  <a:txBody>
-                    <a:bodyPr wrap="square"/>
-                    <a:lstStyle/>
-                    <a:p>
-                      <a:pPr algn="ctr"/>
-                      <a:r>
-                        <a:rPr sz="1050" b="0">
-                          <a:solidFill>
-                            <a:srgbClr val="35424D"/>
-                          </a:solidFill>
-                          <a:latin typeface="Calibri"/>
-                        </a:rPr>
-                        <a:t>62.5%</a:t>
-                      </a:r>
-                    </a:p>
-                  </a:txBody>
-                  <a:tcPr marL="54864" marR="54864" marT="18288" marB="18288" anchor="ctr">
-                    <a:solidFill>
-                      <a:srgbClr val="ECF1F4"/>
-                    </a:solidFill>
-                  </a:tcPr>
-                </a:tc>
-                <a:tc>
-                  <a:txBody>
-                    <a:bodyPr wrap="square"/>
-                    <a:lstStyle/>
-                    <a:p>
-                      <a:pPr algn="ctr"/>
-                      <a:r>
-                        <a:rPr sz="1050" b="0">
-                          <a:solidFill>
-                            <a:srgbClr val="35424D"/>
-                          </a:solidFill>
-                          <a:latin typeface="Calibri"/>
-                        </a:rPr>
-                        <a:t>73.3%</a:t>
-                      </a:r>
-                    </a:p>
-                  </a:txBody>
-                  <a:tcPr marL="54864" marR="54864" marT="18288" marB="18288" anchor="ctr">
-                    <a:solidFill>
-                      <a:srgbClr val="ECF1F4"/>
-                    </a:solidFill>
-                  </a:tcPr>
-                </a:tc>
-                <a:tc>
-                  <a:txBody>
-                    <a:bodyPr wrap="square"/>
-                    <a:lstStyle/>
-                    <a:p>
-                      <a:pPr algn="ctr"/>
-                      <a:r>
-                        <a:rPr sz="1050" b="0">
-                          <a:solidFill>
-                            <a:srgbClr val="35424D"/>
-                          </a:solidFill>
-                          <a:latin typeface="Calibri"/>
-                        </a:rPr>
-                        <a:t>36.7%</a:t>
+                        <a:t>90.0%</a:t>
                       </a:r>
                     </a:p>
                   </a:txBody>
@@ -7998,123 +7998,6 @@
                   </a:tcPr>
                 </a:tc>
               </a:tr>
-              <a:tr h="274320">
-                <a:tc>
-                  <a:txBody>
-                    <a:bodyPr wrap="square"/>
-                    <a:lstStyle/>
-                    <a:p>
-                      <a:pPr algn="l"/>
-                      <a:r>
-                        <a:rPr sz="1050" b="0">
-                          <a:solidFill>
-                            <a:srgbClr val="35424D"/>
-                          </a:solidFill>
-                          <a:latin typeface="Calibri"/>
-                        </a:rPr>
-                        <a:t>+ row destriping</a:t>
-                      </a:r>
-                    </a:p>
-                  </a:txBody>
-                  <a:tcPr marL="54864" marR="54864" marT="18288" marB="18288" anchor="ctr">
-                    <a:solidFill>
-                      <a:srgbClr val="FFFFFF"/>
-                    </a:solidFill>
-                  </a:tcPr>
-                </a:tc>
-                <a:tc>
-                  <a:txBody>
-                    <a:bodyPr wrap="square"/>
-                    <a:lstStyle/>
-                    <a:p>
-                      <a:pPr algn="ctr"/>
-                      <a:r>
-                        <a:rPr sz="1050" b="0">
-                          <a:solidFill>
-                            <a:srgbClr val="35424D"/>
-                          </a:solidFill>
-                          <a:latin typeface="Calibri"/>
-                        </a:rPr>
-                        <a:t>35.0%</a:t>
-                      </a:r>
-                    </a:p>
-                  </a:txBody>
-                  <a:tcPr marL="54864" marR="54864" marT="18288" marB="18288" anchor="ctr">
-                    <a:solidFill>
-                      <a:srgbClr val="FFFFFF"/>
-                    </a:solidFill>
-                  </a:tcPr>
-                </a:tc>
-                <a:tc>
-                  <a:txBody>
-                    <a:bodyPr wrap="square"/>
-                    <a:lstStyle/>
-                    <a:p>
-                      <a:pPr algn="ctr"/>
-                      <a:r>
-                        <a:rPr sz="1050" b="0">
-                          <a:solidFill>
-                            <a:srgbClr val="35424D"/>
-                          </a:solidFill>
-                          <a:latin typeface="Calibri"/>
-                        </a:rPr>
-                        <a:t>90.0%</a:t>
-                      </a:r>
-                    </a:p>
-                  </a:txBody>
-                  <a:tcPr marL="54864" marR="54864" marT="18288" marB="18288" anchor="ctr">
-                    <a:solidFill>
-                      <a:srgbClr val="FFFFFF"/>
-                    </a:solidFill>
-                  </a:tcPr>
-                </a:tc>
-                <a:tc>
-                  <a:txBody>
-                    <a:bodyPr wrap="square"/>
-                    <a:lstStyle/>
-                    <a:p>
-                      <a:pPr algn="ctr"/>
-                      <a:r>
-                        <a:rPr sz="1050" b="0">
-                          <a:solidFill>
-                            <a:srgbClr val="35424D"/>
-                          </a:solidFill>
-                          <a:latin typeface="Calibri"/>
-                        </a:rPr>
-                        <a:t>90.0%</a:t>
-                      </a:r>
-                    </a:p>
-                  </a:txBody>
-                  <a:tcPr marL="54864" marR="54864" marT="18288" marB="18288" anchor="ctr">
-                    <a:solidFill>
-                      <a:srgbClr val="FFFFFF"/>
-                    </a:solidFill>
-                  </a:tcPr>
-                </a:tc>
-                <a:tc>
-                  <a:txBody>
-                    <a:bodyPr wrap="square"/>
-                    <a:lstStyle/>
-                    <a:p>
-                      <a:pPr algn="ctr"/>
-                      <a:r>
-                        <a:rPr sz="1050" b="0">
-                          <a:solidFill>
-                            <a:srgbClr val="35424D"/>
-                          </a:solidFill>
-                          <a:latin typeface="Calibri"/>
-                        </a:rPr>
-                        <a:t>harmful</a:t>
-                      </a:r>
-                    </a:p>
-                  </a:txBody>
-                  <a:tcPr marL="54864" marR="54864" marT="18288" marB="18288" anchor="ctr">
-                    <a:solidFill>
-                      <a:srgbClr val="FFFFFF"/>
-                    </a:solidFill>
-                  </a:tcPr>
-                </a:tc>
-              </a:tr>
             </a:tbl>
           </a:graphicData>
         </a:graphic>
@@ -8127,7 +8010,7 @@
         </p:nvSpPr>
         <p:spPr>
           <a:xfrm>
-            <a:off x="548640" y="4965192"/>
+            <a:off x="548640" y="4690872"/>
             <a:ext cx="6949440" cy="256032"/>
           </a:xfrm>
           <a:prstGeom prst="rect">
@@ -8682,7 +8565,7 @@
                 </a:solidFill>
                 <a:latin typeface="Calibri"/>
               </a:rPr>
-              <a:t>•  Euclidean error 893.89 px — a different site entirely</a:t>
+              <a:t>•  Euclidean error 511.68 px — a different site entirely</a:t>
             </a:r>
           </a:p>
           <a:p>
@@ -8698,7 +8581,7 @@
                 </a:solidFill>
                 <a:latin typeface="Calibri"/>
               </a:rPr>
-              <a:t>•  The true location WAS a candidate, at rank 4</a:t>
+              <a:t>•  The true location WAS a candidate, at rank 16</a:t>
             </a:r>
           </a:p>
           <a:p>
@@ -8714,7 +8597,7 @@
                 </a:solidFill>
                 <a:latin typeface="Calibri"/>
               </a:rPr>
-              <a:t>•  It lost by 0.0027 of correlation — 0.32% of the winning score</a:t>
+              <a:t>•  It lost by 0.0228 of correlation — 2.58% of the winning score</a:t>
             </a:r>
           </a:p>
           <a:p>
@@ -9066,7 +8949,7 @@
                           </a:solidFill>
                           <a:latin typeface="Calibri"/>
                         </a:rPr>
-                        <a:t>10%</a:t>
+                        <a:t>5%</a:t>
                       </a:r>
                     </a:p>
                   </a:txBody>
@@ -9089,7 +8972,7 @@
                           </a:solidFill>
                           <a:latin typeface="Calibri"/>
                         </a:rPr>
-                        <a:t>90%</a:t>
+                        <a:t>95%</a:t>
                       </a:r>
                     </a:p>
                   </a:txBody>
@@ -9160,7 +9043,7 @@
                           </a:solidFill>
                           <a:latin typeface="Calibri"/>
                         </a:rPr>
-                        <a:t>56%</a:t>
+                        <a:t>44%</a:t>
                       </a:r>
                     </a:p>
                   </a:txBody>
@@ -9228,7 +9111,7 @@
                 </a:solidFill>
                 <a:latin typeface="Calibri"/>
               </a:rPr>
-              <a:t>5 of the 7 failures fall in those 9 pairs. The method fails precisely where the information needed to succeed is absent — the honest definition of the problem's limit.</a:t>
+              <a:t>4 of the 5 failures fall in those 9 pairs. The method fails precisely where the information needed to succeed is absent — the honest definition of the problem's limit.</a:t>
             </a:r>
           </a:p>
         </p:txBody>
@@ -9499,7 +9382,7 @@
                 </a:solidFill>
                 <a:latin typeface="Calibri"/>
               </a:rPr>
-              <a:t>About 345 ms per pair against a 300 ms goal. The per-candidate refit is most of it; top_k is the dial. We took 9 points of mis-lock for the time.</a:t>
+              <a:t>About 453 ms per pair against a 300 ms goal. The per-candidate refit is most of it; top_k is the dial. We took 9 points of mis-lock for the time.</a:t>
             </a:r>
           </a:p>
         </p:txBody>
@@ -9759,7 +9642,7 @@
                 </a:solidFill>
                 <a:latin typeface="Cambria"/>
               </a:rPr>
-              <a:t>76.7% → 23.3%</a:t>
+              <a:t>76.7% → 16.7%</a:t>
             </a:r>
           </a:p>
         </p:txBody>
@@ -9875,7 +9758,7 @@
                 </a:solidFill>
                 <a:latin typeface="Cambria"/>
               </a:rPr>
-              <a:t>90.0% → 16.7%</a:t>
+              <a:t>90.0% → 13.3%</a:t>
             </a:r>
           </a:p>
         </p:txBody>
@@ -9991,7 +9874,7 @@
                 </a:solidFill>
                 <a:latin typeface="Cambria"/>
               </a:rPr>
-              <a:t>17.5% → 67.5%</a:t>
+              <a:t>17.5% → 70.0%</a:t>
             </a:r>
           </a:p>
         </p:txBody>
@@ -16077,7 +15960,7 @@
                 </a:solidFill>
                 <a:latin typeface="Courier New"/>
               </a:rPr>
-              <a:t># single pair — prints exactly one line: "547.03,289.62"</a:t>
+              <a:t># single pair — prints exactly one line: "547.04,289.63"</a:t>
             </a:r>
           </a:p>
           <a:p>
@@ -18121,7 +18004,7 @@
                           </a:solidFill>
                           <a:latin typeface="Calibri"/>
                         </a:rPr>
-                        <a:t>25.0%</a:t>
+                        <a:t>22.5%</a:t>
                       </a:r>
                     </a:p>
                   </a:txBody>
@@ -18144,7 +18027,53 @@
                           </a:solidFill>
                           <a:latin typeface="Calibri"/>
                         </a:rPr>
-                        <a:t>0.297</a:t>
+                        <a:t>0.275</a:t>
+                      </a:r>
+                    </a:p>
+                  </a:txBody>
+                  <a:tcPr marL="54864" marR="54864" marT="18288" marB="18288" anchor="ctr">
+                    <a:solidFill>
+                      <a:srgbClr val="ECF1F4"/>
+                    </a:solidFill>
+                  </a:tcPr>
+                </a:tc>
+                <a:tc>
+                  <a:txBody>
+                    <a:bodyPr wrap="square"/>
+                    <a:lstStyle/>
+                    <a:p>
+                      <a:pPr algn="ctr"/>
+                      <a:r>
+                        <a:rPr sz="1100" b="0">
+                          <a:solidFill>
+                            <a:srgbClr val="35424D"/>
+                          </a:solidFill>
+                          <a:latin typeface="Calibri"/>
+                        </a:rPr>
+                        <a:t>77.5%</a:t>
+                      </a:r>
+                    </a:p>
+                  </a:txBody>
+                  <a:tcPr marL="54864" marR="54864" marT="18288" marB="18288" anchor="ctr">
+                    <a:solidFill>
+                      <a:srgbClr val="ECF1F4"/>
+                    </a:solidFill>
+                  </a:tcPr>
+                </a:tc>
+                <a:tc>
+                  <a:txBody>
+                    <a:bodyPr wrap="square"/>
+                    <a:lstStyle/>
+                    <a:p>
+                      <a:pPr algn="ctr"/>
+                      <a:r>
+                        <a:rPr sz="1100" b="0">
+                          <a:solidFill>
+                            <a:srgbClr val="35424D"/>
+                          </a:solidFill>
+                          <a:latin typeface="Calibri"/>
+                        </a:rPr>
+                        <a:t>77.5%</a:t>
                       </a:r>
                     </a:p>
                   </a:txBody>
@@ -18190,7 +18119,7 @@
                           </a:solidFill>
                           <a:latin typeface="Calibri"/>
                         </a:rPr>
-                        <a:t>75.0%</a:t>
+                        <a:t>70.0%</a:t>
                       </a:r>
                     </a:p>
                   </a:txBody>
@@ -18213,53 +18142,7 @@
                           </a:solidFill>
                           <a:latin typeface="Calibri"/>
                         </a:rPr>
-                        <a:t>72.5%</a:t>
-                      </a:r>
-                    </a:p>
-                  </a:txBody>
-                  <a:tcPr marL="54864" marR="54864" marT="18288" marB="18288" anchor="ctr">
-                    <a:solidFill>
-                      <a:srgbClr val="ECF1F4"/>
-                    </a:solidFill>
-                  </a:tcPr>
-                </a:tc>
-                <a:tc>
-                  <a:txBody>
-                    <a:bodyPr wrap="square"/>
-                    <a:lstStyle/>
-                    <a:p>
-                      <a:pPr algn="ctr"/>
-                      <a:r>
-                        <a:rPr sz="1100" b="0">
-                          <a:solidFill>
-                            <a:srgbClr val="35424D"/>
-                          </a:solidFill>
-                          <a:latin typeface="Calibri"/>
-                        </a:rPr>
-                        <a:t>67.5%</a:t>
-                      </a:r>
-                    </a:p>
-                  </a:txBody>
-                  <a:tcPr marL="54864" marR="54864" marT="18288" marB="18288" anchor="ctr">
-                    <a:solidFill>
-                      <a:srgbClr val="ECF1F4"/>
-                    </a:solidFill>
-                  </a:tcPr>
-                </a:tc>
-                <a:tc>
-                  <a:txBody>
-                    <a:bodyPr wrap="square"/>
-                    <a:lstStyle/>
-                    <a:p>
-                      <a:pPr algn="ctr"/>
-                      <a:r>
-                        <a:rPr sz="1100" b="0">
-                          <a:solidFill>
-                            <a:srgbClr val="35424D"/>
-                          </a:solidFill>
-                          <a:latin typeface="Calibri"/>
-                        </a:rPr>
-                        <a:t>313 ms</a:t>
+                        <a:t>388 ms</a:t>
                       </a:r>
                     </a:p>
                   </a:txBody>
@@ -18539,7 +18422,7 @@
                           </a:solidFill>
                           <a:latin typeface="Calibri"/>
                         </a:rPr>
-                        <a:t>23.3%</a:t>
+                        <a:t>16.7%</a:t>
                       </a:r>
                     </a:p>
                   </a:txBody>
@@ -18562,7 +18445,53 @@
                           </a:solidFill>
                           <a:latin typeface="Calibri"/>
                         </a:rPr>
-                        <a:t>0.343</a:t>
+                        <a:t>0.337</a:t>
+                      </a:r>
+                    </a:p>
+                  </a:txBody>
+                  <a:tcPr marL="54864" marR="54864" marT="18288" marB="18288" anchor="ctr">
+                    <a:solidFill>
+                      <a:srgbClr val="ECF1F4"/>
+                    </a:solidFill>
+                  </a:tcPr>
+                </a:tc>
+                <a:tc>
+                  <a:txBody>
+                    <a:bodyPr wrap="square"/>
+                    <a:lstStyle/>
+                    <a:p>
+                      <a:pPr algn="ctr"/>
+                      <a:r>
+                        <a:rPr sz="1100" b="0">
+                          <a:solidFill>
+                            <a:srgbClr val="35424D"/>
+                          </a:solidFill>
+                          <a:latin typeface="Calibri"/>
+                        </a:rPr>
+                        <a:t>83.3%</a:t>
+                      </a:r>
+                    </a:p>
+                  </a:txBody>
+                  <a:tcPr marL="54864" marR="54864" marT="18288" marB="18288" anchor="ctr">
+                    <a:solidFill>
+                      <a:srgbClr val="ECF1F4"/>
+                    </a:solidFill>
+                  </a:tcPr>
+                </a:tc>
+                <a:tc>
+                  <a:txBody>
+                    <a:bodyPr wrap="square"/>
+                    <a:lstStyle/>
+                    <a:p>
+                      <a:pPr algn="ctr"/>
+                      <a:r>
+                        <a:rPr sz="1100" b="0">
+                          <a:solidFill>
+                            <a:srgbClr val="35424D"/>
+                          </a:solidFill>
+                          <a:latin typeface="Calibri"/>
+                        </a:rPr>
+                        <a:t>80.0%</a:t>
                       </a:r>
                     </a:p>
                   </a:txBody>
@@ -18608,52 +18537,6 @@
                           </a:solidFill>
                           <a:latin typeface="Calibri"/>
                         </a:rPr>
-                        <a:t>73.3%</a:t>
-                      </a:r>
-                    </a:p>
-                  </a:txBody>
-                  <a:tcPr marL="54864" marR="54864" marT="18288" marB="18288" anchor="ctr">
-                    <a:solidFill>
-                      <a:srgbClr val="ECF1F4"/>
-                    </a:solidFill>
-                  </a:tcPr>
-                </a:tc>
-                <a:tc>
-                  <a:txBody>
-                    <a:bodyPr wrap="square"/>
-                    <a:lstStyle/>
-                    <a:p>
-                      <a:pPr algn="ctr"/>
-                      <a:r>
-                        <a:rPr sz="1100" b="0">
-                          <a:solidFill>
-                            <a:srgbClr val="35424D"/>
-                          </a:solidFill>
-                          <a:latin typeface="Calibri"/>
-                        </a:rPr>
-                        <a:t>73.3%</a:t>
-                      </a:r>
-                    </a:p>
-                  </a:txBody>
-                  <a:tcPr marL="54864" marR="54864" marT="18288" marB="18288" anchor="ctr">
-                    <a:solidFill>
-                      <a:srgbClr val="ECF1F4"/>
-                    </a:solidFill>
-                  </a:tcPr>
-                </a:tc>
-                <a:tc>
-                  <a:txBody>
-                    <a:bodyPr wrap="square"/>
-                    <a:lstStyle/>
-                    <a:p>
-                      <a:pPr algn="ctr"/>
-                      <a:r>
-                        <a:rPr sz="1100" b="0">
-                          <a:solidFill>
-                            <a:srgbClr val="35424D"/>
-                          </a:solidFill>
-                          <a:latin typeface="Calibri"/>
-                        </a:rPr>
                         <a:t>63.3%</a:t>
                       </a:r>
                     </a:p>
@@ -18677,7 +18560,7 @@
                           </a:solidFill>
                           <a:latin typeface="Calibri"/>
                         </a:rPr>
-                        <a:t>345 ms</a:t>
+                        <a:t>453 ms</a:t>
                       </a:r>
                     </a:p>
                   </a:txBody>
@@ -18957,7 +18840,7 @@
                           </a:solidFill>
                           <a:latin typeface="Calibri"/>
                         </a:rPr>
-                        <a:t>16.7%</a:t>
+                        <a:t>13.3%</a:t>
                       </a:r>
                     </a:p>
                   </a:txBody>
@@ -18980,7 +18863,53 @@
                           </a:solidFill>
                           <a:latin typeface="Calibri"/>
                         </a:rPr>
-                        <a:t>0.313</a:t>
+                        <a:t>0.201</a:t>
+                      </a:r>
+                    </a:p>
+                  </a:txBody>
+                  <a:tcPr marL="54864" marR="54864" marT="18288" marB="18288" anchor="ctr">
+                    <a:solidFill>
+                      <a:srgbClr val="ECF1F4"/>
+                    </a:solidFill>
+                  </a:tcPr>
+                </a:tc>
+                <a:tc>
+                  <a:txBody>
+                    <a:bodyPr wrap="square"/>
+                    <a:lstStyle/>
+                    <a:p>
+                      <a:pPr algn="ctr"/>
+                      <a:r>
+                        <a:rPr sz="1100" b="0">
+                          <a:solidFill>
+                            <a:srgbClr val="35424D"/>
+                          </a:solidFill>
+                          <a:latin typeface="Calibri"/>
+                        </a:rPr>
+                        <a:t>86.7%</a:t>
+                      </a:r>
+                    </a:p>
+                  </a:txBody>
+                  <a:tcPr marL="54864" marR="54864" marT="18288" marB="18288" anchor="ctr">
+                    <a:solidFill>
+                      <a:srgbClr val="ECF1F4"/>
+                    </a:solidFill>
+                  </a:tcPr>
+                </a:tc>
+                <a:tc>
+                  <a:txBody>
+                    <a:bodyPr wrap="square"/>
+                    <a:lstStyle/>
+                    <a:p>
+                      <a:pPr algn="ctr"/>
+                      <a:r>
+                        <a:rPr sz="1100" b="0">
+                          <a:solidFill>
+                            <a:srgbClr val="35424D"/>
+                          </a:solidFill>
+                          <a:latin typeface="Calibri"/>
+                        </a:rPr>
+                        <a:t>86.7%</a:t>
                       </a:r>
                     </a:p>
                   </a:txBody>
@@ -19026,7 +18955,7 @@
                           </a:solidFill>
                           <a:latin typeface="Calibri"/>
                         </a:rPr>
-                        <a:t>83.3%</a:t>
+                        <a:t>66.7%</a:t>
                       </a:r>
                     </a:p>
                   </a:txBody>
@@ -19049,53 +18978,7 @@
                           </a:solidFill>
                           <a:latin typeface="Calibri"/>
                         </a:rPr>
-                        <a:t>80.0%</a:t>
-                      </a:r>
-                    </a:p>
-                  </a:txBody>
-                  <a:tcPr marL="54864" marR="54864" marT="18288" marB="18288" anchor="ctr">
-                    <a:solidFill>
-                      <a:srgbClr val="ECF1F4"/>
-                    </a:solidFill>
-                  </a:tcPr>
-                </a:tc>
-                <a:tc>
-                  <a:txBody>
-                    <a:bodyPr wrap="square"/>
-                    <a:lstStyle/>
-                    <a:p>
-                      <a:pPr algn="ctr"/>
-                      <a:r>
-                        <a:rPr sz="1100" b="0">
-                          <a:solidFill>
-                            <a:srgbClr val="35424D"/>
-                          </a:solidFill>
-                          <a:latin typeface="Calibri"/>
-                        </a:rPr>
-                        <a:t>63.3%</a:t>
-                      </a:r>
-                    </a:p>
-                  </a:txBody>
-                  <a:tcPr marL="54864" marR="54864" marT="18288" marB="18288" anchor="ctr">
-                    <a:solidFill>
-                      <a:srgbClr val="ECF1F4"/>
-                    </a:solidFill>
-                  </a:tcPr>
-                </a:tc>
-                <a:tc>
-                  <a:txBody>
-                    <a:bodyPr wrap="square"/>
-                    <a:lstStyle/>
-                    <a:p>
-                      <a:pPr algn="ctr"/>
-                      <a:r>
-                        <a:rPr sz="1100" b="0">
-                          <a:solidFill>
-                            <a:srgbClr val="35424D"/>
-                          </a:solidFill>
-                          <a:latin typeface="Calibri"/>
-                        </a:rPr>
-                        <a:t>348 ms</a:t>
+                        <a:t>445 ms</a:t>
                       </a:r>
                     </a:p>
                   </a:txBody>
@@ -19175,8 +19058,8 @@
                 </a:solidFill>
                 <a:latin typeface="Calibri"/>
               </a:rPr>
-              <a:t>On the sponsor's fixed 10:1 data the task is precision: median error improves from 1.102 px to 0.297 px and the sub-pixel pass rate rises from 17.5% to 67.5%.
-On our own data — the 9:1–11:1 and ±2° envelope the problem statement says will be tested — the baseline does not work at all (76.7% mis-lock against 23.3%). That axis is invisible to anyone validating only on the published generator, because it produces neither rotation nor scale variation.</a:t>
+              <a:t>On the sponsor's fixed 10:1 data the task is precision: median error improves from 1.102 px to 0.275 px and the sub-pixel pass rate rises from 17.5% to 70.0%.
+On our own data — the 9:1–11:1 and ±2° envelope the problem statement says will be tested — the baseline does not work at all (76.7% mis-lock against 16.7%). That axis is invisible to anyone validating only on the published generator, because it produces neither rotation nor scale variation.</a:t>
             </a:r>
           </a:p>
         </p:txBody>

--- a/solution_presentation.pptx
+++ b/solution_presentation.pptx
@@ -9382,7 +9382,7 @@
                 </a:solidFill>
                 <a:latin typeface="Calibri"/>
               </a:rPr>
-              <a:t>About 453 ms per pair against a 300 ms goal. The per-candidate refit is most of it; top_k is the dial. We took 9 points of mis-lock for the time.</a:t>
+              <a:t>About 393 ms per pair against a 300 ms goal. The per-candidate refit is most of it; top_k is the dial. We took 9 points of mis-lock for the time.</a:t>
             </a:r>
           </a:p>
         </p:txBody>
@@ -18142,7 +18142,7 @@
                           </a:solidFill>
                           <a:latin typeface="Calibri"/>
                         </a:rPr>
-                        <a:t>388 ms</a:t>
+                        <a:t>370 ms</a:t>
                       </a:r>
                     </a:p>
                   </a:txBody>
@@ -18560,7 +18560,7 @@
                           </a:solidFill>
                           <a:latin typeface="Calibri"/>
                         </a:rPr>
-                        <a:t>453 ms</a:t>
+                        <a:t>393 ms</a:t>
                       </a:r>
                     </a:p>
                   </a:txBody>
@@ -18978,7 +18978,7 @@
                           </a:solidFill>
                           <a:latin typeface="Calibri"/>
                         </a:rPr>
-                        <a:t>445 ms</a:t>
+                        <a:t>400 ms</a:t>
                       </a:r>
                     </a:p>
                   </a:txBody>

--- a/solution_presentation.pptx
+++ b/solution_presentation.pptx
@@ -8736,44 +8736,9 @@
           </a:p>
         </p:txBody>
       </p:sp>
-      <p:sp>
-        <p:nvSpPr>
-          <p:cNvPr id="10" name="TextBox 9"/>
-          <p:cNvSpPr txBox="1"/>
-          <p:nvPr/>
-        </p:nvSpPr>
-        <p:spPr>
-          <a:xfrm>
-            <a:off x="6583680" y="2121408"/>
-            <a:ext cx="4754880" cy="384048"/>
-          </a:xfrm>
-          <a:prstGeom prst="rect">
-            <a:avLst/>
-          </a:prstGeom>
-          <a:noFill/>
-        </p:spPr>
-        <p:txBody>
-          <a:bodyPr wrap="square" lIns="0" rIns="0" tIns="0" bIns="0" anchor="t">
-            <a:spAutoFit/>
-          </a:bodyPr>
-          <a:lstStyle/>
-          <a:p>
-            <a:pPr algn="l"/>
-            <a:r>
-              <a:rPr sz="1050" b="0" i="0">
-                <a:solidFill>
-                  <a:srgbClr val="5A6B78"/>
-                </a:solidFill>
-                <a:latin typeface="Calibri"/>
-              </a:rPr>
-              <a:t>Our generator labels each pair by whether an aperiodic landmark is in view. Stratifying the results by that label:</a:t>
-            </a:r>
-          </a:p>
-        </p:txBody>
-      </p:sp>
       <p:graphicFrame>
         <p:nvGraphicFramePr>
-          <p:cNvPr id="11" name="Table 10"/>
+          <p:cNvPr id="10" name="Table 9"/>
           <p:cNvGraphicFramePr>
             <a:graphicFrameLocks noGrp="1"/>
           </p:cNvGraphicFramePr>
@@ -9083,14 +9048,14 @@
       </p:graphicFrame>
       <p:sp>
         <p:nvSpPr>
-          <p:cNvPr id="12" name="TextBox 11"/>
+          <p:cNvPr id="11" name="TextBox 10"/>
           <p:cNvSpPr txBox="1"/>
           <p:nvPr/>
         </p:nvSpPr>
         <p:spPr>
           <a:xfrm>
-            <a:off x="6583680" y="3529584"/>
-            <a:ext cx="4754880" cy="329184"/>
+            <a:off x="548640" y="4023360"/>
+            <a:ext cx="11064240" cy="320040"/>
           </a:xfrm>
           <a:prstGeom prst="rect">
             <a:avLst/>
@@ -9105,41 +9070,6 @@
           <a:p>
             <a:pPr algn="l"/>
             <a:r>
-              <a:rPr sz="950" b="0" i="1">
-                <a:solidFill>
-                  <a:srgbClr val="5A6B78"/>
-                </a:solidFill>
-                <a:latin typeface="Calibri"/>
-              </a:rPr>
-              <a:t>4 of the 5 failures fall in those 9 pairs. The method fails precisely where the information needed to succeed is absent — the honest definition of the problem's limit.</a:t>
-            </a:r>
-          </a:p>
-        </p:txBody>
-      </p:sp>
-      <p:sp>
-        <p:nvSpPr>
-          <p:cNvPr id="13" name="TextBox 12"/>
-          <p:cNvSpPr txBox="1"/>
-          <p:nvPr/>
-        </p:nvSpPr>
-        <p:spPr>
-          <a:xfrm>
-            <a:off x="548640" y="4023360"/>
-            <a:ext cx="11064240" cy="320040"/>
-          </a:xfrm>
-          <a:prstGeom prst="rect">
-            <a:avLst/>
-          </a:prstGeom>
-          <a:noFill/>
-        </p:spPr>
-        <p:txBody>
-          <a:bodyPr wrap="square" lIns="0" rIns="0" tIns="0" bIns="0" anchor="t">
-            <a:spAutoFit/>
-          </a:bodyPr>
-          <a:lstStyle/>
-          <a:p>
-            <a:pPr algn="l"/>
-            <a:r>
               <a:rPr sz="1600" b="1" i="0">
                 <a:solidFill>
                   <a:srgbClr val="0F2233"/>
@@ -9153,7 +9083,7 @@
       </p:sp>
       <p:sp>
         <p:nvSpPr>
-          <p:cNvPr id="14" name="Rounded Rectangle 13"/>
+          <p:cNvPr id="12" name="Rounded Rectangle 11"/>
           <p:cNvSpPr/>
           <p:nvPr/>
         </p:nvSpPr>
@@ -9201,7 +9131,7 @@
       </p:sp>
       <p:sp>
         <p:nvSpPr>
-          <p:cNvPr id="15" name="TextBox 14"/>
+          <p:cNvPr id="13" name="TextBox 12"/>
           <p:cNvSpPr txBox="1"/>
           <p:nvPr/>
         </p:nvSpPr>
@@ -9236,7 +9166,7 @@
       </p:sp>
       <p:sp>
         <p:nvSpPr>
-          <p:cNvPr id="16" name="TextBox 15"/>
+          <p:cNvPr id="14" name="TextBox 13"/>
           <p:cNvSpPr txBox="1"/>
           <p:nvPr/>
         </p:nvSpPr>
@@ -9271,7 +9201,7 @@
       </p:sp>
       <p:sp>
         <p:nvSpPr>
-          <p:cNvPr id="17" name="Rounded Rectangle 16"/>
+          <p:cNvPr id="15" name="Rounded Rectangle 14"/>
           <p:cNvSpPr/>
           <p:nvPr/>
         </p:nvSpPr>
@@ -9319,7 +9249,7 @@
       </p:sp>
       <p:sp>
         <p:nvSpPr>
-          <p:cNvPr id="18" name="TextBox 17"/>
+          <p:cNvPr id="16" name="TextBox 15"/>
           <p:cNvSpPr txBox="1"/>
           <p:nvPr/>
         </p:nvSpPr>
@@ -9354,7 +9284,7 @@
       </p:sp>
       <p:sp>
         <p:nvSpPr>
-          <p:cNvPr id="19" name="TextBox 18"/>
+          <p:cNvPr id="17" name="TextBox 16"/>
           <p:cNvSpPr txBox="1"/>
           <p:nvPr/>
         </p:nvSpPr>
@@ -9389,7 +9319,7 @@
       </p:sp>
       <p:sp>
         <p:nvSpPr>
-          <p:cNvPr id="20" name="Rounded Rectangle 19"/>
+          <p:cNvPr id="18" name="Rounded Rectangle 17"/>
           <p:cNvSpPr/>
           <p:nvPr/>
         </p:nvSpPr>
@@ -9437,7 +9367,7 @@
       </p:sp>
       <p:sp>
         <p:nvSpPr>
-          <p:cNvPr id="21" name="TextBox 20"/>
+          <p:cNvPr id="19" name="TextBox 18"/>
           <p:cNvSpPr txBox="1"/>
           <p:nvPr/>
         </p:nvSpPr>
@@ -9465,14 +9395,14 @@
                 </a:solidFill>
                 <a:latin typeface="Calibri"/>
               </a:rPr>
-              <a:t>Untested axes remain</a:t>
-            </a:r>
-          </a:p>
-        </p:txBody>
-      </p:sp>
-      <p:sp>
-        <p:nvSpPr>
-          <p:cNvPr id="22" name="TextBox 21"/>
+              <a:t>The screen is a hard gate</a:t>
+            </a:r>
+          </a:p>
+        </p:txBody>
+      </p:sp>
+      <p:sp>
+        <p:nvSpPr>
+          <p:cNvPr id="20" name="TextBox 19"/>
           <p:cNvSpPr txBox="1"/>
           <p:nvPr/>
         </p:nvSpPr>
@@ -9500,7 +9430,7 @@
                 </a:solidFill>
                 <a:latin typeface="Calibri"/>
               </a:rPr>
-              <a:t>Barrel distortion, astigmatism, charging streaks and impulse noise are modelled but not stratified — untested, not proven harmless.</a:t>
+              <a:t>Candidates it drops cannot be recovered by anything downstream, so its recall is reported alongside accuracy rather than left implicit. It bounds what any future selection stage could achieve.</a:t>
             </a:r>
           </a:p>
         </p:txBody>
@@ -17364,7 +17294,7 @@
                 </a:solidFill>
                 <a:latin typeface="Calibri"/>
               </a:rPr>
-              <a:t>•  Target position uniform across the field, plus a deliberate share on mat boundaries</a:t>
+              <a:t>•  Target position uniform across the field, plus a share on mat boundaries</a:t>
             </a:r>
           </a:p>
           <a:p>
@@ -17380,7 +17310,7 @@
                 </a:solidFill>
                 <a:latin typeface="Calibri"/>
               </a:rPr>
-              <a:t>•  Dose 2000 on the reference against 200 on the search — a ten-times noisier acquisition</a:t>
+              <a:t>•  Dose 2000 on the reference against 200 on the search</a:t>
             </a:r>
           </a:p>
           <a:p>

--- a/solution_presentation.pptx
+++ b/solution_presentation.pptx
@@ -245,13 +245,13 @@
                 <c:formatCode>General</c:formatCode>
                 <c:ptCount val="3"/>
                 <c:pt idx="0">
-                  <c:v>22.5</c:v>
+                  <c:v>20.0</c:v>
                 </c:pt>
                 <c:pt idx="1">
                   <c:v>16.666700000000002</c:v>
                 </c:pt>
                 <c:pt idx="2">
-                  <c:v>13.333300000000001</c:v>
+                  <c:v>10.0</c:v>
                 </c:pt>
               </c:numCache>
             </c:numRef>
@@ -4166,7 +4166,7 @@
                 </a:solidFill>
                 <a:latin typeface="Cambria"/>
               </a:rPr>
-              <a:t>0.254 px</a:t>
+              <a:t>0.274 px</a:t>
             </a:r>
           </a:p>
         </p:txBody>
@@ -8565,7 +8565,7 @@
                 </a:solidFill>
                 <a:latin typeface="Calibri"/>
               </a:rPr>
-              <a:t>•  Euclidean error 511.68 px — a different site entirely</a:t>
+              <a:t>•  Euclidean error 504.38 px — a different site entirely</a:t>
             </a:r>
           </a:p>
           <a:p>
@@ -8581,7 +8581,7 @@
                 </a:solidFill>
                 <a:latin typeface="Calibri"/>
               </a:rPr>
-              <a:t>•  The true location WAS a candidate, at rank 16</a:t>
+              <a:t>•  The true location WAS a candidate, at rank not in top-K</a:t>
             </a:r>
           </a:p>
           <a:p>
@@ -8597,22 +8597,6 @@
                 </a:solidFill>
                 <a:latin typeface="Calibri"/>
               </a:rPr>
-              <a:t>•  It lost by 0.0228 of correlation — 2.58% of the winning score</a:t>
-            </a:r>
-          </a:p>
-          <a:p>
-            <a:pPr algn="l">
-              <a:spcAft>
-                <a:spcPts val="500"/>
-              </a:spcAft>
-            </a:pPr>
-            <a:r>
-              <a:rPr sz="1200" b="0" i="0">
-                <a:solidFill>
-                  <a:srgbClr val="7A3A24"/>
-                </a:solidFill>
-                <a:latin typeface="Calibri"/>
-              </a:rPr>
               <a:t>•  The pair sits in the 'med' ambiguity stratum — no landmark in view</a:t>
             </a:r>
           </a:p>
@@ -8648,7 +8632,7 @@
                 </a:solidFill>
                 <a:latin typeface="Calibri"/>
               </a:rPr>
-              <a:t>Root cause: ranking, not candidate generation.</a:t>
+              <a:t>Root cause across all 16 failures: ranking, not candidate generation (9/16).</a:t>
             </a:r>
           </a:p>
         </p:txBody>
@@ -8710,7 +8694,7 @@
         <p:spPr>
           <a:xfrm>
             <a:off x="6583680" y="1536192"/>
-            <a:ext cx="4754880" cy="566928"/>
+            <a:ext cx="4754880" cy="292608"/>
           </a:xfrm>
           <a:prstGeom prst="rect">
             <a:avLst/>
@@ -8731,22 +8715,57 @@
                 </a:solidFill>
                 <a:latin typeface="Cambria"/>
               </a:rPr>
-              <a:t>Failures concentrate exactly where theory says they must</a:t>
+              <a:t>Every failure, split by the stage that lost it</a:t>
+            </a:r>
+          </a:p>
+        </p:txBody>
+      </p:sp>
+      <p:sp>
+        <p:nvSpPr>
+          <p:cNvPr id="10" name="TextBox 9"/>
+          <p:cNvSpPr txBox="1"/>
+          <p:nvPr/>
+        </p:nvSpPr>
+        <p:spPr>
+          <a:xfrm>
+            <a:off x="6583680" y="1901952"/>
+            <a:ext cx="4754880" cy="548640"/>
+          </a:xfrm>
+          <a:prstGeom prst="rect">
+            <a:avLst/>
+          </a:prstGeom>
+          <a:noFill/>
+        </p:spPr>
+        <p:txBody>
+          <a:bodyPr wrap="square" lIns="0" rIns="0" tIns="0" bIns="0" anchor="t">
+            <a:spAutoFit/>
+          </a:bodyPr>
+          <a:lstStyle/>
+          <a:p>
+            <a:pPr algn="l"/>
+            <a:r>
+              <a:rPr sz="950" b="0" i="0">
+                <a:solidFill>
+                  <a:srgbClr val="5A6B78"/>
+                </a:solidFill>
+                <a:latin typeface="Calibri"/>
+              </a:rPr>
+              <a:t>One mis-lock rate hides three different failures with three different fixes. Only the last is something a better ranking rule could ever have addressed — and six ranking criteria were tried and rejected assuming it was the whole story.</a:t>
             </a:r>
           </a:p>
         </p:txBody>
       </p:sp>
       <p:graphicFrame>
         <p:nvGraphicFramePr>
-          <p:cNvPr id="10" name="Table 9"/>
+          <p:cNvPr id="11" name="Table 10"/>
           <p:cNvGraphicFramePr>
             <a:graphicFrameLocks noGrp="1"/>
           </p:cNvGraphicFramePr>
           <p:nvPr/>
         </p:nvGraphicFramePr>
         <p:xfrm>
-          <a:off x="6583680" y="2560320"/>
-          <a:ext cx="4754880" cy="822960"/>
+          <a:off x="6583680" y="2523744"/>
+          <a:ext cx="4754880" cy="1097280"/>
         </p:xfrm>
         <a:graphic>
           <a:graphicData uri="http://schemas.openxmlformats.org/drawingml/2006/table">
@@ -8755,10 +8774,11 @@
                 <a:tableStyleId>{5C22544A-7EE6-4342-B048-85BDC9FD1C3A}</a:tableStyleId>
               </a:tblPr>
               <a:tblGrid>
-                <a:gridCol w="1920240"/>
-                <a:gridCol w="640080"/>
                 <a:gridCol w="1097280"/>
-                <a:gridCol w="1097280"/>
+                <a:gridCol w="731520"/>
+                <a:gridCol w="914400"/>
+                <a:gridCol w="1005840"/>
+                <a:gridCol w="1005840"/>
               </a:tblGrid>
               <a:tr h="274320">
                 <a:tc>
@@ -8768,13 +8788,13 @@
                     <a:p>
                       <a:pPr algn="l"/>
                       <a:r>
-                        <a:rPr sz="1100" b="1">
+                        <a:rPr sz="1050" b="1">
                           <a:solidFill>
                             <a:srgbClr val="FFFFFF"/>
                           </a:solidFill>
                           <a:latin typeface="Calibri"/>
                         </a:rPr>
-                        <a:t>Crop contains</a:t>
+                        <a:t>Split</a:t>
                       </a:r>
                     </a:p>
                   </a:txBody>
@@ -8791,13 +8811,13 @@
                     <a:p>
                       <a:pPr algn="ctr"/>
                       <a:r>
-                        <a:rPr sz="1100" b="1">
+                        <a:rPr sz="1050" b="1">
                           <a:solidFill>
                             <a:srgbClr val="FFFFFF"/>
                           </a:solidFill>
                           <a:latin typeface="Calibri"/>
                         </a:rPr>
-                        <a:t>n</a:t>
+                        <a:t>OK</a:t>
                       </a:r>
                     </a:p>
                   </a:txBody>
@@ -8814,13 +8834,13 @@
                     <a:p>
                       <a:pPr algn="ctr"/>
                       <a:r>
-                        <a:rPr sz="1100" b="1">
+                        <a:rPr sz="1050" b="1">
                           <a:solidFill>
                             <a:srgbClr val="FFFFFF"/>
                           </a:solidFill>
                           <a:latin typeface="Calibri"/>
                         </a:rPr>
-                        <a:t>Mis-lock</a:t>
+                        <a:t>Absent</a:t>
                       </a:r>
                     </a:p>
                   </a:txBody>
@@ -8837,13 +8857,36 @@
                     <a:p>
                       <a:pPr algn="ctr"/>
                       <a:r>
-                        <a:rPr sz="1100" b="1">
+                        <a:rPr sz="1050" b="1">
                           <a:solidFill>
                             <a:srgbClr val="FFFFFF"/>
                           </a:solidFill>
                           <a:latin typeface="Calibri"/>
                         </a:rPr>
-                        <a:t>@1px</a:t>
+                        <a:t>Screened</a:t>
+                      </a:r>
+                    </a:p>
+                  </a:txBody>
+                  <a:tcPr marL="54864" marR="54864" marT="18288" marB="18288" anchor="ctr">
+                    <a:solidFill>
+                      <a:srgbClr val="1B3A50"/>
+                    </a:solidFill>
+                  </a:tcPr>
+                </a:tc>
+                <a:tc>
+                  <a:txBody>
+                    <a:bodyPr wrap="square"/>
+                    <a:lstStyle/>
+                    <a:p>
+                      <a:pPr algn="ctr"/>
+                      <a:r>
+                        <a:rPr sz="1050" b="1">
+                          <a:solidFill>
+                            <a:srgbClr val="FFFFFF"/>
+                          </a:solidFill>
+                          <a:latin typeface="Calibri"/>
+                        </a:rPr>
+                        <a:t>Outscored</a:t>
                       </a:r>
                     </a:p>
                   </a:txBody>
@@ -8862,13 +8905,13 @@
                     <a:p>
                       <a:pPr algn="l"/>
                       <a:r>
-                        <a:rPr sz="1100" b="0">
+                        <a:rPr sz="1050" b="0">
                           <a:solidFill>
                             <a:srgbClr val="35424D"/>
                           </a:solidFill>
                           <a:latin typeface="Calibri"/>
                         </a:rPr>
-                        <a:t>a mat boundary</a:t>
+                        <a:t>sponsor</a:t>
                       </a:r>
                     </a:p>
                   </a:txBody>
@@ -8885,13 +8928,13 @@
                     <a:p>
                       <a:pPr algn="ctr"/>
                       <a:r>
-                        <a:rPr sz="1100" b="0">
+                        <a:rPr sz="1050" b="0">
                           <a:solidFill>
                             <a:srgbClr val="35424D"/>
                           </a:solidFill>
                           <a:latin typeface="Calibri"/>
                         </a:rPr>
-                        <a:t>21</a:t>
+                        <a:t>32</a:t>
                       </a:r>
                     </a:p>
                   </a:txBody>
@@ -8908,13 +8951,13 @@
                     <a:p>
                       <a:pPr algn="ctr"/>
                       <a:r>
-                        <a:rPr sz="1100" b="0">
+                        <a:rPr sz="1050" b="0">
                           <a:solidFill>
                             <a:srgbClr val="35424D"/>
                           </a:solidFill>
                           <a:latin typeface="Calibri"/>
                         </a:rPr>
-                        <a:t>5%</a:t>
+                        <a:t>0</a:t>
                       </a:r>
                     </a:p>
                   </a:txBody>
@@ -8931,13 +8974,36 @@
                     <a:p>
                       <a:pPr algn="ctr"/>
                       <a:r>
-                        <a:rPr sz="1100" b="0">
+                        <a:rPr sz="1050" b="0">
                           <a:solidFill>
                             <a:srgbClr val="35424D"/>
                           </a:solidFill>
                           <a:latin typeface="Calibri"/>
                         </a:rPr>
-                        <a:t>95%</a:t>
+                        <a:t>2</a:t>
+                      </a:r>
+                    </a:p>
+                  </a:txBody>
+                  <a:tcPr marL="54864" marR="54864" marT="18288" marB="18288" anchor="ctr">
+                    <a:solidFill>
+                      <a:srgbClr val="FFFFFF"/>
+                    </a:solidFill>
+                  </a:tcPr>
+                </a:tc>
+                <a:tc>
+                  <a:txBody>
+                    <a:bodyPr wrap="square"/>
+                    <a:lstStyle/>
+                    <a:p>
+                      <a:pPr algn="ctr"/>
+                      <a:r>
+                        <a:rPr sz="1050" b="0">
+                          <a:solidFill>
+                            <a:srgbClr val="35424D"/>
+                          </a:solidFill>
+                          <a:latin typeface="Calibri"/>
+                        </a:rPr>
+                        <a:t>6</a:t>
                       </a:r>
                     </a:p>
                   </a:txBody>
@@ -8956,13 +9022,13 @@
                     <a:p>
                       <a:pPr algn="l"/>
                       <a:r>
-                        <a:rPr sz="1100" b="0">
+                        <a:rPr sz="1050" b="0">
                           <a:solidFill>
                             <a:srgbClr val="35424D"/>
                           </a:solidFill>
                           <a:latin typeface="Calibri"/>
                         </a:rPr>
-                        <a:t>only lattice</a:t>
+                        <a:t>bench</a:t>
                       </a:r>
                     </a:p>
                   </a:txBody>
@@ -8979,13 +9045,13 @@
                     <a:p>
                       <a:pPr algn="ctr"/>
                       <a:r>
-                        <a:rPr sz="1100" b="0">
+                        <a:rPr sz="1050" b="0">
                           <a:solidFill>
                             <a:srgbClr val="35424D"/>
                           </a:solidFill>
                           <a:latin typeface="Calibri"/>
                         </a:rPr>
-                        <a:t>9</a:t>
+                        <a:t>25</a:t>
                       </a:r>
                     </a:p>
                   </a:txBody>
@@ -9002,13 +9068,13 @@
                     <a:p>
                       <a:pPr algn="ctr"/>
                       <a:r>
-                        <a:rPr sz="1100" b="0">
+                        <a:rPr sz="1050" b="0">
                           <a:solidFill>
                             <a:srgbClr val="35424D"/>
                           </a:solidFill>
                           <a:latin typeface="Calibri"/>
                         </a:rPr>
-                        <a:t>44%</a:t>
+                        <a:t>2</a:t>
                       </a:r>
                     </a:p>
                   </a:txBody>
@@ -9025,13 +9091,36 @@
                     <a:p>
                       <a:pPr algn="ctr"/>
                       <a:r>
-                        <a:rPr sz="1100" b="0">
+                        <a:rPr sz="1050" b="0">
                           <a:solidFill>
                             <a:srgbClr val="35424D"/>
                           </a:solidFill>
                           <a:latin typeface="Calibri"/>
                         </a:rPr>
-                        <a:t>33%</a:t>
+                        <a:t>1</a:t>
+                      </a:r>
+                    </a:p>
+                  </a:txBody>
+                  <a:tcPr marL="54864" marR="54864" marT="18288" marB="18288" anchor="ctr">
+                    <a:solidFill>
+                      <a:srgbClr val="ECF1F4"/>
+                    </a:solidFill>
+                  </a:tcPr>
+                </a:tc>
+                <a:tc>
+                  <a:txBody>
+                    <a:bodyPr wrap="square"/>
+                    <a:lstStyle/>
+                    <a:p>
+                      <a:pPr algn="ctr"/>
+                      <a:r>
+                        <a:rPr sz="1050" b="0">
+                          <a:solidFill>
+                            <a:srgbClr val="35424D"/>
+                          </a:solidFill>
+                          <a:latin typeface="Calibri"/>
+                        </a:rPr>
+                        <a:t>2</a:t>
                       </a:r>
                     </a:p>
                   </a:txBody>
@@ -9042,20 +9131,137 @@
                   </a:tcPr>
                 </a:tc>
               </a:tr>
+              <a:tr h="274320">
+                <a:tc>
+                  <a:txBody>
+                    <a:bodyPr wrap="square"/>
+                    <a:lstStyle/>
+                    <a:p>
+                      <a:pPr algn="l"/>
+                      <a:r>
+                        <a:rPr sz="1050" b="0">
+                          <a:solidFill>
+                            <a:srgbClr val="35424D"/>
+                          </a:solidFill>
+                          <a:latin typeface="Calibri"/>
+                        </a:rPr>
+                        <a:t>FinFET</a:t>
+                      </a:r>
+                    </a:p>
+                  </a:txBody>
+                  <a:tcPr marL="54864" marR="54864" marT="18288" marB="18288" anchor="ctr">
+                    <a:solidFill>
+                      <a:srgbClr val="FFFFFF"/>
+                    </a:solidFill>
+                  </a:tcPr>
+                </a:tc>
+                <a:tc>
+                  <a:txBody>
+                    <a:bodyPr wrap="square"/>
+                    <a:lstStyle/>
+                    <a:p>
+                      <a:pPr algn="ctr"/>
+                      <a:r>
+                        <a:rPr sz="1050" b="0">
+                          <a:solidFill>
+                            <a:srgbClr val="35424D"/>
+                          </a:solidFill>
+                          <a:latin typeface="Calibri"/>
+                        </a:rPr>
+                        <a:t>27</a:t>
+                      </a:r>
+                    </a:p>
+                  </a:txBody>
+                  <a:tcPr marL="54864" marR="54864" marT="18288" marB="18288" anchor="ctr">
+                    <a:solidFill>
+                      <a:srgbClr val="FFFFFF"/>
+                    </a:solidFill>
+                  </a:tcPr>
+                </a:tc>
+                <a:tc>
+                  <a:txBody>
+                    <a:bodyPr wrap="square"/>
+                    <a:lstStyle/>
+                    <a:p>
+                      <a:pPr algn="ctr"/>
+                      <a:r>
+                        <a:rPr sz="1050" b="0">
+                          <a:solidFill>
+                            <a:srgbClr val="35424D"/>
+                          </a:solidFill>
+                          <a:latin typeface="Calibri"/>
+                        </a:rPr>
+                        <a:t>1</a:t>
+                      </a:r>
+                    </a:p>
+                  </a:txBody>
+                  <a:tcPr marL="54864" marR="54864" marT="18288" marB="18288" anchor="ctr">
+                    <a:solidFill>
+                      <a:srgbClr val="FFFFFF"/>
+                    </a:solidFill>
+                  </a:tcPr>
+                </a:tc>
+                <a:tc>
+                  <a:txBody>
+                    <a:bodyPr wrap="square"/>
+                    <a:lstStyle/>
+                    <a:p>
+                      <a:pPr algn="ctr"/>
+                      <a:r>
+                        <a:rPr sz="1050" b="0">
+                          <a:solidFill>
+                            <a:srgbClr val="35424D"/>
+                          </a:solidFill>
+                          <a:latin typeface="Calibri"/>
+                        </a:rPr>
+                        <a:t>1</a:t>
+                      </a:r>
+                    </a:p>
+                  </a:txBody>
+                  <a:tcPr marL="54864" marR="54864" marT="18288" marB="18288" anchor="ctr">
+                    <a:solidFill>
+                      <a:srgbClr val="FFFFFF"/>
+                    </a:solidFill>
+                  </a:tcPr>
+                </a:tc>
+                <a:tc>
+                  <a:txBody>
+                    <a:bodyPr wrap="square"/>
+                    <a:lstStyle/>
+                    <a:p>
+                      <a:pPr algn="ctr"/>
+                      <a:r>
+                        <a:rPr sz="1050" b="0">
+                          <a:solidFill>
+                            <a:srgbClr val="35424D"/>
+                          </a:solidFill>
+                          <a:latin typeface="Calibri"/>
+                        </a:rPr>
+                        <a:t>1</a:t>
+                      </a:r>
+                    </a:p>
+                  </a:txBody>
+                  <a:tcPr marL="54864" marR="54864" marT="18288" marB="18288" anchor="ctr">
+                    <a:solidFill>
+                      <a:srgbClr val="FFFFFF"/>
+                    </a:solidFill>
+                  </a:tcPr>
+                </a:tc>
+              </a:tr>
             </a:tbl>
           </a:graphicData>
         </a:graphic>
       </p:graphicFrame>
       <p:sp>
         <p:nvSpPr>
-          <p:cNvPr id="11" name="TextBox 10"/>
+          <p:cNvPr id="12" name="TextBox 11"/>
           <p:cNvSpPr txBox="1"/>
           <p:nvPr/>
         </p:nvSpPr>
         <p:spPr>
           <a:xfrm>
-            <a:off x="548640" y="4023360"/>
-            <a:ext cx="11064240" cy="320040"/>
+            <a:off x="6583680" y="3547872"/>
+            <a:ext cx="4754880" cy="402336"/>
           </a:xfrm>
           <a:prstGeom prst="rect">
             <a:avLst/>
@@ -9070,6 +9276,41 @@
           <a:p>
             <a:pPr algn="l"/>
             <a:r>
+              <a:rPr sz="900" b="0" i="1">
+                <a:solidFill>
+                  <a:srgbClr val="5A6B78"/>
+                </a:solidFill>
+                <a:latin typeface="Calibri"/>
+              </a:rPr>
+              <a:t>Absent = never a candidate, so no selection rule of any kind can recover it. Screened = cut by the cheap screen before the expensive geometry ran. Outscored = reached the final comparison and lost on correlation.</a:t>
+            </a:r>
+          </a:p>
+        </p:txBody>
+      </p:sp>
+      <p:sp>
+        <p:nvSpPr>
+          <p:cNvPr id="13" name="TextBox 12"/>
+          <p:cNvSpPr txBox="1"/>
+          <p:nvPr/>
+        </p:nvSpPr>
+        <p:spPr>
+          <a:xfrm>
+            <a:off x="548640" y="4023360"/>
+            <a:ext cx="11064240" cy="320040"/>
+          </a:xfrm>
+          <a:prstGeom prst="rect">
+            <a:avLst/>
+          </a:prstGeom>
+          <a:noFill/>
+        </p:spPr>
+        <p:txBody>
+          <a:bodyPr wrap="square" lIns="0" rIns="0" tIns="0" bIns="0" anchor="t">
+            <a:spAutoFit/>
+          </a:bodyPr>
+          <a:lstStyle/>
+          <a:p>
+            <a:pPr algn="l"/>
+            <a:r>
               <a:rPr sz="1600" b="1" i="0">
                 <a:solidFill>
                   <a:srgbClr val="0F2233"/>
@@ -9083,7 +9324,7 @@
       </p:sp>
       <p:sp>
         <p:nvSpPr>
-          <p:cNvPr id="12" name="Rounded Rectangle 11"/>
+          <p:cNvPr id="14" name="Rounded Rectangle 13"/>
           <p:cNvSpPr/>
           <p:nvPr/>
         </p:nvSpPr>
@@ -9131,7 +9372,7 @@
       </p:sp>
       <p:sp>
         <p:nvSpPr>
-          <p:cNvPr id="13" name="TextBox 12"/>
+          <p:cNvPr id="15" name="TextBox 14"/>
           <p:cNvSpPr txBox="1"/>
           <p:nvPr/>
         </p:nvSpPr>
@@ -9166,7 +9407,7 @@
       </p:sp>
       <p:sp>
         <p:nvSpPr>
-          <p:cNvPr id="14" name="TextBox 13"/>
+          <p:cNvPr id="16" name="TextBox 15"/>
           <p:cNvSpPr txBox="1"/>
           <p:nvPr/>
         </p:nvSpPr>
@@ -9201,7 +9442,7 @@
       </p:sp>
       <p:sp>
         <p:nvSpPr>
-          <p:cNvPr id="15" name="Rounded Rectangle 14"/>
+          <p:cNvPr id="17" name="Rounded Rectangle 16"/>
           <p:cNvSpPr/>
           <p:nvPr/>
         </p:nvSpPr>
@@ -9249,7 +9490,7 @@
       </p:sp>
       <p:sp>
         <p:nvSpPr>
-          <p:cNvPr id="16" name="TextBox 15"/>
+          <p:cNvPr id="18" name="TextBox 17"/>
           <p:cNvSpPr txBox="1"/>
           <p:nvPr/>
         </p:nvSpPr>
@@ -9284,7 +9525,7 @@
       </p:sp>
       <p:sp>
         <p:nvSpPr>
-          <p:cNvPr id="17" name="TextBox 16"/>
+          <p:cNvPr id="19" name="TextBox 18"/>
           <p:cNvSpPr txBox="1"/>
           <p:nvPr/>
         </p:nvSpPr>
@@ -9312,14 +9553,14 @@
                 </a:solidFill>
                 <a:latin typeface="Calibri"/>
               </a:rPr>
-              <a:t>About 393 ms per pair against a 300 ms goal. The per-candidate refit is most of it; top_k is the dial. We took 9 points of mis-lock for the time.</a:t>
-            </a:r>
-          </a:p>
-        </p:txBody>
-      </p:sp>
-      <p:sp>
-        <p:nvSpPr>
-          <p:cNvPr id="18" name="Rounded Rectangle 17"/>
+              <a:t>About 382 ms per pair against a 300 ms goal. The per-candidate refit is most of it; top_k is the dial. We took 9 points of mis-lock for the time.</a:t>
+            </a:r>
+          </a:p>
+        </p:txBody>
+      </p:sp>
+      <p:sp>
+        <p:nvSpPr>
+          <p:cNvPr id="20" name="Rounded Rectangle 19"/>
           <p:cNvSpPr/>
           <p:nvPr/>
         </p:nvSpPr>
@@ -9367,7 +9608,7 @@
       </p:sp>
       <p:sp>
         <p:nvSpPr>
-          <p:cNvPr id="19" name="TextBox 18"/>
+          <p:cNvPr id="21" name="TextBox 20"/>
           <p:cNvSpPr txBox="1"/>
           <p:nvPr/>
         </p:nvSpPr>
@@ -9402,7 +9643,7 @@
       </p:sp>
       <p:sp>
         <p:nvSpPr>
-          <p:cNvPr id="20" name="TextBox 19"/>
+          <p:cNvPr id="22" name="TextBox 21"/>
           <p:cNvSpPr txBox="1"/>
           <p:nvPr/>
         </p:nvSpPr>
@@ -9688,7 +9929,7 @@
                 </a:solidFill>
                 <a:latin typeface="Cambria"/>
               </a:rPr>
-              <a:t>90.0% → 13.3%</a:t>
+              <a:t>90.0% → 10.0%</a:t>
             </a:r>
           </a:p>
         </p:txBody>
@@ -9804,7 +10045,7 @@
                 </a:solidFill>
                 <a:latin typeface="Cambria"/>
               </a:rPr>
-              <a:t>17.5% → 70.0%</a:t>
+              <a:t>17.5% → 72.5%</a:t>
             </a:r>
           </a:p>
         </p:txBody>
@@ -15890,7 +16131,7 @@
                 </a:solidFill>
                 <a:latin typeface="Courier New"/>
               </a:rPr>
-              <a:t># single pair — prints exactly one line: "547.04,289.63"</a:t>
+              <a:t># single pair — prints exactly one line: "547.01,289.62"</a:t>
             </a:r>
           </a:p>
           <a:p>
@@ -17223,7 +17464,7 @@
                 </a:solidFill>
                 <a:latin typeface="Cambria"/>
               </a:rPr>
-              <a:t>What varies across the pairs</a:t>
+              <a:t>Where it breaks, not just how good it is</a:t>
             </a:r>
           </a:p>
         </p:txBody>
@@ -17236,8 +17477,8 @@
         </p:nvSpPr>
         <p:spPr>
           <a:xfrm>
-            <a:off x="6583680" y="3794760"/>
-            <a:ext cx="4754880" cy="1920240"/>
+            <a:off x="6583680" y="3776472"/>
+            <a:ext cx="4754880" cy="365760"/>
           </a:xfrm>
           <a:prstGeom prst="rect">
             <a:avLst/>
@@ -17250,83 +17491,432 @@
           </a:bodyPr>
           <a:lstStyle/>
           <a:p>
-            <a:pPr algn="l">
-              <a:spcAft>
-                <a:spcPts val="500"/>
-              </a:spcAft>
-            </a:pPr>
-            <a:r>
-              <a:rPr sz="1100" b="0" i="0">
-                <a:solidFill>
-                  <a:srgbClr val="35424D"/>
+            <a:pPr algn="l"/>
+            <a:r>
+              <a:rPr sz="950" b="0" i="0">
+                <a:solidFill>
+                  <a:srgbClr val="5A6B78"/>
                 </a:solidFill>
                 <a:latin typeface="Calibri"/>
               </a:rPr>
-              <a:t>•  Magnification 9:1 to 11:1, continuously sampled</a:t>
-            </a:r>
-          </a:p>
-          <a:p>
-            <a:pPr algn="l">
-              <a:spcAft>
-                <a:spcPts val="500"/>
-              </a:spcAft>
-            </a:pPr>
-            <a:r>
-              <a:rPr sz="1100" b="0" i="0">
-                <a:solidFill>
-                  <a:srgbClr val="35424D"/>
+              <a:t>The released test data is stated to use parameters we have not seen, so each axis is swept PAST the specified envelope. Validation only — nothing is tuned on these.</a:t>
+            </a:r>
+          </a:p>
+        </p:txBody>
+      </p:sp>
+      <p:graphicFrame>
+        <p:nvGraphicFramePr>
+          <p:cNvPr id="22" name="Table 21"/>
+          <p:cNvGraphicFramePr>
+            <a:graphicFrameLocks noGrp="1"/>
+          </p:cNvGraphicFramePr>
+          <p:nvPr/>
+        </p:nvGraphicFramePr>
+        <p:xfrm>
+          <a:off x="6583680" y="4224528"/>
+          <a:ext cx="4754880" cy="1371600"/>
+        </p:xfrm>
+        <a:graphic>
+          <a:graphicData uri="http://schemas.openxmlformats.org/drawingml/2006/table">
+            <a:tbl>
+              <a:tblPr firstRow="1" bandRow="1">
+                <a:tableStyleId>{5C22544A-7EE6-4342-B048-85BDC9FD1C3A}</a:tableStyleId>
+              </a:tblPr>
+              <a:tblGrid>
+                <a:gridCol w="1371600"/>
+                <a:gridCol w="2011680"/>
+                <a:gridCol w="1371600"/>
+              </a:tblGrid>
+              <a:tr h="274320">
+                <a:tc>
+                  <a:txBody>
+                    <a:bodyPr wrap="square"/>
+                    <a:lstStyle/>
+                    <a:p>
+                      <a:pPr algn="l"/>
+                      <a:r>
+                        <a:rPr sz="1050" b="1">
+                          <a:solidFill>
+                            <a:srgbClr val="FFFFFF"/>
+                          </a:solidFill>
+                          <a:latin typeface="Calibri"/>
+                        </a:rPr>
+                        <a:t>Stress axis</a:t>
+                      </a:r>
+                    </a:p>
+                  </a:txBody>
+                  <a:tcPr marL="54864" marR="54864" marT="18288" marB="18288" anchor="ctr">
+                    <a:solidFill>
+                      <a:srgbClr val="1B3A50"/>
+                    </a:solidFill>
+                  </a:tcPr>
+                </a:tc>
+                <a:tc>
+                  <a:txBody>
+                    <a:bodyPr wrap="square"/>
+                    <a:lstStyle/>
+                    <a:p>
+                      <a:pPr algn="ctr"/>
+                      <a:r>
+                        <a:rPr sz="1050" b="1">
+                          <a:solidFill>
+                            <a:srgbClr val="FFFFFF"/>
+                          </a:solidFill>
+                          <a:latin typeface="Calibri"/>
+                        </a:rPr>
+                        <a:t>Worst point tested</a:t>
+                      </a:r>
+                    </a:p>
+                  </a:txBody>
+                  <a:tcPr marL="54864" marR="54864" marT="18288" marB="18288" anchor="ctr">
+                    <a:solidFill>
+                      <a:srgbClr val="1B3A50"/>
+                    </a:solidFill>
+                  </a:tcPr>
+                </a:tc>
+                <a:tc>
+                  <a:txBody>
+                    <a:bodyPr wrap="square"/>
+                    <a:lstStyle/>
+                    <a:p>
+                      <a:pPr algn="ctr"/>
+                      <a:r>
+                        <a:rPr sz="1050" b="1">
+                          <a:solidFill>
+                            <a:srgbClr val="FFFFFF"/>
+                          </a:solidFill>
+                          <a:latin typeface="Calibri"/>
+                        </a:rPr>
+                        <a:t>Mis-lock</a:t>
+                      </a:r>
+                    </a:p>
+                  </a:txBody>
+                  <a:tcPr marL="54864" marR="54864" marT="18288" marB="18288" anchor="ctr">
+                    <a:solidFill>
+                      <a:srgbClr val="1B3A50"/>
+                    </a:solidFill>
+                  </a:tcPr>
+                </a:tc>
+              </a:tr>
+              <a:tr h="274320">
+                <a:tc>
+                  <a:txBody>
+                    <a:bodyPr wrap="square"/>
+                    <a:lstStyle/>
+                    <a:p>
+                      <a:pPr algn="l"/>
+                      <a:r>
+                        <a:rPr sz="1050" b="0">
+                          <a:solidFill>
+                            <a:srgbClr val="35424D"/>
+                          </a:solidFill>
+                          <a:latin typeface="Calibri"/>
+                        </a:rPr>
+                        <a:t>noise</a:t>
+                      </a:r>
+                    </a:p>
+                  </a:txBody>
+                  <a:tcPr marL="54864" marR="54864" marT="18288" marB="18288" anchor="ctr">
+                    <a:solidFill>
+                      <a:srgbClr val="FFFFFF"/>
+                    </a:solidFill>
+                  </a:tcPr>
+                </a:tc>
+                <a:tc>
+                  <a:txBody>
+                    <a:bodyPr wrap="square"/>
+                    <a:lstStyle/>
+                    <a:p>
+                      <a:pPr algn="ctr"/>
+                      <a:r>
+                        <a:rPr sz="1050" b="0">
+                          <a:solidFill>
+                            <a:srgbClr val="35424D"/>
+                          </a:solidFill>
+                          <a:latin typeface="Calibri"/>
+                        </a:rPr>
+                        <a:t>dose 100</a:t>
+                      </a:r>
+                    </a:p>
+                  </a:txBody>
+                  <a:tcPr marL="54864" marR="54864" marT="18288" marB="18288" anchor="ctr">
+                    <a:solidFill>
+                      <a:srgbClr val="FFFFFF"/>
+                    </a:solidFill>
+                  </a:tcPr>
+                </a:tc>
+                <a:tc>
+                  <a:txBody>
+                    <a:bodyPr wrap="square"/>
+                    <a:lstStyle/>
+                    <a:p>
+                      <a:pPr algn="ctr"/>
+                      <a:r>
+                        <a:rPr sz="1050" b="0">
+                          <a:solidFill>
+                            <a:srgbClr val="35424D"/>
+                          </a:solidFill>
+                          <a:latin typeface="Calibri"/>
+                        </a:rPr>
+                        <a:t>23.3%</a:t>
+                      </a:r>
+                    </a:p>
+                  </a:txBody>
+                  <a:tcPr marL="54864" marR="54864" marT="18288" marB="18288" anchor="ctr">
+                    <a:solidFill>
+                      <a:srgbClr val="FFFFFF"/>
+                    </a:solidFill>
+                  </a:tcPr>
+                </a:tc>
+              </a:tr>
+              <a:tr h="274320">
+                <a:tc>
+                  <a:txBody>
+                    <a:bodyPr wrap="square"/>
+                    <a:lstStyle/>
+                    <a:p>
+                      <a:pPr algn="l"/>
+                      <a:r>
+                        <a:rPr sz="1050" b="0">
+                          <a:solidFill>
+                            <a:srgbClr val="35424D"/>
+                          </a:solidFill>
+                          <a:latin typeface="Calibri"/>
+                        </a:rPr>
+                        <a:t>noise</a:t>
+                      </a:r>
+                    </a:p>
+                  </a:txBody>
+                  <a:tcPr marL="54864" marR="54864" marT="18288" marB="18288" anchor="ctr">
+                    <a:solidFill>
+                      <a:srgbClr val="ECF1F4"/>
+                    </a:solidFill>
+                  </a:tcPr>
+                </a:tc>
+                <a:tc>
+                  <a:txBody>
+                    <a:bodyPr wrap="square"/>
+                    <a:lstStyle/>
+                    <a:p>
+                      <a:pPr algn="ctr"/>
+                      <a:r>
+                        <a:rPr sz="1050" b="0">
+                          <a:solidFill>
+                            <a:srgbClr val="35424D"/>
+                          </a:solidFill>
+                          <a:latin typeface="Calibri"/>
+                        </a:rPr>
+                        <a:t>sigma 5</a:t>
+                      </a:r>
+                    </a:p>
+                  </a:txBody>
+                  <a:tcPr marL="54864" marR="54864" marT="18288" marB="18288" anchor="ctr">
+                    <a:solidFill>
+                      <a:srgbClr val="ECF1F4"/>
+                    </a:solidFill>
+                  </a:tcPr>
+                </a:tc>
+                <a:tc>
+                  <a:txBody>
+                    <a:bodyPr wrap="square"/>
+                    <a:lstStyle/>
+                    <a:p>
+                      <a:pPr algn="ctr"/>
+                      <a:r>
+                        <a:rPr sz="1050" b="0">
+                          <a:solidFill>
+                            <a:srgbClr val="35424D"/>
+                          </a:solidFill>
+                          <a:latin typeface="Calibri"/>
+                        </a:rPr>
+                        <a:t>26.7%</a:t>
+                      </a:r>
+                    </a:p>
+                  </a:txBody>
+                  <a:tcPr marL="54864" marR="54864" marT="18288" marB="18288" anchor="ctr">
+                    <a:solidFill>
+                      <a:srgbClr val="ECF1F4"/>
+                    </a:solidFill>
+                  </a:tcPr>
+                </a:tc>
+              </a:tr>
+              <a:tr h="274320">
+                <a:tc>
+                  <a:txBody>
+                    <a:bodyPr wrap="square"/>
+                    <a:lstStyle/>
+                    <a:p>
+                      <a:pPr algn="l"/>
+                      <a:r>
+                        <a:rPr sz="1050" b="0">
+                          <a:solidFill>
+                            <a:srgbClr val="35424D"/>
+                          </a:solidFill>
+                          <a:latin typeface="Calibri"/>
+                        </a:rPr>
+                        <a:t>scale</a:t>
+                      </a:r>
+                    </a:p>
+                  </a:txBody>
+                  <a:tcPr marL="54864" marR="54864" marT="18288" marB="18288" anchor="ctr">
+                    <a:solidFill>
+                      <a:srgbClr val="FFFFFF"/>
+                    </a:solidFill>
+                  </a:tcPr>
+                </a:tc>
+                <a:tc>
+                  <a:txBody>
+                    <a:bodyPr wrap="square"/>
+                    <a:lstStyle/>
+                    <a:p>
+                      <a:pPr algn="ctr"/>
+                      <a:r>
+                        <a:rPr sz="1050" b="0">
+                          <a:solidFill>
+                            <a:srgbClr val="35424D"/>
+                          </a:solidFill>
+                          <a:latin typeface="Calibri"/>
+                        </a:rPr>
+                        <a:t>8-12:1</a:t>
+                      </a:r>
+                    </a:p>
+                  </a:txBody>
+                  <a:tcPr marL="54864" marR="54864" marT="18288" marB="18288" anchor="ctr">
+                    <a:solidFill>
+                      <a:srgbClr val="FFFFFF"/>
+                    </a:solidFill>
+                  </a:tcPr>
+                </a:tc>
+                <a:tc>
+                  <a:txBody>
+                    <a:bodyPr wrap="square"/>
+                    <a:lstStyle/>
+                    <a:p>
+                      <a:pPr algn="ctr"/>
+                      <a:r>
+                        <a:rPr sz="1050" b="0">
+                          <a:solidFill>
+                            <a:srgbClr val="35424D"/>
+                          </a:solidFill>
+                          <a:latin typeface="Calibri"/>
+                        </a:rPr>
+                        <a:t>40.0%</a:t>
+                      </a:r>
+                    </a:p>
+                  </a:txBody>
+                  <a:tcPr marL="54864" marR="54864" marT="18288" marB="18288" anchor="ctr">
+                    <a:solidFill>
+                      <a:srgbClr val="FFFFFF"/>
+                    </a:solidFill>
+                  </a:tcPr>
+                </a:tc>
+              </a:tr>
+              <a:tr h="274320">
+                <a:tc>
+                  <a:txBody>
+                    <a:bodyPr wrap="square"/>
+                    <a:lstStyle/>
+                    <a:p>
+                      <a:pPr algn="l"/>
+                      <a:r>
+                        <a:rPr sz="1050" b="0">
+                          <a:solidFill>
+                            <a:srgbClr val="35424D"/>
+                          </a:solidFill>
+                          <a:latin typeface="Calibri"/>
+                        </a:rPr>
+                        <a:t>rotation</a:t>
+                      </a:r>
+                    </a:p>
+                  </a:txBody>
+                  <a:tcPr marL="54864" marR="54864" marT="18288" marB="18288" anchor="ctr">
+                    <a:solidFill>
+                      <a:srgbClr val="ECF1F4"/>
+                    </a:solidFill>
+                  </a:tcPr>
+                </a:tc>
+                <a:tc>
+                  <a:txBody>
+                    <a:bodyPr wrap="square"/>
+                    <a:lstStyle/>
+                    <a:p>
+                      <a:pPr algn="ctr"/>
+                      <a:r>
+                        <a:rPr sz="1050" b="0">
+                          <a:solidFill>
+                            <a:srgbClr val="35424D"/>
+                          </a:solidFill>
+                          <a:latin typeface="Calibri"/>
+                        </a:rPr>
+                        <a:t>+/-5 deg</a:t>
+                      </a:r>
+                    </a:p>
+                  </a:txBody>
+                  <a:tcPr marL="54864" marR="54864" marT="18288" marB="18288" anchor="ctr">
+                    <a:solidFill>
+                      <a:srgbClr val="ECF1F4"/>
+                    </a:solidFill>
+                  </a:tcPr>
+                </a:tc>
+                <a:tc>
+                  <a:txBody>
+                    <a:bodyPr wrap="square"/>
+                    <a:lstStyle/>
+                    <a:p>
+                      <a:pPr algn="ctr"/>
+                      <a:r>
+                        <a:rPr sz="1050" b="0">
+                          <a:solidFill>
+                            <a:srgbClr val="35424D"/>
+                          </a:solidFill>
+                          <a:latin typeface="Calibri"/>
+                        </a:rPr>
+                        <a:t>26.7%</a:t>
+                      </a:r>
+                    </a:p>
+                  </a:txBody>
+                  <a:tcPr marL="54864" marR="54864" marT="18288" marB="18288" anchor="ctr">
+                    <a:solidFill>
+                      <a:srgbClr val="ECF1F4"/>
+                    </a:solidFill>
+                  </a:tcPr>
+                </a:tc>
+              </a:tr>
+            </a:tbl>
+          </a:graphicData>
+        </a:graphic>
+      </p:graphicFrame>
+      <p:sp>
+        <p:nvSpPr>
+          <p:cNvPr id="23" name="TextBox 22"/>
+          <p:cNvSpPr txBox="1"/>
+          <p:nvPr/>
+        </p:nvSpPr>
+        <p:spPr>
+          <a:xfrm>
+            <a:off x="6583680" y="5504688"/>
+            <a:ext cx="4754880" cy="310896"/>
+          </a:xfrm>
+          <a:prstGeom prst="rect">
+            <a:avLst/>
+          </a:prstGeom>
+          <a:noFill/>
+        </p:spPr>
+        <p:txBody>
+          <a:bodyPr wrap="square" lIns="0" rIns="0" tIns="0" bIns="0" anchor="t">
+            <a:spAutoFit/>
+          </a:bodyPr>
+          <a:lstStyle/>
+          <a:p>
+            <a:pPr algn="l"/>
+            <a:r>
+              <a:rPr sz="950" b="0" i="1">
+                <a:solidFill>
+                  <a:srgbClr val="5A6B78"/>
                 </a:solidFill>
                 <a:latin typeface="Calibri"/>
               </a:rPr>
-              <a:t>•  Rotation ±2°, continuously sampled</a:t>
-            </a:r>
-          </a:p>
-          <a:p>
-            <a:pPr algn="l">
-              <a:spcAft>
-                <a:spcPts val="500"/>
-              </a:spcAft>
-            </a:pPr>
-            <a:r>
-              <a:rPr sz="1100" b="0" i="0">
-                <a:solidFill>
-                  <a:srgbClr val="35424D"/>
-                </a:solidFill>
-                <a:latin typeface="Calibri"/>
-              </a:rPr>
-              <a:t>•  Target position uniform across the field, plus a share on mat boundaries</a:t>
-            </a:r>
-          </a:p>
-          <a:p>
-            <a:pPr algn="l">
-              <a:spcAft>
-                <a:spcPts val="500"/>
-              </a:spcAft>
-            </a:pPr>
-            <a:r>
-              <a:rPr sz="1100" b="0" i="0">
-                <a:solidFill>
-                  <a:srgbClr val="35424D"/>
-                </a:solidFill>
-                <a:latin typeface="Calibri"/>
-              </a:rPr>
-              <a:t>•  Dose 2000 on the reference against 200 on the search</a:t>
-            </a:r>
-          </a:p>
-          <a:p>
-            <a:pPr algn="l">
-              <a:spcAft>
-                <a:spcPts val="500"/>
-              </a:spcAft>
-            </a:pPr>
-            <a:r>
-              <a:rPr sz="1100" b="0" i="0">
-                <a:solidFill>
-                  <a:srgbClr val="35424D"/>
-                </a:solidFill>
-                <a:latin typeface="Calibri"/>
-              </a:rPr>
-              <a:t>•  Two architectures, four presets each, per-pair seeds recorded</a:t>
+              <a:t>22 operating points, 13 of them deliberately outside the envelope the problem statement promises.</a:t>
             </a:r>
           </a:p>
         </p:txBody>
@@ -17934,7 +18524,7 @@
                           </a:solidFill>
                           <a:latin typeface="Calibri"/>
                         </a:rPr>
-                        <a:t>22.5%</a:t>
+                        <a:t>20.0%</a:t>
                       </a:r>
                     </a:p>
                   </a:txBody>
@@ -17957,7 +18547,53 @@
                           </a:solidFill>
                           <a:latin typeface="Calibri"/>
                         </a:rPr>
-                        <a:t>0.275</a:t>
+                        <a:t>0.251</a:t>
+                      </a:r>
+                    </a:p>
+                  </a:txBody>
+                  <a:tcPr marL="54864" marR="54864" marT="18288" marB="18288" anchor="ctr">
+                    <a:solidFill>
+                      <a:srgbClr val="ECF1F4"/>
+                    </a:solidFill>
+                  </a:tcPr>
+                </a:tc>
+                <a:tc>
+                  <a:txBody>
+                    <a:bodyPr wrap="square"/>
+                    <a:lstStyle/>
+                    <a:p>
+                      <a:pPr algn="ctr"/>
+                      <a:r>
+                        <a:rPr sz="1100" b="0">
+                          <a:solidFill>
+                            <a:srgbClr val="35424D"/>
+                          </a:solidFill>
+                          <a:latin typeface="Calibri"/>
+                        </a:rPr>
+                        <a:t>80.0%</a:t>
+                      </a:r>
+                    </a:p>
+                  </a:txBody>
+                  <a:tcPr marL="54864" marR="54864" marT="18288" marB="18288" anchor="ctr">
+                    <a:solidFill>
+                      <a:srgbClr val="ECF1F4"/>
+                    </a:solidFill>
+                  </a:tcPr>
+                </a:tc>
+                <a:tc>
+                  <a:txBody>
+                    <a:bodyPr wrap="square"/>
+                    <a:lstStyle/>
+                    <a:p>
+                      <a:pPr algn="ctr"/>
+                      <a:r>
+                        <a:rPr sz="1100" b="0">
+                          <a:solidFill>
+                            <a:srgbClr val="35424D"/>
+                          </a:solidFill>
+                          <a:latin typeface="Calibri"/>
+                        </a:rPr>
+                        <a:t>80.0%</a:t>
                       </a:r>
                     </a:p>
                   </a:txBody>
@@ -18003,7 +18639,7 @@
                           </a:solidFill>
                           <a:latin typeface="Calibri"/>
                         </a:rPr>
-                        <a:t>77.5%</a:t>
+                        <a:t>72.5%</a:t>
                       </a:r>
                     </a:p>
                   </a:txBody>
@@ -18026,53 +18662,7 @@
                           </a:solidFill>
                           <a:latin typeface="Calibri"/>
                         </a:rPr>
-                        <a:t>75.0%</a:t>
-                      </a:r>
-                    </a:p>
-                  </a:txBody>
-                  <a:tcPr marL="54864" marR="54864" marT="18288" marB="18288" anchor="ctr">
-                    <a:solidFill>
-                      <a:srgbClr val="ECF1F4"/>
-                    </a:solidFill>
-                  </a:tcPr>
-                </a:tc>
-                <a:tc>
-                  <a:txBody>
-                    <a:bodyPr wrap="square"/>
-                    <a:lstStyle/>
-                    <a:p>
-                      <a:pPr algn="ctr"/>
-                      <a:r>
-                        <a:rPr sz="1100" b="0">
-                          <a:solidFill>
-                            <a:srgbClr val="35424D"/>
-                          </a:solidFill>
-                          <a:latin typeface="Calibri"/>
-                        </a:rPr>
-                        <a:t>70.0%</a:t>
-                      </a:r>
-                    </a:p>
-                  </a:txBody>
-                  <a:tcPr marL="54864" marR="54864" marT="18288" marB="18288" anchor="ctr">
-                    <a:solidFill>
-                      <a:srgbClr val="ECF1F4"/>
-                    </a:solidFill>
-                  </a:tcPr>
-                </a:tc>
-                <a:tc>
-                  <a:txBody>
-                    <a:bodyPr wrap="square"/>
-                    <a:lstStyle/>
-                    <a:p>
-                      <a:pPr algn="ctr"/>
-                      <a:r>
-                        <a:rPr sz="1100" b="0">
-                          <a:solidFill>
-                            <a:srgbClr val="35424D"/>
-                          </a:solidFill>
-                          <a:latin typeface="Calibri"/>
-                        </a:rPr>
-                        <a:t>370 ms</a:t>
+                        <a:t>374 ms</a:t>
                       </a:r>
                     </a:p>
                   </a:txBody>
@@ -18375,7 +18965,7 @@
                           </a:solidFill>
                           <a:latin typeface="Calibri"/>
                         </a:rPr>
-                        <a:t>0.337</a:t>
+                        <a:t>0.342</a:t>
                       </a:r>
                     </a:p>
                   </a:txBody>
@@ -18490,7 +19080,7 @@
                           </a:solidFill>
                           <a:latin typeface="Calibri"/>
                         </a:rPr>
-                        <a:t>393 ms</a:t>
+                        <a:t>382 ms</a:t>
                       </a:r>
                     </a:p>
                   </a:txBody>
@@ -18770,7 +19360,7 @@
                           </a:solidFill>
                           <a:latin typeface="Calibri"/>
                         </a:rPr>
-                        <a:t>13.3%</a:t>
+                        <a:t>10.0%</a:t>
                       </a:r>
                     </a:p>
                   </a:txBody>
@@ -18793,7 +19383,7 @@
                           </a:solidFill>
                           <a:latin typeface="Calibri"/>
                         </a:rPr>
-                        <a:t>0.201</a:t>
+                        <a:t>0.220</a:t>
                       </a:r>
                     </a:p>
                   </a:txBody>
@@ -18816,7 +19406,7 @@
                           </a:solidFill>
                           <a:latin typeface="Calibri"/>
                         </a:rPr>
-                        <a:t>86.7%</a:t>
+                        <a:t>90.0%</a:t>
                       </a:r>
                     </a:p>
                   </a:txBody>
@@ -18885,7 +19475,7 @@
                           </a:solidFill>
                           <a:latin typeface="Calibri"/>
                         </a:rPr>
-                        <a:t>66.7%</a:t>
+                        <a:t>70.0%</a:t>
                       </a:r>
                     </a:p>
                   </a:txBody>
@@ -18908,7 +19498,7 @@
                           </a:solidFill>
                           <a:latin typeface="Calibri"/>
                         </a:rPr>
-                        <a:t>400 ms</a:t>
+                        <a:t>411 ms</a:t>
                       </a:r>
                     </a:p>
                   </a:txBody>
@@ -18988,7 +19578,7 @@
                 </a:solidFill>
                 <a:latin typeface="Calibri"/>
               </a:rPr>
-              <a:t>On the sponsor's fixed 10:1 data the task is precision: median error improves from 1.102 px to 0.275 px and the sub-pixel pass rate rises from 17.5% to 70.0%.
+              <a:t>On the sponsor's fixed 10:1 data the task is precision: median error improves from 1.102 px to 0.251 px and the sub-pixel pass rate rises from 17.5% to 72.5%.
 On our own data — the 9:1–11:1 and ±2° envelope the problem statement says will be tested — the baseline does not work at all (76.7% mis-lock against 16.7%). That axis is invisible to anyone validating only on the published generator, because it produces neither rotation nor scale variation.</a:t>
             </a:r>
           </a:p>

--- a/solution_presentation.pptx
+++ b/solution_presentation.pptx
@@ -17916,7 +17916,7 @@
                 </a:solidFill>
                 <a:latin typeface="Calibri"/>
               </a:rPr>
-              <a:t>22 operating points, 13 of them deliberately outside the envelope the problem statement promises.</a:t>
+              <a:t>25 operating points, 16 of them deliberately outside the envelope the problem statement promises.</a:t>
             </a:r>
           </a:p>
         </p:txBody>

--- a/solution_presentation.pptx
+++ b/solution_presentation.pptx
@@ -8581,7 +8581,7 @@
                 </a:solidFill>
                 <a:latin typeface="Calibri"/>
               </a:rPr>
-              <a:t>•  The true location WAS a candidate, at rank not in top-K</a:t>
+              <a:t>•  The true location never entered the candidate set at all — no ranking rule could have recovered it</a:t>
             </a:r>
           </a:p>
           <a:p>
@@ -8764,7 +8764,7 @@
           <p:nvPr/>
         </p:nvGraphicFramePr>
         <p:xfrm>
-          <a:off x="6583680" y="2523744"/>
+          <a:off x="6583680" y="2487168"/>
           <a:ext cx="4754880" cy="1097280"/>
         </p:xfrm>
         <a:graphic>
@@ -9260,8 +9260,8 @@
         </p:nvSpPr>
         <p:spPr>
           <a:xfrm>
-            <a:off x="6583680" y="3547872"/>
-            <a:ext cx="4754880" cy="402336"/>
+            <a:off x="6583680" y="3639312"/>
+            <a:ext cx="4754880" cy="274320"/>
           </a:xfrm>
           <a:prstGeom prst="rect">
             <a:avLst/>
@@ -9276,13 +9276,13 @@
           <a:p>
             <a:pPr algn="l"/>
             <a:r>
-              <a:rPr sz="900" b="0" i="1">
+              <a:rPr sz="850" b="0" i="1">
                 <a:solidFill>
                   <a:srgbClr val="5A6B78"/>
                 </a:solidFill>
                 <a:latin typeface="Calibri"/>
               </a:rPr>
-              <a:t>Absent = never a candidate, so no selection rule of any kind can recover it. Screened = cut by the cheap screen before the expensive geometry ran. Outscored = reached the final comparison and lost on correlation.</a:t>
+              <a:t>Absent = never a candidate, so nothing downstream can recover it.  Screened = cut before the expensive geometry ran.  Outscored = reached the final comparison and lost.</a:t>
             </a:r>
           </a:p>
         </p:txBody>
@@ -9400,7 +9400,7 @@
                 </a:solidFill>
                 <a:latin typeface="Calibri"/>
               </a:rPr>
-              <a:t>Selection is still the cap</a:t>
+              <a:t>The margin itself is tiny</a:t>
             </a:r>
           </a:p>
         </p:txBody>
@@ -9435,7 +9435,7 @@
                 </a:solidFill>
                 <a:latin typeface="Calibri"/>
               </a:rPr>
-              <a:t>Every pass rate is capped by the mis-lock rate. The truth is in the top-20 on 28/30 pairs (93.3%), so a perfect re-ranker would still have room to roughly halve what remains.</a:t>
+              <a:t>Given the generator's exact pose, the true site scores 0.7661 and the winner 0.7696 — the truth is AHEAD in 7 of 15. The two are indistinguishable, so our six re-ranking criteria were resolving a margin of 0.0114.</a:t>
             </a:r>
           </a:p>
         </p:txBody>
@@ -10093,7 +10093,7 @@
         </p:nvSpPr>
         <p:spPr>
           <a:xfrm>
-            <a:off x="548640" y="2743200"/>
+            <a:off x="548640" y="2670048"/>
             <a:ext cx="11064240" cy="365760"/>
           </a:xfrm>
           <a:prstGeom prst="rect">
@@ -10115,7 +10115,7 @@
                 </a:solidFill>
                 <a:latin typeface="Cambria"/>
               </a:rPr>
-              <a:t>The three findings we would carry to any similar problem</a:t>
+              <a:t>The four findings we would carry to any similar problem</a:t>
             </a:r>
           </a:p>
         </p:txBody>
@@ -10128,7 +10128,7 @@
         </p:nvSpPr>
         <p:spPr>
           <a:xfrm>
-            <a:off x="566928" y="3200400"/>
+            <a:off x="566928" y="3127248"/>
             <a:ext cx="365760" cy="365760"/>
           </a:xfrm>
           <a:prstGeom prst="ellipse">
@@ -10181,7 +10181,7 @@
         </p:nvSpPr>
         <p:spPr>
           <a:xfrm>
-            <a:off x="1097280" y="3182112"/>
+            <a:off x="1097280" y="3108960"/>
             <a:ext cx="10332720" cy="274320"/>
           </a:xfrm>
           <a:prstGeom prst="rect">
@@ -10216,7 +10216,7 @@
         </p:nvSpPr>
         <p:spPr>
           <a:xfrm>
-            <a:off x="1097280" y="3447288"/>
+            <a:off x="1097280" y="3374136"/>
             <a:ext cx="10332720" cy="566928"/>
           </a:xfrm>
           <a:prstGeom prst="rect">
@@ -10251,7 +10251,7 @@
         </p:nvSpPr>
         <p:spPr>
           <a:xfrm>
-            <a:off x="566928" y="4133087"/>
+            <a:off x="566928" y="3986783"/>
             <a:ext cx="365760" cy="365760"/>
           </a:xfrm>
           <a:prstGeom prst="ellipse">
@@ -10304,7 +10304,7 @@
         </p:nvSpPr>
         <p:spPr>
           <a:xfrm>
-            <a:off x="1097280" y="4114800"/>
+            <a:off x="1097280" y="3968496"/>
             <a:ext cx="10332720" cy="274320"/>
           </a:xfrm>
           <a:prstGeom prst="rect">
@@ -10339,7 +10339,7 @@
         </p:nvSpPr>
         <p:spPr>
           <a:xfrm>
-            <a:off x="1097280" y="4379975"/>
+            <a:off x="1097280" y="4233671"/>
             <a:ext cx="10332720" cy="566928"/>
           </a:xfrm>
           <a:prstGeom prst="rect">
@@ -10374,7 +10374,130 @@
         </p:nvSpPr>
         <p:spPr>
           <a:xfrm>
-            <a:off x="566928" y="5065776"/>
+            <a:off x="566928" y="4846320"/>
+            <a:ext cx="365760" cy="365760"/>
+          </a:xfrm>
+          <a:prstGeom prst="ellipse">
+            <a:avLst/>
+          </a:prstGeom>
+          <a:solidFill>
+            <a:srgbClr val="1C7293"/>
+          </a:solidFill>
+          <a:ln>
+            <a:noFill/>
+          </a:ln>
+          <a:effectLst/>
+        </p:spPr>
+        <p:style>
+          <a:lnRef idx="1">
+            <a:schemeClr val="accent1"/>
+          </a:lnRef>
+          <a:fillRef idx="3">
+            <a:schemeClr val="accent1"/>
+          </a:fillRef>
+          <a:effectRef idx="2">
+            <a:schemeClr val="accent1"/>
+          </a:effectRef>
+          <a:fontRef idx="minor">
+            <a:schemeClr val="lt1"/>
+          </a:fontRef>
+        </p:style>
+        <p:txBody>
+          <a:bodyPr rtlCol="0" anchor="ctr" lIns="0" rIns="0" tIns="0" bIns="0" wrap="none"/>
+          <a:lstStyle/>
+          <a:p>
+            <a:pPr algn="ctr"/>
+            <a:r>
+              <a:rPr sz="1300" b="1">
+                <a:solidFill>
+                  <a:srgbClr val="FFFFFF"/>
+                </a:solidFill>
+                <a:latin typeface="Calibri"/>
+              </a:rPr>
+              <a:t>3</a:t>
+            </a:r>
+          </a:p>
+        </p:txBody>
+      </p:sp>
+      <p:sp>
+        <p:nvSpPr>
+          <p:cNvPr id="20" name="TextBox 19"/>
+          <p:cNvSpPr txBox="1"/>
+          <p:nvPr/>
+        </p:nvSpPr>
+        <p:spPr>
+          <a:xfrm>
+            <a:off x="1097280" y="4828032"/>
+            <a:ext cx="10332720" cy="274320"/>
+          </a:xfrm>
+          <a:prstGeom prst="rect">
+            <a:avLst/>
+          </a:prstGeom>
+          <a:noFill/>
+        </p:spPr>
+        <p:txBody>
+          <a:bodyPr wrap="square" lIns="0" rIns="0" tIns="0" bIns="0" anchor="t">
+            <a:spAutoFit/>
+          </a:bodyPr>
+          <a:lstStyle/>
+          <a:p>
+            <a:pPr algn="l"/>
+            <a:r>
+              <a:rPr sz="1250" b="1" i="0">
+                <a:solidFill>
+                  <a:srgbClr val="FFFFFF"/>
+                </a:solidFill>
+                <a:latin typeface="Calibri"/>
+              </a:rPr>
+              <a:t>The elegant method has to win on measurement like everything else.</a:t>
+            </a:r>
+          </a:p>
+        </p:txBody>
+      </p:sp>
+      <p:sp>
+        <p:nvSpPr>
+          <p:cNvPr id="21" name="TextBox 20"/>
+          <p:cNvSpPr txBox="1"/>
+          <p:nvPr/>
+        </p:nvSpPr>
+        <p:spPr>
+          <a:xfrm>
+            <a:off x="1097280" y="5093208"/>
+            <a:ext cx="10332720" cy="566928"/>
+          </a:xfrm>
+          <a:prstGeom prst="rect">
+            <a:avLst/>
+          </a:prstGeom>
+          <a:noFill/>
+        </p:spPr>
+        <p:txBody>
+          <a:bodyPr wrap="square" lIns="0" rIns="0" tIns="0" bIns="0" anchor="t">
+            <a:spAutoFit/>
+          </a:bodyPr>
+          <a:lstStyle/>
+          <a:p>
+            <a:pPr algn="l"/>
+            <a:r>
+              <a:rPr sz="1000" b="0" i="0">
+                <a:solidFill>
+                  <a:srgbClr val="9FB4C2"/>
+                </a:solidFill>
+                <a:latin typeface="Calibri"/>
+              </a:rPr>
+              <a:t>Reading magnification off the lattice is the idea this project is named for. It lost to a coarse pyramid search, because a 1000 nm reference spans as few as four lattice periods — a fine ruler, but a short one.</a:t>
+            </a:r>
+          </a:p>
+        </p:txBody>
+      </p:sp>
+      <p:sp>
+        <p:nvSpPr>
+          <p:cNvPr id="22" name="Oval 21"/>
+          <p:cNvSpPr/>
+          <p:nvPr/>
+        </p:nvSpPr>
+        <p:spPr>
+          <a:xfrm>
+            <a:off x="566928" y="5705856"/>
             <a:ext cx="365760" cy="365760"/>
           </a:xfrm>
           <a:prstGeom prst="ellipse">
@@ -10414,20 +10537,20 @@
                 </a:solidFill>
                 <a:latin typeface="Calibri"/>
               </a:rPr>
-              <a:t>3</a:t>
-            </a:r>
-          </a:p>
-        </p:txBody>
-      </p:sp>
-      <p:sp>
-        <p:nvSpPr>
-          <p:cNvPr id="20" name="TextBox 19"/>
+              <a:t>4</a:t>
+            </a:r>
+          </a:p>
+        </p:txBody>
+      </p:sp>
+      <p:sp>
+        <p:nvSpPr>
+          <p:cNvPr id="23" name="TextBox 22"/>
           <p:cNvSpPr txBox="1"/>
           <p:nvPr/>
         </p:nvSpPr>
         <p:spPr>
           <a:xfrm>
-            <a:off x="1097280" y="5047488"/>
+            <a:off x="1097280" y="5687568"/>
             <a:ext cx="10332720" cy="274320"/>
           </a:xfrm>
           <a:prstGeom prst="rect">
@@ -10445,24 +10568,24 @@
             <a:r>
               <a:rPr sz="1250" b="1" i="0">
                 <a:solidFill>
-                  <a:srgbClr val="FFFFFF"/>
+                  <a:srgbClr val="F2A65A"/>
                 </a:solidFill>
                 <a:latin typeface="Calibri"/>
               </a:rPr>
-              <a:t>The elegant method has to win on measurement like everything else.</a:t>
-            </a:r>
-          </a:p>
-        </p:txBody>
-      </p:sp>
-      <p:sp>
-        <p:nvSpPr>
-          <p:cNvPr id="21" name="TextBox 20"/>
+              <a:t>A result with no script is not a result — including our own headline.</a:t>
+            </a:r>
+          </a:p>
+        </p:txBody>
+      </p:sp>
+      <p:sp>
+        <p:nvSpPr>
+          <p:cNvPr id="24" name="TextBox 23"/>
           <p:cNvSpPr txBox="1"/>
           <p:nvPr/>
         </p:nvSpPr>
         <p:spPr>
           <a:xfrm>
-            <a:off x="1097280" y="5312664"/>
+            <a:off x="1097280" y="5952744"/>
             <a:ext cx="10332720" cy="566928"/>
           </a:xfrm>
           <a:prstGeom prst="rect">
@@ -10484,20 +10607,20 @@
                 </a:solidFill>
                 <a:latin typeface="Calibri"/>
               </a:rPr>
-              <a:t>Reading magnification off the lattice is the idea this project is named for. It lost to a coarse pyramid search, because a 1000 nm reference spans as few as four lattice periods — a fine ruler, but a short one.</a:t>
-            </a:r>
-          </a:p>
-        </p:txBody>
-      </p:sp>
-      <p:sp>
-        <p:nvSpPr>
-          <p:cNvPr id="22" name="TextBox 21"/>
+              <a:t>Our strongest claim was measured once by hand and never written into results/, so the verifier that checks every number in this deck never saw it. Writing it down properly refuted it: it had compared a score at one location against the MAXIMUM over the whole image, which is upward-biased by construction. Retracted, corrected, and now regenerated by a committed script.</a:t>
+            </a:r>
+          </a:p>
+        </p:txBody>
+      </p:sp>
+      <p:sp>
+        <p:nvSpPr>
+          <p:cNvPr id="25" name="TextBox 24"/>
           <p:cNvSpPr txBox="1"/>
           <p:nvPr/>
         </p:nvSpPr>
         <p:spPr>
           <a:xfrm>
-            <a:off x="548640" y="6080760"/>
+            <a:off x="548640" y="6400800"/>
             <a:ext cx="11064240" cy="320040"/>
           </a:xfrm>
           <a:prstGeom prst="rect">
@@ -10519,7 +10642,7 @@
                 </a:solidFill>
                 <a:latin typeface="Calibri"/>
               </a:rPr>
-              <a:t>Next: the correct answer is still in the candidate set on 28/30 pairs, so selection remains the cap — and the one stage that beat it did so by removing a handicap, not by scoring harder.</a:t>
+              <a:t>Next: at the generator's exact pose the truth and its impostor score 0.7661 against 0.7696 — so what is left is not a ranking problem but a margin problem, and the only stage that ever moved it did so by removing a handicap, not by scoring harder.</a:t>
             </a:r>
           </a:p>
         </p:txBody>

--- a/solution_presentation.pptx
+++ b/solution_presentation.pptx
@@ -8046,7 +8046,7 @@
         <p:spPr>
           <a:xfrm>
             <a:off x="7772400" y="1572768"/>
-            <a:ext cx="3840480" cy="4206240"/>
+            <a:ext cx="3840480" cy="4709160"/>
           </a:xfrm>
           <a:prstGeom prst="roundRect">
             <a:avLst>
@@ -8113,7 +8113,7 @@
                 </a:solidFill>
                 <a:latin typeface="Cambria"/>
               </a:rPr>
-              <a:t>Four attempts at selection, and why the fourth worked</a:t>
+              <a:t>Five attempts at selection, and why only one worked</a:t>
             </a:r>
           </a:p>
         </p:txBody>
@@ -8126,7 +8126,7 @@
         </p:nvSpPr>
         <p:spPr>
           <a:xfrm>
-            <a:off x="8001000" y="2331720"/>
+            <a:off x="8001000" y="2267712"/>
             <a:ext cx="3383280" cy="3383280"/>
           </a:xfrm>
           <a:prstGeom prst="rect">
@@ -8320,6 +8320,61 @@
       <p:sp>
         <p:nvSpPr>
           <p:cNvPr id="9" name="TextBox 8"/>
+          <p:cNvSpPr txBox="1"/>
+          <p:nvPr/>
+        </p:nvSpPr>
+        <p:spPr>
+          <a:xfrm>
+            <a:off x="8001000" y="5138928"/>
+            <a:ext cx="3383280" cy="1051560"/>
+          </a:xfrm>
+          <a:prstGeom prst="rect">
+            <a:avLst/>
+          </a:prstGeom>
+          <a:noFill/>
+        </p:spPr>
+        <p:txBody>
+          <a:bodyPr wrap="square" lIns="0" rIns="0" tIns="0" bIns="0" anchor="t">
+            <a:spAutoFit/>
+          </a:bodyPr>
+          <a:lstStyle/>
+          <a:p>
+            <a:pPr algn="l">
+              <a:spcAft>
+                <a:spcPts val="100"/>
+              </a:spcAft>
+            </a:pPr>
+            <a:r>
+              <a:rPr sz="950" b="1" i="0">
+                <a:solidFill>
+                  <a:srgbClr val="FFFFFF"/>
+                </a:solidFill>
+                <a:latin typeface="Calibri"/>
+              </a:rPr>
+              <a:t>Global scanner calibration — fair, and useless</a:t>
+            </a:r>
+          </a:p>
+          <a:p>
+            <a:pPr algn="l">
+              <a:spcAft>
+                <a:spcPts val="100"/>
+              </a:spcAft>
+            </a:pPr>
+            <a:r>
+              <a:rPr sz="850" b="0" i="0">
+                <a:solidFill>
+                  <a:srgbClr val="9FB4C2"/>
+                </a:solidFill>
+                <a:latin typeface="Calibri"/>
+              </a:rPr>
+              <a:t>We measured the scanner from the array itself and corrected the whole image once, before any candidate existed. It lifted the true site by +0.0297 — three times the margin — and the impostor by +0.0301. A global correction is fair by construction, which is exactly why it cannot break a tie.</a:t>
+            </a:r>
+          </a:p>
+        </p:txBody>
+      </p:sp>
+      <p:sp>
+        <p:nvSpPr>
+          <p:cNvPr id="10" name="TextBox 9"/>
           <p:cNvSpPr txBox="1"/>
           <p:nvPr/>
         </p:nvSpPr>

--- a/solution_presentation.pptx
+++ b/solution_presentation.pptx
@@ -245,13 +245,13 @@
                 <c:formatCode>General</c:formatCode>
                 <c:ptCount val="3"/>
                 <c:pt idx="0">
-                  <c:v>20.0</c:v>
+                  <c:v>5.0</c:v>
                 </c:pt>
                 <c:pt idx="1">
-                  <c:v>16.666700000000002</c:v>
+                  <c:v>23.3333</c:v>
                 </c:pt>
                 <c:pt idx="2">
-                  <c:v>10.0</c:v>
+                  <c:v>6.66667</c:v>
                 </c:pt>
               </c:numCache>
             </c:numRef>
@@ -4096,7 +4096,7 @@
                 </a:solidFill>
                 <a:latin typeface="Cambria"/>
               </a:rPr>
-              <a:t>16.7%</a:t>
+              <a:t>23.3%</a:t>
             </a:r>
           </a:p>
         </p:txBody>
@@ -4166,7 +4166,7 @@
                 </a:solidFill>
                 <a:latin typeface="Cambria"/>
               </a:rPr>
-              <a:t>0.274 px</a:t>
+              <a:t>0.188 px</a:t>
             </a:r>
           </a:p>
         </p:txBody>
@@ -4236,7 +4236,7 @@
                 </a:solidFill>
                 <a:latin typeface="Cambria"/>
               </a:rPr>
-              <a:t>63.3%</a:t>
+              <a:t>60.0%</a:t>
             </a:r>
           </a:p>
         </p:txBody>
@@ -6696,7 +6696,7 @@
         </p:nvGraphicFramePr>
         <p:xfrm>
           <a:off x="548640" y="1572768"/>
-          <a:ext cx="6949440" cy="3017520"/>
+          <a:ext cx="6949440" cy="3566160"/>
         </p:xfrm>
         <a:graphic>
           <a:graphicData uri="http://schemas.openxmlformats.org/drawingml/2006/table">
@@ -7286,6 +7286,240 @@
                           <a:latin typeface="Calibri"/>
                         </a:rPr>
                         <a:t>solves rotation/scale</a:t>
+                      </a:r>
+                    </a:p>
+                  </a:txBody>
+                  <a:tcPr marL="54864" marR="54864" marT="18288" marB="18288" anchor="ctr">
+                    <a:solidFill>
+                      <a:srgbClr val="ECF1F4"/>
+                    </a:solidFill>
+                  </a:tcPr>
+                </a:tc>
+              </a:tr>
+              <a:tr h="274320">
+                <a:tc>
+                  <a:txBody>
+                    <a:bodyPr wrap="square"/>
+                    <a:lstStyle/>
+                    <a:p>
+                      <a:pPr algn="l"/>
+                      <a:r>
+                        <a:rPr sz="1050" b="0">
+                          <a:solidFill>
+                            <a:srgbClr val="35424D"/>
+                          </a:solidFill>
+                          <a:latin typeface="Calibri"/>
+                        </a:rPr>
+                        <a:t>+ per-candidate pose refit   ← shipped</a:t>
+                      </a:r>
+                    </a:p>
+                  </a:txBody>
+                  <a:tcPr marL="54864" marR="54864" marT="18288" marB="18288" anchor="ctr">
+                    <a:solidFill>
+                      <a:srgbClr val="FFFFFF"/>
+                    </a:solidFill>
+                  </a:tcPr>
+                </a:tc>
+                <a:tc>
+                  <a:txBody>
+                    <a:bodyPr wrap="square"/>
+                    <a:lstStyle/>
+                    <a:p>
+                      <a:pPr algn="ctr"/>
+                      <a:r>
+                        <a:rPr sz="1050" b="0">
+                          <a:solidFill>
+                            <a:srgbClr val="35424D"/>
+                          </a:solidFill>
+                          <a:latin typeface="Calibri"/>
+                        </a:rPr>
+                        <a:t>20.0%</a:t>
+                      </a:r>
+                    </a:p>
+                  </a:txBody>
+                  <a:tcPr marL="54864" marR="54864" marT="18288" marB="18288" anchor="ctr">
+                    <a:solidFill>
+                      <a:srgbClr val="FFFFFF"/>
+                    </a:solidFill>
+                  </a:tcPr>
+                </a:tc>
+                <a:tc>
+                  <a:txBody>
+                    <a:bodyPr wrap="square"/>
+                    <a:lstStyle/>
+                    <a:p>
+                      <a:pPr algn="ctr"/>
+                      <a:r>
+                        <a:rPr sz="1050" b="0">
+                          <a:solidFill>
+                            <a:srgbClr val="35424D"/>
+                          </a:solidFill>
+                          <a:latin typeface="Calibri"/>
+                        </a:rPr>
+                        <a:t>16.7%</a:t>
+                      </a:r>
+                    </a:p>
+                  </a:txBody>
+                  <a:tcPr marL="54864" marR="54864" marT="18288" marB="18288" anchor="ctr">
+                    <a:solidFill>
+                      <a:srgbClr val="FFFFFF"/>
+                    </a:solidFill>
+                  </a:tcPr>
+                </a:tc>
+                <a:tc>
+                  <a:txBody>
+                    <a:bodyPr wrap="square"/>
+                    <a:lstStyle/>
+                    <a:p>
+                      <a:pPr algn="ctr"/>
+                      <a:r>
+                        <a:rPr sz="1050" b="0">
+                          <a:solidFill>
+                            <a:srgbClr val="35424D"/>
+                          </a:solidFill>
+                          <a:latin typeface="Calibri"/>
+                        </a:rPr>
+                        <a:t>10.0%</a:t>
+                      </a:r>
+                    </a:p>
+                  </a:txBody>
+                  <a:tcPr marL="54864" marR="54864" marT="18288" marB="18288" anchor="ctr">
+                    <a:solidFill>
+                      <a:srgbClr val="FFFFFF"/>
+                    </a:solidFill>
+                  </a:tcPr>
+                </a:tc>
+                <a:tc>
+                  <a:txBody>
+                    <a:bodyPr wrap="square"/>
+                    <a:lstStyle/>
+                    <a:p>
+                      <a:pPr algn="ctr"/>
+                      <a:r>
+                        <a:rPr sz="1050" b="0">
+                          <a:solidFill>
+                            <a:srgbClr val="35424D"/>
+                          </a:solidFill>
+                          <a:latin typeface="Calibri"/>
+                        </a:rPr>
+                        <a:t>solves geometry</a:t>
+                      </a:r>
+                    </a:p>
+                  </a:txBody>
+                  <a:tcPr marL="54864" marR="54864" marT="18288" marB="18288" anchor="ctr">
+                    <a:solidFill>
+                      <a:srgbClr val="FFFFFF"/>
+                    </a:solidFill>
+                  </a:tcPr>
+                </a:tc>
+              </a:tr>
+              <a:tr h="274320">
+                <a:tc>
+                  <a:txBody>
+                    <a:bodyPr wrap="square"/>
+                    <a:lstStyle/>
+                    <a:p>
+                      <a:pPr algn="l"/>
+                      <a:r>
+                        <a:rPr sz="1050" b="0">
+                          <a:solidFill>
+                            <a:srgbClr val="35424D"/>
+                          </a:solidFill>
+                          <a:latin typeface="Calibri"/>
+                        </a:rPr>
+                        <a:t>+ pose grid as evidence   ← shipped</a:t>
+                      </a:r>
+                    </a:p>
+                  </a:txBody>
+                  <a:tcPr marL="54864" marR="54864" marT="18288" marB="18288" anchor="ctr">
+                    <a:solidFill>
+                      <a:srgbClr val="ECF1F4"/>
+                    </a:solidFill>
+                  </a:tcPr>
+                </a:tc>
+                <a:tc>
+                  <a:txBody>
+                    <a:bodyPr wrap="square"/>
+                    <a:lstStyle/>
+                    <a:p>
+                      <a:pPr algn="ctr"/>
+                      <a:r>
+                        <a:rPr sz="1050" b="0">
+                          <a:solidFill>
+                            <a:srgbClr val="35424D"/>
+                          </a:solidFill>
+                          <a:latin typeface="Calibri"/>
+                        </a:rPr>
+                        <a:t>5.0%</a:t>
+                      </a:r>
+                    </a:p>
+                  </a:txBody>
+                  <a:tcPr marL="54864" marR="54864" marT="18288" marB="18288" anchor="ctr">
+                    <a:solidFill>
+                      <a:srgbClr val="ECF1F4"/>
+                    </a:solidFill>
+                  </a:tcPr>
+                </a:tc>
+                <a:tc>
+                  <a:txBody>
+                    <a:bodyPr wrap="square"/>
+                    <a:lstStyle/>
+                    <a:p>
+                      <a:pPr algn="ctr"/>
+                      <a:r>
+                        <a:rPr sz="1050" b="0">
+                          <a:solidFill>
+                            <a:srgbClr val="35424D"/>
+                          </a:solidFill>
+                          <a:latin typeface="Calibri"/>
+                        </a:rPr>
+                        <a:t>23.3%</a:t>
+                      </a:r>
+                    </a:p>
+                  </a:txBody>
+                  <a:tcPr marL="54864" marR="54864" marT="18288" marB="18288" anchor="ctr">
+                    <a:solidFill>
+                      <a:srgbClr val="ECF1F4"/>
+                    </a:solidFill>
+                  </a:tcPr>
+                </a:tc>
+                <a:tc>
+                  <a:txBody>
+                    <a:bodyPr wrap="square"/>
+                    <a:lstStyle/>
+                    <a:p>
+                      <a:pPr algn="ctr"/>
+                      <a:r>
+                        <a:rPr sz="1050" b="0">
+                          <a:solidFill>
+                            <a:srgbClr val="35424D"/>
+                          </a:solidFill>
+                          <a:latin typeface="Calibri"/>
+                        </a:rPr>
+                        <a:t>6.7%</a:t>
+                      </a:r>
+                    </a:p>
+                  </a:txBody>
+                  <a:tcPr marL="54864" marR="54864" marT="18288" marB="18288" anchor="ctr">
+                    <a:solidFill>
+                      <a:srgbClr val="ECF1F4"/>
+                    </a:solidFill>
+                  </a:tcPr>
+                </a:tc>
+                <a:tc>
+                  <a:txBody>
+                    <a:bodyPr wrap="square"/>
+                    <a:lstStyle/>
+                    <a:p>
+                      <a:pPr algn="ctr"/>
+                      <a:r>
+                        <a:rPr sz="1050" b="0">
+                          <a:solidFill>
+                            <a:srgbClr val="35424D"/>
+                          </a:solidFill>
+                          <a:latin typeface="Calibri"/>
+                        </a:rPr>
+                        <a:t>solves selection</a:t>
                       </a:r>
                     </a:p>
                   </a:txBody>
@@ -8010,7 +8244,7 @@
         </p:nvSpPr>
         <p:spPr>
           <a:xfrm>
-            <a:off x="548640" y="4690872"/>
+            <a:off x="548640" y="5239512"/>
             <a:ext cx="6949440" cy="256032"/>
           </a:xfrm>
           <a:prstGeom prst="rect">
@@ -8046,7 +8280,7 @@
         <p:spPr>
           <a:xfrm>
             <a:off x="7772400" y="1572768"/>
-            <a:ext cx="3840480" cy="4709160"/>
+            <a:ext cx="3840480" cy="5138928"/>
           </a:xfrm>
           <a:prstGeom prst="roundRect">
             <a:avLst>
@@ -8113,7 +8347,7 @@
                 </a:solidFill>
                 <a:latin typeface="Cambria"/>
               </a:rPr>
-              <a:t>Five attempts at selection, and why only one worked</a:t>
+              <a:t>Six attempts at selection, and the two that worked</a:t>
             </a:r>
           </a:p>
         </p:txBody>
@@ -8146,7 +8380,7 @@
               </a:spcAft>
             </a:pPr>
             <a:r>
-              <a:rPr sz="950" b="1" i="0">
+              <a:rPr sz="900" b="1" i="0">
                 <a:solidFill>
                   <a:srgbClr val="FFFFFF"/>
                 </a:solidFill>
@@ -8162,7 +8396,7 @@
               </a:spcAft>
             </a:pPr>
             <a:r>
-              <a:rPr sz="950" b="0" i="0">
+              <a:rPr sz="900" b="0" i="0">
                 <a:solidFill>
                   <a:srgbClr val="9FB4C2"/>
                 </a:solidFill>
@@ -8178,7 +8412,7 @@
               </a:spcAft>
             </a:pPr>
             <a:r>
-              <a:rPr sz="950" b="0" i="0">
+              <a:rPr sz="900" b="0" i="0">
                 <a:solidFill>
                   <a:srgbClr val="35424D"/>
                 </a:solidFill>
@@ -8194,7 +8428,7 @@
               </a:spcAft>
             </a:pPr>
             <a:r>
-              <a:rPr sz="950" b="1" i="0">
+              <a:rPr sz="900" b="1" i="0">
                 <a:solidFill>
                   <a:srgbClr val="FFFFFF"/>
                 </a:solidFill>
@@ -8210,7 +8444,7 @@
               </a:spcAft>
             </a:pPr>
             <a:r>
-              <a:rPr sz="950" b="0" i="0">
+              <a:rPr sz="900" b="0" i="0">
                 <a:solidFill>
                   <a:srgbClr val="9FB4C2"/>
                 </a:solidFill>
@@ -8226,7 +8460,7 @@
               </a:spcAft>
             </a:pPr>
             <a:r>
-              <a:rPr sz="950" b="0" i="0">
+              <a:rPr sz="900" b="0" i="0">
                 <a:solidFill>
                   <a:srgbClr val="35424D"/>
                 </a:solidFill>
@@ -8242,7 +8476,7 @@
               </a:spcAft>
             </a:pPr>
             <a:r>
-              <a:rPr sz="950" b="1" i="0">
+              <a:rPr sz="900" b="1" i="0">
                 <a:solidFill>
                   <a:srgbClr val="FFFFFF"/>
                 </a:solidFill>
@@ -8258,7 +8492,7 @@
               </a:spcAft>
             </a:pPr>
             <a:r>
-              <a:rPr sz="950" b="0" i="0">
+              <a:rPr sz="900" b="0" i="0">
                 <a:solidFill>
                   <a:srgbClr val="9FB4C2"/>
                 </a:solidFill>
@@ -8274,7 +8508,7 @@
               </a:spcAft>
             </a:pPr>
             <a:r>
-              <a:rPr sz="950" b="0" i="0">
+              <a:rPr sz="900" b="0" i="0">
                 <a:solidFill>
                   <a:srgbClr val="35424D"/>
                 </a:solidFill>
@@ -8290,7 +8524,7 @@
               </a:spcAft>
             </a:pPr>
             <a:r>
-              <a:rPr sz="950" b="1" i="0">
+              <a:rPr sz="900" b="1" i="0">
                 <a:solidFill>
                   <a:srgbClr val="F2A65A"/>
                 </a:solidFill>
@@ -8306,13 +8540,109 @@
               </a:spcAft>
             </a:pPr>
             <a:r>
-              <a:rPr sz="950" b="0" i="0">
+              <a:rPr sz="900" b="0" i="0">
                 <a:solidFill>
                   <a:srgbClr val="9FB4C2"/>
                 </a:solidFill>
                 <a:latin typeface="Calibri"/>
               </a:rPr>
               <a:t>Follows the line above: if mismatch dominates, reduce mismatch. Each candidate is re-SCORED at its own best pose — no new criterion, so it cannot invent a preference.</a:t>
+            </a:r>
+          </a:p>
+          <a:p>
+            <a:pPr algn="l">
+              <a:spcAft>
+                <a:spcPts val="200"/>
+              </a:spcAft>
+            </a:pPr>
+            <a:r>
+              <a:rPr sz="900" b="0" i="0">
+                <a:solidFill>
+                  <a:srgbClr val="35424D"/>
+                </a:solidFill>
+                <a:latin typeface="Calibri"/>
+              </a:rPr>
+              <a:t/>
+            </a:r>
+          </a:p>
+          <a:p>
+            <a:pPr algn="l">
+              <a:spcAft>
+                <a:spcPts val="200"/>
+              </a:spcAft>
+            </a:pPr>
+            <a:r>
+              <a:rPr sz="900" b="1" i="0">
+                <a:solidFill>
+                  <a:srgbClr val="F2A65A"/>
+                </a:solidFill>
+                <a:latin typeface="Calibri"/>
+              </a:rPr>
+              <a:t>Pose grid as evidence — WORKS</a:t>
+            </a:r>
+          </a:p>
+          <a:p>
+            <a:pPr algn="l">
+              <a:spcAft>
+                <a:spcPts val="200"/>
+              </a:spcAft>
+            </a:pPr>
+            <a:r>
+              <a:rPr sz="900" b="0" i="0">
+                <a:solidFill>
+                  <a:srgbClr val="9FB4C2"/>
+                </a:solidFill>
+                <a:latin typeface="Calibri"/>
+              </a:rPr>
+              <a:t>The same principle again. The MAXIMUM over 25 poses rewards a candidate that got lucky once; reading the whole grid rewards one that was consistently good. Same score, same grid, no extra work.</a:t>
+            </a:r>
+          </a:p>
+          <a:p>
+            <a:pPr algn="l">
+              <a:spcAft>
+                <a:spcPts val="200"/>
+              </a:spcAft>
+            </a:pPr>
+            <a:r>
+              <a:rPr sz="900" b="0" i="0">
+                <a:solidFill>
+                  <a:srgbClr val="35424D"/>
+                </a:solidFill>
+                <a:latin typeface="Calibri"/>
+              </a:rPr>
+              <a:t/>
+            </a:r>
+          </a:p>
+          <a:p>
+            <a:pPr algn="l">
+              <a:spcAft>
+                <a:spcPts val="200"/>
+              </a:spcAft>
+            </a:pPr>
+            <a:r>
+              <a:rPr sz="900" b="1" i="0">
+                <a:solidFill>
+                  <a:srgbClr val="FFFFFF"/>
+                </a:solidFill>
+                <a:latin typeface="Calibri"/>
+              </a:rPr>
+              <a:t>Global scanner calibration — fair, and useless</a:t>
+            </a:r>
+          </a:p>
+          <a:p>
+            <a:pPr algn="l">
+              <a:spcAft>
+                <a:spcPts val="200"/>
+              </a:spcAft>
+            </a:pPr>
+            <a:r>
+              <a:rPr sz="900" b="0" i="0">
+                <a:solidFill>
+                  <a:srgbClr val="9FB4C2"/>
+                </a:solidFill>
+                <a:latin typeface="Calibri"/>
+              </a:rPr>
+              <a:t>Measured from the array itself and applied to the whole image before any candidate existed. It lifted the true site by +0.0297 and the impostor by +0.0301 — fair by construction, which is exactly why it cannot break a tie.</a:t>
             </a:r>
           </a:p>
         </p:txBody>
@@ -8325,62 +8655,7 @@
         </p:nvSpPr>
         <p:spPr>
           <a:xfrm>
-            <a:off x="8001000" y="5138928"/>
-            <a:ext cx="3383280" cy="1051560"/>
-          </a:xfrm>
-          <a:prstGeom prst="rect">
-            <a:avLst/>
-          </a:prstGeom>
-          <a:noFill/>
-        </p:spPr>
-        <p:txBody>
-          <a:bodyPr wrap="square" lIns="0" rIns="0" tIns="0" bIns="0" anchor="t">
-            <a:spAutoFit/>
-          </a:bodyPr>
-          <a:lstStyle/>
-          <a:p>
-            <a:pPr algn="l">
-              <a:spcAft>
-                <a:spcPts val="100"/>
-              </a:spcAft>
-            </a:pPr>
-            <a:r>
-              <a:rPr sz="950" b="1" i="0">
-                <a:solidFill>
-                  <a:srgbClr val="FFFFFF"/>
-                </a:solidFill>
-                <a:latin typeface="Calibri"/>
-              </a:rPr>
-              <a:t>Global scanner calibration — fair, and useless</a:t>
-            </a:r>
-          </a:p>
-          <a:p>
-            <a:pPr algn="l">
-              <a:spcAft>
-                <a:spcPts val="100"/>
-              </a:spcAft>
-            </a:pPr>
-            <a:r>
-              <a:rPr sz="850" b="0" i="0">
-                <a:solidFill>
-                  <a:srgbClr val="9FB4C2"/>
-                </a:solidFill>
-                <a:latin typeface="Calibri"/>
-              </a:rPr>
-              <a:t>We measured the scanner from the array itself and corrected the whole image once, before any candidate existed. It lifted the true site by +0.0297 — three times the margin — and the impostor by +0.0301. A global correction is fair by construction, which is exactly why it cannot break a tie.</a:t>
-            </a:r>
-          </a:p>
-        </p:txBody>
-      </p:sp>
-      <p:sp>
-        <p:nvSpPr>
-          <p:cNvPr id="10" name="TextBox 9"/>
-          <p:cNvSpPr txBox="1"/>
-          <p:nvPr/>
-        </p:nvSpPr>
-        <p:spPr>
-          <a:xfrm>
-            <a:off x="548640" y="4846320"/>
+            <a:off x="548640" y="5550408"/>
             <a:ext cx="6949440" cy="914400"/>
           </a:xfrm>
           <a:prstGeom prst="rect">
@@ -8620,7 +8895,7 @@
                 </a:solidFill>
                 <a:latin typeface="Calibri"/>
               </a:rPr>
-              <a:t>•  Euclidean error 504.38 px — a different site entirely</a:t>
+              <a:t>•  Euclidean error 561.54 px — a different site entirely</a:t>
             </a:r>
           </a:p>
           <a:p>
@@ -8636,7 +8911,7 @@
                 </a:solidFill>
                 <a:latin typeface="Calibri"/>
               </a:rPr>
-              <a:t>•  The true location never entered the candidate set at all — no ranking rule could have recovered it</a:t>
+              <a:t>•  The true location WAS a candidate, at rank 17 — it was outscored</a:t>
             </a:r>
           </a:p>
           <a:p>
@@ -8652,6 +8927,22 @@
                 </a:solidFill>
                 <a:latin typeface="Calibri"/>
               </a:rPr>
+              <a:t>•  It lost by 0.0037 of correlation — 0.42% of the winning score</a:t>
+            </a:r>
+          </a:p>
+          <a:p>
+            <a:pPr algn="l">
+              <a:spcAft>
+                <a:spcPts val="500"/>
+              </a:spcAft>
+            </a:pPr>
+            <a:r>
+              <a:rPr sz="1200" b="0" i="0">
+                <a:solidFill>
+                  <a:srgbClr val="7A3A24"/>
+                </a:solidFill>
+                <a:latin typeface="Calibri"/>
+              </a:rPr>
               <a:t>•  The pair sits in the 'med' ambiguity stratum — no landmark in view</a:t>
             </a:r>
           </a:p>
@@ -8687,7 +8978,7 @@
                 </a:solidFill>
                 <a:latin typeface="Calibri"/>
               </a:rPr>
-              <a:t>Root cause across all 16 failures: ranking, not candidate generation (9/16).</a:t>
+              <a:t>Root cause across all 11 failures: the screen, not the final ranking (4/11).</a:t>
             </a:r>
           </a:p>
         </p:txBody>
@@ -8989,7 +9280,7 @@
                           </a:solidFill>
                           <a:latin typeface="Calibri"/>
                         </a:rPr>
-                        <a:t>32</a:t>
+                        <a:t>38</a:t>
                       </a:r>
                     </a:p>
                   </a:txBody>
@@ -9058,7 +9349,7 @@
                           </a:solidFill>
                           <a:latin typeface="Calibri"/>
                         </a:rPr>
-                        <a:t>6</a:t>
+                        <a:t>0</a:t>
                       </a:r>
                     </a:p>
                   </a:txBody>
@@ -9106,7 +9397,7 @@
                           </a:solidFill>
                           <a:latin typeface="Calibri"/>
                         </a:rPr>
-                        <a:t>25</a:t>
+                        <a:t>23</a:t>
                       </a:r>
                     </a:p>
                   </a:txBody>
@@ -9175,7 +9466,7 @@
                           </a:solidFill>
                           <a:latin typeface="Calibri"/>
                         </a:rPr>
-                        <a:t>2</a:t>
+                        <a:t>4</a:t>
                       </a:r>
                     </a:p>
                   </a:txBody>
@@ -9223,7 +9514,7 @@
                           </a:solidFill>
                           <a:latin typeface="Calibri"/>
                         </a:rPr>
-                        <a:t>27</a:t>
+                        <a:t>28</a:t>
                       </a:r>
                     </a:p>
                   </a:txBody>
@@ -9292,7 +9583,7 @@
                           </a:solidFill>
                           <a:latin typeface="Calibri"/>
                         </a:rPr>
-                        <a:t>1</a:t>
+                        <a:t>0</a:t>
                       </a:r>
                     </a:p>
                   </a:txBody>
@@ -9490,7 +9781,7 @@
                 </a:solidFill>
                 <a:latin typeface="Calibri"/>
               </a:rPr>
-              <a:t>Given the generator's exact pose, the true site scores 0.7661 and the winner 0.7696 — the truth is AHEAD in 7 of 15. The two are indistinguishable, so our six re-ranking criteria were resolving a margin of 0.0114.</a:t>
+              <a:t>Given the generator's exact pose, the true site scores 0.7181 and the winner 0.6759 — the truth is AHEAD in 7 of 15. The two are indistinguishable, so our six re-ranking criteria were resolving a margin of 0.0001.</a:t>
             </a:r>
           </a:p>
         </p:txBody>
@@ -9608,7 +9899,7 @@
                 </a:solidFill>
                 <a:latin typeface="Calibri"/>
               </a:rPr>
-              <a:t>About 382 ms per pair against a 300 ms goal. The per-candidate refit is most of it; top_k is the dial. We took 9 points of mis-lock for the time.</a:t>
+              <a:t>About 389 ms per pair against a 300 ms goal. The per-candidate refit is most of it; top_k is the dial. We took 9 points of mis-lock for the time.</a:t>
             </a:r>
           </a:p>
         </p:txBody>
@@ -9868,7 +10159,7 @@
                 </a:solidFill>
                 <a:latin typeface="Cambria"/>
               </a:rPr>
-              <a:t>76.7% → 16.7%</a:t>
+              <a:t>76.7% → 23.3%</a:t>
             </a:r>
           </a:p>
         </p:txBody>
@@ -9984,7 +10275,7 @@
                 </a:solidFill>
                 <a:latin typeface="Cambria"/>
               </a:rPr>
-              <a:t>90.0% → 10.0%</a:t>
+              <a:t>90.0% → 6.7%</a:t>
             </a:r>
           </a:p>
         </p:txBody>
@@ -10100,7 +10391,7 @@
                 </a:solidFill>
                 <a:latin typeface="Cambria"/>
               </a:rPr>
-              <a:t>17.5% → 72.5%</a:t>
+              <a:t>17.5% → 87.5%</a:t>
             </a:r>
           </a:p>
         </p:txBody>
@@ -10148,7 +10439,7 @@
         </p:nvSpPr>
         <p:spPr>
           <a:xfrm>
-            <a:off x="548640" y="2670048"/>
+            <a:off x="548640" y="2615184"/>
             <a:ext cx="11064240" cy="365760"/>
           </a:xfrm>
           <a:prstGeom prst="rect">
@@ -10170,7 +10461,7 @@
                 </a:solidFill>
                 <a:latin typeface="Cambria"/>
               </a:rPr>
-              <a:t>The four findings we would carry to any similar problem</a:t>
+              <a:t>The five findings we would carry to any similar problem</a:t>
             </a:r>
           </a:p>
         </p:txBody>
@@ -10183,7 +10474,7 @@
         </p:nvSpPr>
         <p:spPr>
           <a:xfrm>
-            <a:off x="566928" y="3127248"/>
+            <a:off x="566928" y="3054096"/>
             <a:ext cx="365760" cy="365760"/>
           </a:xfrm>
           <a:prstGeom prst="ellipse">
@@ -10236,7 +10527,7 @@
         </p:nvSpPr>
         <p:spPr>
           <a:xfrm>
-            <a:off x="1097280" y="3108960"/>
+            <a:off x="1097280" y="3035808"/>
             <a:ext cx="10332720" cy="274320"/>
           </a:xfrm>
           <a:prstGeom prst="rect">
@@ -10271,8 +10562,8 @@
         </p:nvSpPr>
         <p:spPr>
           <a:xfrm>
-            <a:off x="1097280" y="3374136"/>
-            <a:ext cx="10332720" cy="566928"/>
+            <a:off x="1097280" y="3291839"/>
+            <a:ext cx="10332720" cy="512064"/>
           </a:xfrm>
           <a:prstGeom prst="rect">
             <a:avLst/>
@@ -10287,7 +10578,7 @@
           <a:p>
             <a:pPr algn="l"/>
             <a:r>
-              <a:rPr sz="1000" b="0" i="0">
+              <a:rPr sz="950" b="0" i="0">
                 <a:solidFill>
                   <a:srgbClr val="9FB4C2"/>
                 </a:solidFill>
@@ -10306,7 +10597,7 @@
         </p:nvSpPr>
         <p:spPr>
           <a:xfrm>
-            <a:off x="566928" y="3986783"/>
+            <a:off x="566928" y="3776472"/>
             <a:ext cx="365760" cy="365760"/>
           </a:xfrm>
           <a:prstGeom prst="ellipse">
@@ -10359,7 +10650,7 @@
         </p:nvSpPr>
         <p:spPr>
           <a:xfrm>
-            <a:off x="1097280" y="3968496"/>
+            <a:off x="1097280" y="3758184"/>
             <a:ext cx="10332720" cy="274320"/>
           </a:xfrm>
           <a:prstGeom prst="rect">
@@ -10394,8 +10685,8 @@
         </p:nvSpPr>
         <p:spPr>
           <a:xfrm>
-            <a:off x="1097280" y="4233671"/>
-            <a:ext cx="10332720" cy="566928"/>
+            <a:off x="1097280" y="4014215"/>
+            <a:ext cx="10332720" cy="512064"/>
           </a:xfrm>
           <a:prstGeom prst="rect">
             <a:avLst/>
@@ -10410,7 +10701,7 @@
           <a:p>
             <a:pPr algn="l"/>
             <a:r>
-              <a:rPr sz="1000" b="0" i="0">
+              <a:rPr sz="950" b="0" i="0">
                 <a:solidFill>
                   <a:srgbClr val="9FB4C2"/>
                 </a:solidFill>
@@ -10429,7 +10720,7 @@
         </p:nvSpPr>
         <p:spPr>
           <a:xfrm>
-            <a:off x="566928" y="4846320"/>
+            <a:off x="566928" y="4498848"/>
             <a:ext cx="365760" cy="365760"/>
           </a:xfrm>
           <a:prstGeom prst="ellipse">
@@ -10482,7 +10773,7 @@
         </p:nvSpPr>
         <p:spPr>
           <a:xfrm>
-            <a:off x="1097280" y="4828032"/>
+            <a:off x="1097280" y="4480560"/>
             <a:ext cx="10332720" cy="274320"/>
           </a:xfrm>
           <a:prstGeom prst="rect">
@@ -10517,8 +10808,8 @@
         </p:nvSpPr>
         <p:spPr>
           <a:xfrm>
-            <a:off x="1097280" y="5093208"/>
-            <a:ext cx="10332720" cy="566928"/>
+            <a:off x="1097280" y="4736592"/>
+            <a:ext cx="10332720" cy="512064"/>
           </a:xfrm>
           <a:prstGeom prst="rect">
             <a:avLst/>
@@ -10533,7 +10824,7 @@
           <a:p>
             <a:pPr algn="l"/>
             <a:r>
-              <a:rPr sz="1000" b="0" i="0">
+              <a:rPr sz="950" b="0" i="0">
                 <a:solidFill>
                   <a:srgbClr val="9FB4C2"/>
                 </a:solidFill>
@@ -10552,7 +10843,7 @@
         </p:nvSpPr>
         <p:spPr>
           <a:xfrm>
-            <a:off x="566928" y="5705856"/>
+            <a:off x="566928" y="5221224"/>
             <a:ext cx="365760" cy="365760"/>
           </a:xfrm>
           <a:prstGeom prst="ellipse">
@@ -10605,7 +10896,7 @@
         </p:nvSpPr>
         <p:spPr>
           <a:xfrm>
-            <a:off x="1097280" y="5687568"/>
+            <a:off x="1097280" y="5202936"/>
             <a:ext cx="10332720" cy="274320"/>
           </a:xfrm>
           <a:prstGeom prst="rect">
@@ -10640,8 +10931,8 @@
         </p:nvSpPr>
         <p:spPr>
           <a:xfrm>
-            <a:off x="1097280" y="5952744"/>
-            <a:ext cx="10332720" cy="566928"/>
+            <a:off x="1097280" y="5458968"/>
+            <a:ext cx="10332720" cy="512064"/>
           </a:xfrm>
           <a:prstGeom prst="rect">
             <a:avLst/>
@@ -10656,7 +10947,7 @@
           <a:p>
             <a:pPr algn="l"/>
             <a:r>
-              <a:rPr sz="1000" b="0" i="0">
+              <a:rPr sz="950" b="0" i="0">
                 <a:solidFill>
                   <a:srgbClr val="9FB4C2"/>
                 </a:solidFill>
@@ -10669,14 +10960,67 @@
       </p:sp>
       <p:sp>
         <p:nvSpPr>
-          <p:cNvPr id="25" name="TextBox 24"/>
+          <p:cNvPr id="25" name="Oval 24"/>
+          <p:cNvSpPr/>
+          <p:nvPr/>
+        </p:nvSpPr>
+        <p:spPr>
+          <a:xfrm>
+            <a:off x="566928" y="5943600"/>
+            <a:ext cx="365760" cy="365760"/>
+          </a:xfrm>
+          <a:prstGeom prst="ellipse">
+            <a:avLst/>
+          </a:prstGeom>
+          <a:solidFill>
+            <a:srgbClr val="F2A65A"/>
+          </a:solidFill>
+          <a:ln>
+            <a:noFill/>
+          </a:ln>
+          <a:effectLst/>
+        </p:spPr>
+        <p:style>
+          <a:lnRef idx="1">
+            <a:schemeClr val="accent1"/>
+          </a:lnRef>
+          <a:fillRef idx="3">
+            <a:schemeClr val="accent1"/>
+          </a:fillRef>
+          <a:effectRef idx="2">
+            <a:schemeClr val="accent1"/>
+          </a:effectRef>
+          <a:fontRef idx="minor">
+            <a:schemeClr val="lt1"/>
+          </a:fontRef>
+        </p:style>
+        <p:txBody>
+          <a:bodyPr rtlCol="0" anchor="ctr" lIns="0" rIns="0" tIns="0" bIns="0" wrap="none"/>
+          <a:lstStyle/>
+          <a:p>
+            <a:pPr algn="ctr"/>
+            <a:r>
+              <a:rPr sz="1300" b="1">
+                <a:solidFill>
+                  <a:srgbClr val="FFFFFF"/>
+                </a:solidFill>
+                <a:latin typeface="Calibri"/>
+              </a:rPr>
+              <a:t>5</a:t>
+            </a:r>
+          </a:p>
+        </p:txBody>
+      </p:sp>
+      <p:sp>
+        <p:nvSpPr>
+          <p:cNvPr id="26" name="TextBox 25"/>
           <p:cNvSpPr txBox="1"/>
           <p:nvPr/>
         </p:nvSpPr>
         <p:spPr>
           <a:xfrm>
-            <a:off x="548640" y="6400800"/>
-            <a:ext cx="11064240" cy="320040"/>
+            <a:off x="1097280" y="5925312"/>
+            <a:ext cx="10332720" cy="274320"/>
           </a:xfrm>
           <a:prstGeom prst="rect">
             <a:avLst/>
@@ -10691,13 +11035,83 @@
           <a:p>
             <a:pPr algn="l"/>
             <a:r>
-              <a:rPr sz="1150" b="0" i="1">
+              <a:rPr sz="1250" b="1" i="0">
                 <a:solidFill>
                   <a:srgbClr val="F2A65A"/>
                 </a:solidFill>
                 <a:latin typeface="Calibri"/>
               </a:rPr>
-              <a:t>Next: at the generator's exact pose the truth and its impostor score 0.7661 against 0.7696 — so what is left is not a ranking problem but a margin problem, and the only stage that ever moved it did so by removing a handicap, not by scoring harder.</a:t>
+              <a:t>The maximum of many tries is not a measurement of quality.</a:t>
+            </a:r>
+          </a:p>
+        </p:txBody>
+      </p:sp>
+      <p:sp>
+        <p:nvSpPr>
+          <p:cNvPr id="27" name="TextBox 26"/>
+          <p:cNvSpPr txBox="1"/>
+          <p:nvPr/>
+        </p:nvSpPr>
+        <p:spPr>
+          <a:xfrm>
+            <a:off x="1097280" y="6181344"/>
+            <a:ext cx="10332720" cy="512064"/>
+          </a:xfrm>
+          <a:prstGeom prst="rect">
+            <a:avLst/>
+          </a:prstGeom>
+          <a:noFill/>
+        </p:spPr>
+        <p:txBody>
+          <a:bodyPr wrap="square" lIns="0" rIns="0" tIns="0" bIns="0" anchor="t">
+            <a:spAutoFit/>
+          </a:bodyPr>
+          <a:lstStyle/>
+          <a:p>
+            <a:pPr algn="l"/>
+            <a:r>
+              <a:rPr sz="950" b="0" i="0">
+                <a:solidFill>
+                  <a:srgbClr val="9FB4C2"/>
+                </a:solidFill>
+                <a:latin typeface="Calibri"/>
+              </a:rPr>
+              <a:t>The same mistake one level down, and worth more than any physics we added. Each candidate gets ~25 attempts at a flattering pose, so the one with the roughest score surface wins most often — not the best one. Reading the whole surface instead of its peak fixed 17 pairs and broke 3 across five splits, for no extra work.</a:t>
+            </a:r>
+          </a:p>
+        </p:txBody>
+      </p:sp>
+      <p:sp>
+        <p:nvSpPr>
+          <p:cNvPr id="28" name="TextBox 27"/>
+          <p:cNvSpPr txBox="1"/>
+          <p:nvPr/>
+        </p:nvSpPr>
+        <p:spPr>
+          <a:xfrm>
+            <a:off x="548640" y="6492240"/>
+            <a:ext cx="11064240" cy="320040"/>
+          </a:xfrm>
+          <a:prstGeom prst="rect">
+            <a:avLst/>
+          </a:prstGeom>
+          <a:noFill/>
+        </p:spPr>
+        <p:txBody>
+          <a:bodyPr wrap="square" lIns="0" rIns="0" tIns="0" bIns="0" anchor="t">
+            <a:spAutoFit/>
+          </a:bodyPr>
+          <a:lstStyle/>
+          <a:p>
+            <a:pPr algn="l"/>
+            <a:r>
+              <a:rPr sz="1100" b="0" i="1">
+                <a:solidFill>
+                  <a:srgbClr val="F2A65A"/>
+                </a:solidFill>
+                <a:latin typeface="Calibri"/>
+              </a:rPr>
+              <a:t>Next: at the generator's exact pose the truth and its impostor score 0.7181 against 0.6759 — so what is left is not a ranking problem but a margin problem, and the only stage that ever moved it did so by removing a handicap, not by scoring harder.</a:t>
             </a:r>
           </a:p>
         </p:txBody>
@@ -16309,7 +16723,7 @@
                 </a:solidFill>
                 <a:latin typeface="Courier New"/>
               </a:rPr>
-              <a:t># single pair — prints exactly one line: "547.01,289.62"</a:t>
+              <a:t># single pair — prints exactly one line: "547.01,289.63"</a:t>
             </a:r>
           </a:p>
           <a:p>
@@ -17813,7 +18227,7 @@
                           </a:solidFill>
                           <a:latin typeface="Calibri"/>
                         </a:rPr>
-                        <a:t>dose 100</a:t>
+                        <a:t>dose 200</a:t>
                       </a:r>
                     </a:p>
                   </a:txBody>
@@ -17836,7 +18250,7 @@
                           </a:solidFill>
                           <a:latin typeface="Calibri"/>
                         </a:rPr>
-                        <a:t>23.3%</a:t>
+                        <a:t>20.0%</a:t>
                       </a:r>
                     </a:p>
                   </a:txBody>
@@ -17907,7 +18321,7 @@
                           </a:solidFill>
                           <a:latin typeface="Calibri"/>
                         </a:rPr>
-                        <a:t>26.7%</a:t>
+                        <a:t>20.0%</a:t>
                       </a:r>
                     </a:p>
                   </a:txBody>
@@ -17978,7 +18392,7 @@
                           </a:solidFill>
                           <a:latin typeface="Calibri"/>
                         </a:rPr>
-                        <a:t>40.0%</a:t>
+                        <a:t>36.7%</a:t>
                       </a:r>
                     </a:p>
                   </a:txBody>
@@ -18049,7 +18463,7 @@
                           </a:solidFill>
                           <a:latin typeface="Calibri"/>
                         </a:rPr>
-                        <a:t>26.7%</a:t>
+                        <a:t>30.0%</a:t>
                       </a:r>
                     </a:p>
                   </a:txBody>
@@ -18702,7 +19116,7 @@
                           </a:solidFill>
                           <a:latin typeface="Calibri"/>
                         </a:rPr>
-                        <a:t>20.0%</a:t>
+                        <a:t>5.0%</a:t>
                       </a:r>
                     </a:p>
                   </a:txBody>
@@ -18725,7 +19139,7 @@
                           </a:solidFill>
                           <a:latin typeface="Calibri"/>
                         </a:rPr>
-                        <a:t>0.251</a:t>
+                        <a:t>0.195</a:t>
                       </a:r>
                     </a:p>
                   </a:txBody>
@@ -18748,7 +19162,7 @@
                           </a:solidFill>
                           <a:latin typeface="Calibri"/>
                         </a:rPr>
-                        <a:t>80.0%</a:t>
+                        <a:t>95.0%</a:t>
                       </a:r>
                     </a:p>
                   </a:txBody>
@@ -18771,7 +19185,7 @@
                           </a:solidFill>
                           <a:latin typeface="Calibri"/>
                         </a:rPr>
-                        <a:t>80.0%</a:t>
+                        <a:t>95.0%</a:t>
                       </a:r>
                     </a:p>
                   </a:txBody>
@@ -18794,7 +19208,7 @@
                           </a:solidFill>
                           <a:latin typeface="Calibri"/>
                         </a:rPr>
-                        <a:t>77.5%</a:t>
+                        <a:t>92.5%</a:t>
                       </a:r>
                     </a:p>
                   </a:txBody>
@@ -18817,7 +19231,7 @@
                           </a:solidFill>
                           <a:latin typeface="Calibri"/>
                         </a:rPr>
-                        <a:t>72.5%</a:t>
+                        <a:t>87.5%</a:t>
                       </a:r>
                     </a:p>
                   </a:txBody>
@@ -18840,7 +19254,7 @@
                           </a:solidFill>
                           <a:latin typeface="Calibri"/>
                         </a:rPr>
-                        <a:t>374 ms</a:t>
+                        <a:t>382 ms</a:t>
                       </a:r>
                     </a:p>
                   </a:txBody>
@@ -19120,7 +19534,7 @@
                           </a:solidFill>
                           <a:latin typeface="Calibri"/>
                         </a:rPr>
-                        <a:t>16.7%</a:t>
+                        <a:t>23.3%</a:t>
                       </a:r>
                     </a:p>
                   </a:txBody>
@@ -19143,53 +19557,7 @@
                           </a:solidFill>
                           <a:latin typeface="Calibri"/>
                         </a:rPr>
-                        <a:t>0.342</a:t>
-                      </a:r>
-                    </a:p>
-                  </a:txBody>
-                  <a:tcPr marL="54864" marR="54864" marT="18288" marB="18288" anchor="ctr">
-                    <a:solidFill>
-                      <a:srgbClr val="ECF1F4"/>
-                    </a:solidFill>
-                  </a:tcPr>
-                </a:tc>
-                <a:tc>
-                  <a:txBody>
-                    <a:bodyPr wrap="square"/>
-                    <a:lstStyle/>
-                    <a:p>
-                      <a:pPr algn="ctr"/>
-                      <a:r>
-                        <a:rPr sz="1100" b="0">
-                          <a:solidFill>
-                            <a:srgbClr val="35424D"/>
-                          </a:solidFill>
-                          <a:latin typeface="Calibri"/>
-                        </a:rPr>
-                        <a:t>83.3%</a:t>
-                      </a:r>
-                    </a:p>
-                  </a:txBody>
-                  <a:tcPr marL="54864" marR="54864" marT="18288" marB="18288" anchor="ctr">
-                    <a:solidFill>
-                      <a:srgbClr val="ECF1F4"/>
-                    </a:solidFill>
-                  </a:tcPr>
-                </a:tc>
-                <a:tc>
-                  <a:txBody>
-                    <a:bodyPr wrap="square"/>
-                    <a:lstStyle/>
-                    <a:p>
-                      <a:pPr algn="ctr"/>
-                      <a:r>
-                        <a:rPr sz="1100" b="0">
-                          <a:solidFill>
-                            <a:srgbClr val="35424D"/>
-                          </a:solidFill>
-                          <a:latin typeface="Calibri"/>
-                        </a:rPr>
-                        <a:t>80.0%</a:t>
+                        <a:t>0.357</a:t>
                       </a:r>
                     </a:p>
                   </a:txBody>
@@ -19235,7 +19603,7 @@
                           </a:solidFill>
                           <a:latin typeface="Calibri"/>
                         </a:rPr>
-                        <a:t>63.3%</a:t>
+                        <a:t>73.3%</a:t>
                       </a:r>
                     </a:p>
                   </a:txBody>
@@ -19258,7 +19626,53 @@
                           </a:solidFill>
                           <a:latin typeface="Calibri"/>
                         </a:rPr>
-                        <a:t>382 ms</a:t>
+                        <a:t>73.3%</a:t>
+                      </a:r>
+                    </a:p>
+                  </a:txBody>
+                  <a:tcPr marL="54864" marR="54864" marT="18288" marB="18288" anchor="ctr">
+                    <a:solidFill>
+                      <a:srgbClr val="ECF1F4"/>
+                    </a:solidFill>
+                  </a:tcPr>
+                </a:tc>
+                <a:tc>
+                  <a:txBody>
+                    <a:bodyPr wrap="square"/>
+                    <a:lstStyle/>
+                    <a:p>
+                      <a:pPr algn="ctr"/>
+                      <a:r>
+                        <a:rPr sz="1100" b="0">
+                          <a:solidFill>
+                            <a:srgbClr val="35424D"/>
+                          </a:solidFill>
+                          <a:latin typeface="Calibri"/>
+                        </a:rPr>
+                        <a:t>60.0%</a:t>
+                      </a:r>
+                    </a:p>
+                  </a:txBody>
+                  <a:tcPr marL="54864" marR="54864" marT="18288" marB="18288" anchor="ctr">
+                    <a:solidFill>
+                      <a:srgbClr val="ECF1F4"/>
+                    </a:solidFill>
+                  </a:tcPr>
+                </a:tc>
+                <a:tc>
+                  <a:txBody>
+                    <a:bodyPr wrap="square"/>
+                    <a:lstStyle/>
+                    <a:p>
+                      <a:pPr algn="ctr"/>
+                      <a:r>
+                        <a:rPr sz="1100" b="0">
+                          <a:solidFill>
+                            <a:srgbClr val="35424D"/>
+                          </a:solidFill>
+                          <a:latin typeface="Calibri"/>
+                        </a:rPr>
+                        <a:t>389 ms</a:t>
                       </a:r>
                     </a:p>
                   </a:txBody>
@@ -19538,7 +19952,7 @@
                           </a:solidFill>
                           <a:latin typeface="Calibri"/>
                         </a:rPr>
-                        <a:t>10.0%</a:t>
+                        <a:t>6.7%</a:t>
                       </a:r>
                     </a:p>
                   </a:txBody>
@@ -19561,7 +19975,30 @@
                           </a:solidFill>
                           <a:latin typeface="Calibri"/>
                         </a:rPr>
-                        <a:t>0.220</a:t>
+                        <a:t>0.214</a:t>
+                      </a:r>
+                    </a:p>
+                  </a:txBody>
+                  <a:tcPr marL="54864" marR="54864" marT="18288" marB="18288" anchor="ctr">
+                    <a:solidFill>
+                      <a:srgbClr val="ECF1F4"/>
+                    </a:solidFill>
+                  </a:tcPr>
+                </a:tc>
+                <a:tc>
+                  <a:txBody>
+                    <a:bodyPr wrap="square"/>
+                    <a:lstStyle/>
+                    <a:p>
+                      <a:pPr algn="ctr"/>
+                      <a:r>
+                        <a:rPr sz="1100" b="0">
+                          <a:solidFill>
+                            <a:srgbClr val="35424D"/>
+                          </a:solidFill>
+                          <a:latin typeface="Calibri"/>
+                        </a:rPr>
+                        <a:t>93.3%</a:t>
                       </a:r>
                     </a:p>
                   </a:txBody>
@@ -19630,7 +20067,7 @@
                           </a:solidFill>
                           <a:latin typeface="Calibri"/>
                         </a:rPr>
-                        <a:t>83.3%</a:t>
+                        <a:t>73.3%</a:t>
                       </a:r>
                     </a:p>
                   </a:txBody>
@@ -19653,30 +20090,7 @@
                           </a:solidFill>
                           <a:latin typeface="Calibri"/>
                         </a:rPr>
-                        <a:t>70.0%</a:t>
-                      </a:r>
-                    </a:p>
-                  </a:txBody>
-                  <a:tcPr marL="54864" marR="54864" marT="18288" marB="18288" anchor="ctr">
-                    <a:solidFill>
-                      <a:srgbClr val="ECF1F4"/>
-                    </a:solidFill>
-                  </a:tcPr>
-                </a:tc>
-                <a:tc>
-                  <a:txBody>
-                    <a:bodyPr wrap="square"/>
-                    <a:lstStyle/>
-                    <a:p>
-                      <a:pPr algn="ctr"/>
-                      <a:r>
-                        <a:rPr sz="1100" b="0">
-                          <a:solidFill>
-                            <a:srgbClr val="35424D"/>
-                          </a:solidFill>
-                          <a:latin typeface="Calibri"/>
-                        </a:rPr>
-                        <a:t>411 ms</a:t>
+                        <a:t>410 ms</a:t>
                       </a:r>
                     </a:p>
                   </a:txBody>
@@ -19756,8 +20170,8 @@
                 </a:solidFill>
                 <a:latin typeface="Calibri"/>
               </a:rPr>
-              <a:t>On the sponsor's fixed 10:1 data the task is precision: median error improves from 1.102 px to 0.251 px and the sub-pixel pass rate rises from 17.5% to 72.5%.
-On our own data — the 9:1–11:1 and ±2° envelope the problem statement says will be tested — the baseline does not work at all (76.7% mis-lock against 16.7%). That axis is invisible to anyone validating only on the published generator, because it produces neither rotation nor scale variation.</a:t>
+              <a:t>On the sponsor's fixed 10:1 data the task is precision: median error improves from 1.102 px to 0.195 px and the sub-pixel pass rate rises from 17.5% to 87.5%.
+On our own data — the 9:1–11:1 and ±2° envelope the problem statement says will be tested — the baseline does not work at all (76.7% mis-lock against 23.3%). That axis is invisible to anyone validating only on the published generator, because it produces neither rotation nor scale variation.</a:t>
             </a:r>
           </a:p>
         </p:txBody>

--- a/solution_presentation.pptx
+++ b/solution_presentation.pptx
@@ -245,10 +245,10 @@
                 <c:formatCode>General</c:formatCode>
                 <c:ptCount val="3"/>
                 <c:pt idx="0">
-                  <c:v>5.0</c:v>
+                  <c:v>0.0</c:v>
                 </c:pt>
                 <c:pt idx="1">
-                  <c:v>23.3333</c:v>
+                  <c:v>20.0</c:v>
                 </c:pt>
                 <c:pt idx="2">
                   <c:v>6.66667</c:v>
@@ -4096,7 +4096,7 @@
                 </a:solidFill>
                 <a:latin typeface="Cambria"/>
               </a:rPr>
-              <a:t>23.3%</a:t>
+              <a:t>20.0%</a:t>
             </a:r>
           </a:p>
         </p:txBody>
@@ -4166,7 +4166,7 @@
                 </a:solidFill>
                 <a:latin typeface="Cambria"/>
               </a:rPr>
-              <a:t>0.188 px</a:t>
+              <a:t>0.216 px</a:t>
             </a:r>
           </a:p>
         </p:txBody>
@@ -4236,7 +4236,7 @@
                 </a:solidFill>
                 <a:latin typeface="Cambria"/>
               </a:rPr>
-              <a:t>60.0%</a:t>
+              <a:t>63.3%</a:t>
             </a:r>
           </a:p>
         </p:txBody>
@@ -6696,7 +6696,7 @@
         </p:nvGraphicFramePr>
         <p:xfrm>
           <a:off x="548640" y="1572768"/>
-          <a:ext cx="6949440" cy="3566160"/>
+          <a:ext cx="6949440" cy="3840480"/>
         </p:xfrm>
         <a:graphic>
           <a:graphicData uri="http://schemas.openxmlformats.org/drawingml/2006/table">
@@ -7544,7 +7544,7 @@
                           </a:solidFill>
                           <a:latin typeface="Calibri"/>
                         </a:rPr>
-                        <a:t>+ spec's centre rule</a:t>
+                        <a:t>+ wider screen (top 30)   ← shipped</a:t>
                       </a:r>
                     </a:p>
                   </a:txBody>
@@ -7567,7 +7567,7 @@
                           </a:solidFill>
                           <a:latin typeface="Calibri"/>
                         </a:rPr>
-                        <a:t>32.5%</a:t>
+                        <a:t>0.0%</a:t>
                       </a:r>
                     </a:p>
                   </a:txBody>
@@ -7613,7 +7613,7 @@
                           </a:solidFill>
                           <a:latin typeface="Calibri"/>
                         </a:rPr>
-                        <a:t>16.7%</a:t>
+                        <a:t>6.7%</a:t>
                       </a:r>
                     </a:p>
                   </a:txBody>
@@ -7636,7 +7636,7 @@
                           </a:solidFill>
                           <a:latin typeface="Calibri"/>
                         </a:rPr>
-                        <a:t>prior absent</a:t>
+                        <a:t>recovers candidates</a:t>
                       </a:r>
                     </a:p>
                   </a:txBody>
@@ -7661,7 +7661,7 @@
                           </a:solidFill>
                           <a:latin typeface="Calibri"/>
                         </a:rPr>
-                        <a:t>+ pose: spectral lattice</a:t>
+                        <a:t>+ spec's centre rule</a:t>
                       </a:r>
                     </a:p>
                   </a:txBody>
@@ -7684,7 +7684,7 @@
                           </a:solidFill>
                           <a:latin typeface="Calibri"/>
                         </a:rPr>
-                        <a:t>22.5%</a:t>
+                        <a:t>32.5%</a:t>
                       </a:r>
                     </a:p>
                   </a:txBody>
@@ -7707,7 +7707,7 @@
                           </a:solidFill>
                           <a:latin typeface="Calibri"/>
                         </a:rPr>
-                        <a:t>46.7%</a:t>
+                        <a:t>20.0%</a:t>
                       </a:r>
                     </a:p>
                   </a:txBody>
@@ -7730,7 +7730,7 @@
                           </a:solidFill>
                           <a:latin typeface="Calibri"/>
                         </a:rPr>
-                        <a:t>60.0%</a:t>
+                        <a:t>16.7%</a:t>
                       </a:r>
                     </a:p>
                   </a:txBody>
@@ -7753,7 +7753,7 @@
                           </a:solidFill>
                           <a:latin typeface="Calibri"/>
                         </a:rPr>
-                        <a:t>less accurate</a:t>
+                        <a:t>prior absent</a:t>
                       </a:r>
                     </a:p>
                   </a:txBody>
@@ -7778,7 +7778,7 @@
                           </a:solidFill>
                           <a:latin typeface="Calibri"/>
                         </a:rPr>
-                        <a:t>+ PADM residual re-ranking</a:t>
+                        <a:t>+ pose: spectral lattice</a:t>
                       </a:r>
                     </a:p>
                   </a:txBody>
@@ -7801,7 +7801,7 @@
                           </a:solidFill>
                           <a:latin typeface="Calibri"/>
                         </a:rPr>
-                        <a:t>27.5%</a:t>
+                        <a:t>22.5%</a:t>
                       </a:r>
                     </a:p>
                   </a:txBody>
@@ -7824,7 +7824,7 @@
                           </a:solidFill>
                           <a:latin typeface="Calibri"/>
                         </a:rPr>
-                        <a:t>70.0%</a:t>
+                        <a:t>46.7%</a:t>
                       </a:r>
                     </a:p>
                   </a:txBody>
@@ -7847,7 +7847,7 @@
                           </a:solidFill>
                           <a:latin typeface="Calibri"/>
                         </a:rPr>
-                        <a:t>73.3%</a:t>
+                        <a:t>60.0%</a:t>
                       </a:r>
                     </a:p>
                   </a:txBody>
@@ -7870,7 +7870,7 @@
                           </a:solidFill>
                           <a:latin typeface="Calibri"/>
                         </a:rPr>
-                        <a:t>overfit</a:t>
+                        <a:t>less accurate</a:t>
                       </a:r>
                     </a:p>
                   </a:txBody>
@@ -7895,7 +7895,7 @@
                           </a:solidFill>
                           <a:latin typeface="Calibri"/>
                         </a:rPr>
-                        <a:t>+ max-likelihood re-ranking</a:t>
+                        <a:t>+ PADM residual re-ranking</a:t>
                       </a:r>
                     </a:p>
                   </a:txBody>
@@ -7918,7 +7918,264 @@
                           </a:solidFill>
                           <a:latin typeface="Calibri"/>
                         </a:rPr>
+                        <a:t>27.5%</a:t>
+                      </a:r>
+                    </a:p>
+                  </a:txBody>
+                  <a:tcPr marL="54864" marR="54864" marT="18288" marB="18288" anchor="ctr">
+                    <a:solidFill>
+                      <a:srgbClr val="ECF1F4"/>
+                    </a:solidFill>
+                  </a:tcPr>
+                </a:tc>
+                <a:tc>
+                  <a:txBody>
+                    <a:bodyPr wrap="square"/>
+                    <a:lstStyle/>
+                    <a:p>
+                      <a:pPr algn="ctr"/>
+                      <a:r>
+                        <a:rPr sz="1050" b="0">
+                          <a:solidFill>
+                            <a:srgbClr val="35424D"/>
+                          </a:solidFill>
+                          <a:latin typeface="Calibri"/>
+                        </a:rPr>
+                        <a:t>70.0%</a:t>
+                      </a:r>
+                    </a:p>
+                  </a:txBody>
+                  <a:tcPr marL="54864" marR="54864" marT="18288" marB="18288" anchor="ctr">
+                    <a:solidFill>
+                      <a:srgbClr val="ECF1F4"/>
+                    </a:solidFill>
+                  </a:tcPr>
+                </a:tc>
+                <a:tc>
+                  <a:txBody>
+                    <a:bodyPr wrap="square"/>
+                    <a:lstStyle/>
+                    <a:p>
+                      <a:pPr algn="ctr"/>
+                      <a:r>
+                        <a:rPr sz="1050" b="0">
+                          <a:solidFill>
+                            <a:srgbClr val="35424D"/>
+                          </a:solidFill>
+                          <a:latin typeface="Calibri"/>
+                        </a:rPr>
+                        <a:t>73.3%</a:t>
+                      </a:r>
+                    </a:p>
+                  </a:txBody>
+                  <a:tcPr marL="54864" marR="54864" marT="18288" marB="18288" anchor="ctr">
+                    <a:solidFill>
+                      <a:srgbClr val="ECF1F4"/>
+                    </a:solidFill>
+                  </a:tcPr>
+                </a:tc>
+                <a:tc>
+                  <a:txBody>
+                    <a:bodyPr wrap="square"/>
+                    <a:lstStyle/>
+                    <a:p>
+                      <a:pPr algn="ctr"/>
+                      <a:r>
+                        <a:rPr sz="1050" b="0">
+                          <a:solidFill>
+                            <a:srgbClr val="35424D"/>
+                          </a:solidFill>
+                          <a:latin typeface="Calibri"/>
+                        </a:rPr>
+                        <a:t>overfit</a:t>
+                      </a:r>
+                    </a:p>
+                  </a:txBody>
+                  <a:tcPr marL="54864" marR="54864" marT="18288" marB="18288" anchor="ctr">
+                    <a:solidFill>
+                      <a:srgbClr val="ECF1F4"/>
+                    </a:solidFill>
+                  </a:tcPr>
+                </a:tc>
+              </a:tr>
+              <a:tr h="274320">
+                <a:tc>
+                  <a:txBody>
+                    <a:bodyPr wrap="square"/>
+                    <a:lstStyle/>
+                    <a:p>
+                      <a:pPr algn="l"/>
+                      <a:r>
+                        <a:rPr sz="1050" b="0">
+                          <a:solidFill>
+                            <a:srgbClr val="35424D"/>
+                          </a:solidFill>
+                          <a:latin typeface="Calibri"/>
+                        </a:rPr>
+                        <a:t>+ max-likelihood re-ranking</a:t>
+                      </a:r>
+                    </a:p>
+                  </a:txBody>
+                  <a:tcPr marL="54864" marR="54864" marT="18288" marB="18288" anchor="ctr">
+                    <a:solidFill>
+                      <a:srgbClr val="FFFFFF"/>
+                    </a:solidFill>
+                  </a:tcPr>
+                </a:tc>
+                <a:tc>
+                  <a:txBody>
+                    <a:bodyPr wrap="square"/>
+                    <a:lstStyle/>
+                    <a:p>
+                      <a:pPr algn="ctr"/>
+                      <a:r>
+                        <a:rPr sz="1050" b="0">
+                          <a:solidFill>
+                            <a:srgbClr val="35424D"/>
+                          </a:solidFill>
+                          <a:latin typeface="Calibri"/>
+                        </a:rPr>
                         <a:t>22.5%</a:t>
+                      </a:r>
+                    </a:p>
+                  </a:txBody>
+                  <a:tcPr marL="54864" marR="54864" marT="18288" marB="18288" anchor="ctr">
+                    <a:solidFill>
+                      <a:srgbClr val="FFFFFF"/>
+                    </a:solidFill>
+                  </a:tcPr>
+                </a:tc>
+                <a:tc>
+                  <a:txBody>
+                    <a:bodyPr wrap="square"/>
+                    <a:lstStyle/>
+                    <a:p>
+                      <a:pPr algn="ctr"/>
+                      <a:r>
+                        <a:rPr sz="1050" b="0">
+                          <a:solidFill>
+                            <a:srgbClr val="35424D"/>
+                          </a:solidFill>
+                          <a:latin typeface="Calibri"/>
+                        </a:rPr>
+                        <a:t>36.7%</a:t>
+                      </a:r>
+                    </a:p>
+                  </a:txBody>
+                  <a:tcPr marL="54864" marR="54864" marT="18288" marB="18288" anchor="ctr">
+                    <a:solidFill>
+                      <a:srgbClr val="FFFFFF"/>
+                    </a:solidFill>
+                  </a:tcPr>
+                </a:tc>
+                <a:tc>
+                  <a:txBody>
+                    <a:bodyPr wrap="square"/>
+                    <a:lstStyle/>
+                    <a:p>
+                      <a:pPr algn="ctr"/>
+                      <a:r>
+                        <a:rPr sz="1050" b="0">
+                          <a:solidFill>
+                            <a:srgbClr val="35424D"/>
+                          </a:solidFill>
+                          <a:latin typeface="Calibri"/>
+                        </a:rPr>
+                        <a:t>50.0%</a:t>
+                      </a:r>
+                    </a:p>
+                  </a:txBody>
+                  <a:tcPr marL="54864" marR="54864" marT="18288" marB="18288" anchor="ctr">
+                    <a:solidFill>
+                      <a:srgbClr val="FFFFFF"/>
+                    </a:solidFill>
+                  </a:tcPr>
+                </a:tc>
+                <a:tc>
+                  <a:txBody>
+                    <a:bodyPr wrap="square"/>
+                    <a:lstStyle/>
+                    <a:p>
+                      <a:pPr algn="ctr"/>
+                      <a:r>
+                        <a:rPr sz="1050" b="0">
+                          <a:solidFill>
+                            <a:srgbClr val="35424D"/>
+                          </a:solidFill>
+                          <a:latin typeface="Calibri"/>
+                        </a:rPr>
+                        <a:t>no gain</a:t>
+                      </a:r>
+                    </a:p>
+                  </a:txBody>
+                  <a:tcPr marL="54864" marR="54864" marT="18288" marB="18288" anchor="ctr">
+                    <a:solidFill>
+                      <a:srgbClr val="FFFFFF"/>
+                    </a:solidFill>
+                  </a:tcPr>
+                </a:tc>
+              </a:tr>
+              <a:tr h="274320">
+                <a:tc>
+                  <a:txBody>
+                    <a:bodyPr wrap="square"/>
+                    <a:lstStyle/>
+                    <a:p>
+                      <a:pPr algn="l"/>
+                      <a:r>
+                        <a:rPr sz="1050" b="0">
+                          <a:solidFill>
+                            <a:srgbClr val="35424D"/>
+                          </a:solidFill>
+                          <a:latin typeface="Calibri"/>
+                        </a:rPr>
+                        <a:t>+ coarse-level consensus</a:t>
+                      </a:r>
+                    </a:p>
+                  </a:txBody>
+                  <a:tcPr marL="54864" marR="54864" marT="18288" marB="18288" anchor="ctr">
+                    <a:solidFill>
+                      <a:srgbClr val="ECF1F4"/>
+                    </a:solidFill>
+                  </a:tcPr>
+                </a:tc>
+                <a:tc>
+                  <a:txBody>
+                    <a:bodyPr wrap="square"/>
+                    <a:lstStyle/>
+                    <a:p>
+                      <a:pPr algn="ctr"/>
+                      <a:r>
+                        <a:rPr sz="1050" b="0">
+                          <a:solidFill>
+                            <a:srgbClr val="35424D"/>
+                          </a:solidFill>
+                          <a:latin typeface="Calibri"/>
+                        </a:rPr>
+                        <a:t>62.5%</a:t>
+                      </a:r>
+                    </a:p>
+                  </a:txBody>
+                  <a:tcPr marL="54864" marR="54864" marT="18288" marB="18288" anchor="ctr">
+                    <a:solidFill>
+                      <a:srgbClr val="ECF1F4"/>
+                    </a:solidFill>
+                  </a:tcPr>
+                </a:tc>
+                <a:tc>
+                  <a:txBody>
+                    <a:bodyPr wrap="square"/>
+                    <a:lstStyle/>
+                    <a:p>
+                      <a:pPr algn="ctr"/>
+                      <a:r>
+                        <a:rPr sz="1050" b="0">
+                          <a:solidFill>
+                            <a:srgbClr val="35424D"/>
+                          </a:solidFill>
+                          <a:latin typeface="Calibri"/>
+                        </a:rPr>
+                        <a:t>73.3%</a:t>
                       </a:r>
                     </a:p>
                   </a:txBody>
@@ -7964,30 +8221,7 @@
                           </a:solidFill>
                           <a:latin typeface="Calibri"/>
                         </a:rPr>
-                        <a:t>50.0%</a:t>
-                      </a:r>
-                    </a:p>
-                  </a:txBody>
-                  <a:tcPr marL="54864" marR="54864" marT="18288" marB="18288" anchor="ctr">
-                    <a:solidFill>
-                      <a:srgbClr val="ECF1F4"/>
-                    </a:solidFill>
-                  </a:tcPr>
-                </a:tc>
-                <a:tc>
-                  <a:txBody>
-                    <a:bodyPr wrap="square"/>
-                    <a:lstStyle/>
-                    <a:p>
-                      <a:pPr algn="ctr"/>
-                      <a:r>
-                        <a:rPr sz="1050" b="0">
-                          <a:solidFill>
-                            <a:srgbClr val="35424D"/>
-                          </a:solidFill>
-                          <a:latin typeface="Calibri"/>
-                        </a:rPr>
-                        <a:t>no gain</a:t>
+                        <a:t>harmful</a:t>
                       </a:r>
                     </a:p>
                   </a:txBody>
@@ -8012,7 +8246,7 @@
                           </a:solidFill>
                           <a:latin typeface="Calibri"/>
                         </a:rPr>
-                        <a:t>+ coarse-level consensus</a:t>
+                        <a:t>+ row destriping</a:t>
                       </a:r>
                     </a:p>
                   </a:txBody>
@@ -8035,7 +8269,7 @@
                           </a:solidFill>
                           <a:latin typeface="Calibri"/>
                         </a:rPr>
-                        <a:t>62.5%</a:t>
+                        <a:t>35.0%</a:t>
                       </a:r>
                     </a:p>
                   </a:txBody>
@@ -8058,7 +8292,7 @@
                           </a:solidFill>
                           <a:latin typeface="Calibri"/>
                         </a:rPr>
-                        <a:t>73.3%</a:t>
+                        <a:t>90.0%</a:t>
                       </a:r>
                     </a:p>
                   </a:txBody>
@@ -8081,7 +8315,7 @@
                           </a:solidFill>
                           <a:latin typeface="Calibri"/>
                         </a:rPr>
-                        <a:t>36.7%</a:t>
+                        <a:t>90.0%</a:t>
                       </a:r>
                     </a:p>
                   </a:txBody>
@@ -8115,123 +8349,6 @@
                   </a:tcPr>
                 </a:tc>
               </a:tr>
-              <a:tr h="274320">
-                <a:tc>
-                  <a:txBody>
-                    <a:bodyPr wrap="square"/>
-                    <a:lstStyle/>
-                    <a:p>
-                      <a:pPr algn="l"/>
-                      <a:r>
-                        <a:rPr sz="1050" b="0">
-                          <a:solidFill>
-                            <a:srgbClr val="35424D"/>
-                          </a:solidFill>
-                          <a:latin typeface="Calibri"/>
-                        </a:rPr>
-                        <a:t>+ row destriping</a:t>
-                      </a:r>
-                    </a:p>
-                  </a:txBody>
-                  <a:tcPr marL="54864" marR="54864" marT="18288" marB="18288" anchor="ctr">
-                    <a:solidFill>
-                      <a:srgbClr val="ECF1F4"/>
-                    </a:solidFill>
-                  </a:tcPr>
-                </a:tc>
-                <a:tc>
-                  <a:txBody>
-                    <a:bodyPr wrap="square"/>
-                    <a:lstStyle/>
-                    <a:p>
-                      <a:pPr algn="ctr"/>
-                      <a:r>
-                        <a:rPr sz="1050" b="0">
-                          <a:solidFill>
-                            <a:srgbClr val="35424D"/>
-                          </a:solidFill>
-                          <a:latin typeface="Calibri"/>
-                        </a:rPr>
-                        <a:t>35.0%</a:t>
-                      </a:r>
-                    </a:p>
-                  </a:txBody>
-                  <a:tcPr marL="54864" marR="54864" marT="18288" marB="18288" anchor="ctr">
-                    <a:solidFill>
-                      <a:srgbClr val="ECF1F4"/>
-                    </a:solidFill>
-                  </a:tcPr>
-                </a:tc>
-                <a:tc>
-                  <a:txBody>
-                    <a:bodyPr wrap="square"/>
-                    <a:lstStyle/>
-                    <a:p>
-                      <a:pPr algn="ctr"/>
-                      <a:r>
-                        <a:rPr sz="1050" b="0">
-                          <a:solidFill>
-                            <a:srgbClr val="35424D"/>
-                          </a:solidFill>
-                          <a:latin typeface="Calibri"/>
-                        </a:rPr>
-                        <a:t>90.0%</a:t>
-                      </a:r>
-                    </a:p>
-                  </a:txBody>
-                  <a:tcPr marL="54864" marR="54864" marT="18288" marB="18288" anchor="ctr">
-                    <a:solidFill>
-                      <a:srgbClr val="ECF1F4"/>
-                    </a:solidFill>
-                  </a:tcPr>
-                </a:tc>
-                <a:tc>
-                  <a:txBody>
-                    <a:bodyPr wrap="square"/>
-                    <a:lstStyle/>
-                    <a:p>
-                      <a:pPr algn="ctr"/>
-                      <a:r>
-                        <a:rPr sz="1050" b="0">
-                          <a:solidFill>
-                            <a:srgbClr val="35424D"/>
-                          </a:solidFill>
-                          <a:latin typeface="Calibri"/>
-                        </a:rPr>
-                        <a:t>90.0%</a:t>
-                      </a:r>
-                    </a:p>
-                  </a:txBody>
-                  <a:tcPr marL="54864" marR="54864" marT="18288" marB="18288" anchor="ctr">
-                    <a:solidFill>
-                      <a:srgbClr val="ECF1F4"/>
-                    </a:solidFill>
-                  </a:tcPr>
-                </a:tc>
-                <a:tc>
-                  <a:txBody>
-                    <a:bodyPr wrap="square"/>
-                    <a:lstStyle/>
-                    <a:p>
-                      <a:pPr algn="ctr"/>
-                      <a:r>
-                        <a:rPr sz="1050" b="0">
-                          <a:solidFill>
-                            <a:srgbClr val="35424D"/>
-                          </a:solidFill>
-                          <a:latin typeface="Calibri"/>
-                        </a:rPr>
-                        <a:t>harmful</a:t>
-                      </a:r>
-                    </a:p>
-                  </a:txBody>
-                  <a:tcPr marL="54864" marR="54864" marT="18288" marB="18288" anchor="ctr">
-                    <a:solidFill>
-                      <a:srgbClr val="ECF1F4"/>
-                    </a:solidFill>
-                  </a:tcPr>
-                </a:tc>
-              </a:tr>
             </a:tbl>
           </a:graphicData>
         </a:graphic>
@@ -8244,7 +8361,7 @@
         </p:nvSpPr>
         <p:spPr>
           <a:xfrm>
-            <a:off x="548640" y="5239512"/>
+            <a:off x="548640" y="5513832"/>
             <a:ext cx="6949440" cy="256032"/>
           </a:xfrm>
           <a:prstGeom prst="rect">
@@ -8655,7 +8772,7 @@
         </p:nvSpPr>
         <p:spPr>
           <a:xfrm>
-            <a:off x="548640" y="5550408"/>
+            <a:off x="548640" y="5824728"/>
             <a:ext cx="6949440" cy="914400"/>
           </a:xfrm>
           <a:prstGeom prst="rect">
@@ -8895,7 +9012,7 @@
                 </a:solidFill>
                 <a:latin typeface="Calibri"/>
               </a:rPr>
-              <a:t>•  Euclidean error 561.54 px — a different site entirely</a:t>
+              <a:t>•  Euclidean error 148.57 px — a different site entirely</a:t>
             </a:r>
           </a:p>
           <a:p>
@@ -8911,7 +9028,7 @@
                 </a:solidFill>
                 <a:latin typeface="Calibri"/>
               </a:rPr>
-              <a:t>•  The true location WAS a candidate, at rank 17 — it was outscored</a:t>
+              <a:t>•  The true location never entered the candidate set at all — no ranking rule could have recovered it</a:t>
             </a:r>
           </a:p>
           <a:p>
@@ -8927,22 +9044,6 @@
                 </a:solidFill>
                 <a:latin typeface="Calibri"/>
               </a:rPr>
-              <a:t>•  It lost by 0.0037 of correlation — 0.42% of the winning score</a:t>
-            </a:r>
-          </a:p>
-          <a:p>
-            <a:pPr algn="l">
-              <a:spcAft>
-                <a:spcPts val="500"/>
-              </a:spcAft>
-            </a:pPr>
-            <a:r>
-              <a:rPr sz="1200" b="0" i="0">
-                <a:solidFill>
-                  <a:srgbClr val="7A3A24"/>
-                </a:solidFill>
-                <a:latin typeface="Calibri"/>
-              </a:rPr>
               <a:t>•  The pair sits in the 'med' ambiguity stratum — no landmark in view</a:t>
             </a:r>
           </a:p>
@@ -8978,7 +9079,7 @@
                 </a:solidFill>
                 <a:latin typeface="Calibri"/>
               </a:rPr>
-              <a:t>Root cause across all 11 failures: the screen, not the final ranking (4/11).</a:t>
+              <a:t>Root cause across all 8 failures: ranking, not candidate generation (5/8).</a:t>
             </a:r>
           </a:p>
         </p:txBody>
@@ -9280,7 +9381,7 @@
                           </a:solidFill>
                           <a:latin typeface="Calibri"/>
                         </a:rPr>
-                        <a:t>38</a:t>
+                        <a:t>40</a:t>
                       </a:r>
                     </a:p>
                   </a:txBody>
@@ -9326,7 +9427,7 @@
                           </a:solidFill>
                           <a:latin typeface="Calibri"/>
                         </a:rPr>
-                        <a:t>2</a:t>
+                        <a:t>0</a:t>
                       </a:r>
                     </a:p>
                   </a:txBody>
@@ -9397,7 +9498,7 @@
                           </a:solidFill>
                           <a:latin typeface="Calibri"/>
                         </a:rPr>
-                        <a:t>23</a:t>
+                        <a:t>24</a:t>
                       </a:r>
                     </a:p>
                   </a:txBody>
@@ -9443,7 +9544,7 @@
                           </a:solidFill>
                           <a:latin typeface="Calibri"/>
                         </a:rPr>
-                        <a:t>1</a:t>
+                        <a:t>0</a:t>
                       </a:r>
                     </a:p>
                   </a:txBody>
@@ -9560,7 +9661,7 @@
                           </a:solidFill>
                           <a:latin typeface="Calibri"/>
                         </a:rPr>
-                        <a:t>1</a:t>
+                        <a:t>0</a:t>
                       </a:r>
                     </a:p>
                   </a:txBody>
@@ -9583,7 +9684,7 @@
                           </a:solidFill>
                           <a:latin typeface="Calibri"/>
                         </a:rPr>
-                        <a:t>0</a:t>
+                        <a:t>1</a:t>
                       </a:r>
                     </a:p>
                   </a:txBody>
@@ -9899,7 +10000,7 @@
                 </a:solidFill>
                 <a:latin typeface="Calibri"/>
               </a:rPr>
-              <a:t>About 389 ms per pair against a 300 ms goal. The per-candidate refit is most of it; top_k is the dial. We took 9 points of mis-lock for the time.</a:t>
+              <a:t>About 700 ms per pair against a 300 ms goal. The per-candidate refit is most of it; top_k is the dial. We took 9 points of mis-lock for the time.</a:t>
             </a:r>
           </a:p>
         </p:txBody>
@@ -10159,7 +10260,7 @@
                 </a:solidFill>
                 <a:latin typeface="Cambria"/>
               </a:rPr>
-              <a:t>76.7% → 23.3%</a:t>
+              <a:t>76.7% → 20.0%</a:t>
             </a:r>
           </a:p>
         </p:txBody>
@@ -10391,7 +10492,7 @@
                 </a:solidFill>
                 <a:latin typeface="Cambria"/>
               </a:rPr>
-              <a:t>17.5% → 87.5%</a:t>
+              <a:t>17.5% → 92.5%</a:t>
             </a:r>
           </a:p>
         </p:txBody>
@@ -18250,7 +18351,7 @@
                           </a:solidFill>
                           <a:latin typeface="Calibri"/>
                         </a:rPr>
-                        <a:t>20.0%</a:t>
+                        <a:t>16.7%</a:t>
                       </a:r>
                     </a:p>
                   </a:txBody>
@@ -18463,7 +18564,7 @@
                           </a:solidFill>
                           <a:latin typeface="Calibri"/>
                         </a:rPr>
-                        <a:t>30.0%</a:t>
+                        <a:t>33.3%</a:t>
                       </a:r>
                     </a:p>
                   </a:txBody>
@@ -19116,7 +19217,7 @@
                           </a:solidFill>
                           <a:latin typeface="Calibri"/>
                         </a:rPr>
-                        <a:t>5.0%</a:t>
+                        <a:t>0.0%</a:t>
                       </a:r>
                     </a:p>
                   </a:txBody>
@@ -19139,7 +19240,7 @@
                           </a:solidFill>
                           <a:latin typeface="Calibri"/>
                         </a:rPr>
-                        <a:t>0.195</a:t>
+                        <a:t>0.179</a:t>
                       </a:r>
                     </a:p>
                   </a:txBody>
@@ -19162,7 +19263,7 @@
                           </a:solidFill>
                           <a:latin typeface="Calibri"/>
                         </a:rPr>
-                        <a:t>95.0%</a:t>
+                        <a:t>100.0%</a:t>
                       </a:r>
                     </a:p>
                   </a:txBody>
@@ -19185,7 +19286,30 @@
                           </a:solidFill>
                           <a:latin typeface="Calibri"/>
                         </a:rPr>
-                        <a:t>95.0%</a:t>
+                        <a:t>100.0%</a:t>
+                      </a:r>
+                    </a:p>
+                  </a:txBody>
+                  <a:tcPr marL="54864" marR="54864" marT="18288" marB="18288" anchor="ctr">
+                    <a:solidFill>
+                      <a:srgbClr val="ECF1F4"/>
+                    </a:solidFill>
+                  </a:tcPr>
+                </a:tc>
+                <a:tc>
+                  <a:txBody>
+                    <a:bodyPr wrap="square"/>
+                    <a:lstStyle/>
+                    <a:p>
+                      <a:pPr algn="ctr"/>
+                      <a:r>
+                        <a:rPr sz="1100" b="0">
+                          <a:solidFill>
+                            <a:srgbClr val="35424D"/>
+                          </a:solidFill>
+                          <a:latin typeface="Calibri"/>
+                        </a:rPr>
+                        <a:t>97.5%</a:t>
                       </a:r>
                     </a:p>
                   </a:txBody>
@@ -19231,30 +19355,7 @@
                           </a:solidFill>
                           <a:latin typeface="Calibri"/>
                         </a:rPr>
-                        <a:t>87.5%</a:t>
-                      </a:r>
-                    </a:p>
-                  </a:txBody>
-                  <a:tcPr marL="54864" marR="54864" marT="18288" marB="18288" anchor="ctr">
-                    <a:solidFill>
-                      <a:srgbClr val="ECF1F4"/>
-                    </a:solidFill>
-                  </a:tcPr>
-                </a:tc>
-                <a:tc>
-                  <a:txBody>
-                    <a:bodyPr wrap="square"/>
-                    <a:lstStyle/>
-                    <a:p>
-                      <a:pPr algn="ctr"/>
-                      <a:r>
-                        <a:rPr sz="1100" b="0">
-                          <a:solidFill>
-                            <a:srgbClr val="35424D"/>
-                          </a:solidFill>
-                          <a:latin typeface="Calibri"/>
-                        </a:rPr>
-                        <a:t>382 ms</a:t>
+                        <a:t>705 ms</a:t>
                       </a:r>
                     </a:p>
                   </a:txBody>
@@ -19534,7 +19635,7 @@
                           </a:solidFill>
                           <a:latin typeface="Calibri"/>
                         </a:rPr>
-                        <a:t>23.3%</a:t>
+                        <a:t>20.0%</a:t>
                       </a:r>
                     </a:p>
                   </a:txBody>
@@ -19557,7 +19658,30 @@
                           </a:solidFill>
                           <a:latin typeface="Calibri"/>
                         </a:rPr>
-                        <a:t>0.357</a:t>
+                        <a:t>0.330</a:t>
+                      </a:r>
+                    </a:p>
+                  </a:txBody>
+                  <a:tcPr marL="54864" marR="54864" marT="18288" marB="18288" anchor="ctr">
+                    <a:solidFill>
+                      <a:srgbClr val="ECF1F4"/>
+                    </a:solidFill>
+                  </a:tcPr>
+                </a:tc>
+                <a:tc>
+                  <a:txBody>
+                    <a:bodyPr wrap="square"/>
+                    <a:lstStyle/>
+                    <a:p>
+                      <a:pPr algn="ctr"/>
+                      <a:r>
+                        <a:rPr sz="1100" b="0">
+                          <a:solidFill>
+                            <a:srgbClr val="35424D"/>
+                          </a:solidFill>
+                          <a:latin typeface="Calibri"/>
+                        </a:rPr>
+                        <a:t>80.0%</a:t>
                       </a:r>
                     </a:p>
                   </a:txBody>
@@ -19603,7 +19727,7 @@
                           </a:solidFill>
                           <a:latin typeface="Calibri"/>
                         </a:rPr>
-                        <a:t>73.3%</a:t>
+                        <a:t>76.7%</a:t>
                       </a:r>
                     </a:p>
                   </a:txBody>
@@ -19626,7 +19750,7 @@
                           </a:solidFill>
                           <a:latin typeface="Calibri"/>
                         </a:rPr>
-                        <a:t>73.3%</a:t>
+                        <a:t>63.3%</a:t>
                       </a:r>
                     </a:p>
                   </a:txBody>
@@ -19649,30 +19773,7 @@
                           </a:solidFill>
                           <a:latin typeface="Calibri"/>
                         </a:rPr>
-                        <a:t>60.0%</a:t>
-                      </a:r>
-                    </a:p>
-                  </a:txBody>
-                  <a:tcPr marL="54864" marR="54864" marT="18288" marB="18288" anchor="ctr">
-                    <a:solidFill>
-                      <a:srgbClr val="ECF1F4"/>
-                    </a:solidFill>
-                  </a:tcPr>
-                </a:tc>
-                <a:tc>
-                  <a:txBody>
-                    <a:bodyPr wrap="square"/>
-                    <a:lstStyle/>
-                    <a:p>
-                      <a:pPr algn="ctr"/>
-                      <a:r>
-                        <a:rPr sz="1100" b="0">
-                          <a:solidFill>
-                            <a:srgbClr val="35424D"/>
-                          </a:solidFill>
-                          <a:latin typeface="Calibri"/>
-                        </a:rPr>
-                        <a:t>389 ms</a:t>
+                        <a:t>700 ms</a:t>
                       </a:r>
                     </a:p>
                   </a:txBody>
@@ -20090,7 +20191,7 @@
                           </a:solidFill>
                           <a:latin typeface="Calibri"/>
                         </a:rPr>
-                        <a:t>410 ms</a:t>
+                        <a:t>723 ms</a:t>
                       </a:r>
                     </a:p>
                   </a:txBody>
@@ -20170,8 +20271,8 @@
                 </a:solidFill>
                 <a:latin typeface="Calibri"/>
               </a:rPr>
-              <a:t>On the sponsor's fixed 10:1 data the task is precision: median error improves from 1.102 px to 0.195 px and the sub-pixel pass rate rises from 17.5% to 87.5%.
-On our own data — the 9:1–11:1 and ±2° envelope the problem statement says will be tested — the baseline does not work at all (76.7% mis-lock against 23.3%). That axis is invisible to anyone validating only on the published generator, because it produces neither rotation nor scale variation.</a:t>
+              <a:t>On the sponsor's fixed 10:1 data the task is precision: median error improves from 1.102 px to 0.179 px and the sub-pixel pass rate rises from 17.5% to 92.5%.
+On our own data — the 9:1–11:1 and ±2° envelope the problem statement says will be tested — the baseline does not work at all (76.7% mis-lock against 20.0%). That axis is invisible to anyone validating only on the published generator, because it produces neither rotation nor scale variation.</a:t>
             </a:r>
           </a:p>
         </p:txBody>
@@ -20197,6 +20298,41 @@
       <p:sp>
         <p:nvSpPr>
           <p:cNvPr id="8" name="TextBox 7"/>
+          <p:cNvSpPr txBox="1"/>
+          <p:nvPr/>
+        </p:nvSpPr>
+        <p:spPr>
+          <a:xfrm>
+            <a:off x="548640" y="6126480"/>
+            <a:ext cx="11064240" cy="274320"/>
+          </a:xfrm>
+          <a:prstGeom prst="rect">
+            <a:avLst/>
+          </a:prstGeom>
+          <a:noFill/>
+        </p:spPr>
+        <p:txBody>
+          <a:bodyPr wrap="square" lIns="0" rIns="0" tIns="0" bIns="0" anchor="t">
+            <a:spAutoFit/>
+          </a:bodyPr>
+          <a:lstStyle/>
+          <a:p>
+            <a:pPr algn="l"/>
+            <a:r>
+              <a:rPr sz="950" b="1" i="0">
+                <a:solidFill>
+                  <a:srgbClr val="C4462F"/>
+                </a:solidFill>
+                <a:latin typeface="Calibri"/>
+              </a:rPr>
+              <a:t>Runtime p50 was measured on a throttled machine — the benchmark's baseline control read far above its quiet value — so those milliseconds are not representative. Accuracy is unaffected; re-run scripts/benchmark_runtime.py on a rested machine.</a:t>
+            </a:r>
+          </a:p>
+        </p:txBody>
+      </p:sp>
+      <p:sp>
+        <p:nvSpPr>
+          <p:cNvPr id="9" name="TextBox 8"/>
           <p:cNvSpPr txBox="1"/>
           <p:nvPr/>
         </p:nvSpPr>

--- a/solution_presentation.pptx
+++ b/solution_presentation.pptx
@@ -248,10 +248,10 @@
                   <c:v>0.0</c:v>
                 </c:pt>
                 <c:pt idx="1">
-                  <c:v>20.0</c:v>
+                  <c:v>16.666700000000002</c:v>
                 </c:pt>
                 <c:pt idx="2">
-                  <c:v>6.66667</c:v>
+                  <c:v>3.33333</c:v>
                 </c:pt>
               </c:numCache>
             </c:numRef>
@@ -4096,7 +4096,7 @@
                 </a:solidFill>
                 <a:latin typeface="Cambria"/>
               </a:rPr>
-              <a:t>20.0%</a:t>
+              <a:t>16.7%</a:t>
             </a:r>
           </a:p>
         </p:txBody>
@@ -4166,7 +4166,7 @@
                 </a:solidFill>
                 <a:latin typeface="Cambria"/>
               </a:rPr>
-              <a:t>0.216 px</a:t>
+              <a:t>0.188 px</a:t>
             </a:r>
           </a:p>
         </p:txBody>
@@ -4236,7 +4236,7 @@
                 </a:solidFill>
                 <a:latin typeface="Cambria"/>
               </a:rPr>
-              <a:t>63.3%</a:t>
+              <a:t>66.7%</a:t>
             </a:r>
           </a:p>
         </p:txBody>
@@ -6696,7 +6696,7 @@
         </p:nvGraphicFramePr>
         <p:xfrm>
           <a:off x="548640" y="1572768"/>
-          <a:ext cx="6949440" cy="3840480"/>
+          <a:ext cx="6949440" cy="4114800"/>
         </p:xfrm>
         <a:graphic>
           <a:graphicData uri="http://schemas.openxmlformats.org/drawingml/2006/table">
@@ -7379,7 +7379,7 @@
                           </a:solidFill>
                           <a:latin typeface="Calibri"/>
                         </a:rPr>
-                        <a:t>10.0%</a:t>
+                        <a:t>6.7%</a:t>
                       </a:r>
                     </a:p>
                   </a:txBody>
@@ -7496,7 +7496,7 @@
                           </a:solidFill>
                           <a:latin typeface="Calibri"/>
                         </a:rPr>
-                        <a:t>6.7%</a:t>
+                        <a:t>3.3%</a:t>
                       </a:r>
                     </a:p>
                   </a:txBody>
@@ -7661,7 +7661,7 @@
                           </a:solidFill>
                           <a:latin typeface="Calibri"/>
                         </a:rPr>
-                        <a:t>+ spec's centre rule</a:t>
+                        <a:t>+ residual proposals   ← shipped</a:t>
                       </a:r>
                     </a:p>
                   </a:txBody>
@@ -7684,30 +7684,7 @@
                           </a:solidFill>
                           <a:latin typeface="Calibri"/>
                         </a:rPr>
-                        <a:t>32.5%</a:t>
-                      </a:r>
-                    </a:p>
-                  </a:txBody>
-                  <a:tcPr marL="54864" marR="54864" marT="18288" marB="18288" anchor="ctr">
-                    <a:solidFill>
-                      <a:srgbClr val="ECF1F4"/>
-                    </a:solidFill>
-                  </a:tcPr>
-                </a:tc>
-                <a:tc>
-                  <a:txBody>
-                    <a:bodyPr wrap="square"/>
-                    <a:lstStyle/>
-                    <a:p>
-                      <a:pPr algn="ctr"/>
-                      <a:r>
-                        <a:rPr sz="1050" b="0">
-                          <a:solidFill>
-                            <a:srgbClr val="35424D"/>
-                          </a:solidFill>
-                          <a:latin typeface="Calibri"/>
-                        </a:rPr>
-                        <a:t>20.0%</a:t>
+                        <a:t>0.0%</a:t>
                       </a:r>
                     </a:p>
                   </a:txBody>
@@ -7753,7 +7730,30 @@
                           </a:solidFill>
                           <a:latin typeface="Calibri"/>
                         </a:rPr>
-                        <a:t>prior absent</a:t>
+                        <a:t>3.3%</a:t>
+                      </a:r>
+                    </a:p>
+                  </a:txBody>
+                  <a:tcPr marL="54864" marR="54864" marT="18288" marB="18288" anchor="ctr">
+                    <a:solidFill>
+                      <a:srgbClr val="ECF1F4"/>
+                    </a:solidFill>
+                  </a:tcPr>
+                </a:tc>
+                <a:tc>
+                  <a:txBody>
+                    <a:bodyPr wrap="square"/>
+                    <a:lstStyle/>
+                    <a:p>
+                      <a:pPr algn="ctr"/>
+                      <a:r>
+                        <a:rPr sz="1050" b="0">
+                          <a:solidFill>
+                            <a:srgbClr val="35424D"/>
+                          </a:solidFill>
+                          <a:latin typeface="Calibri"/>
+                        </a:rPr>
+                        <a:t>solves coverage</a:t>
                       </a:r>
                     </a:p>
                   </a:txBody>
@@ -7778,7 +7778,7 @@
                           </a:solidFill>
                           <a:latin typeface="Calibri"/>
                         </a:rPr>
-                        <a:t>+ pose: spectral lattice</a:t>
+                        <a:t>+ spec's centre rule</a:t>
                       </a:r>
                     </a:p>
                   </a:txBody>
@@ -7801,7 +7801,7 @@
                           </a:solidFill>
                           <a:latin typeface="Calibri"/>
                         </a:rPr>
-                        <a:t>22.5%</a:t>
+                        <a:t>32.5%</a:t>
                       </a:r>
                     </a:p>
                   </a:txBody>
@@ -7824,7 +7824,7 @@
                           </a:solidFill>
                           <a:latin typeface="Calibri"/>
                         </a:rPr>
-                        <a:t>46.7%</a:t>
+                        <a:t>20.0%</a:t>
                       </a:r>
                     </a:p>
                   </a:txBody>
@@ -7847,7 +7847,7 @@
                           </a:solidFill>
                           <a:latin typeface="Calibri"/>
                         </a:rPr>
-                        <a:t>60.0%</a:t>
+                        <a:t>16.7%</a:t>
                       </a:r>
                     </a:p>
                   </a:txBody>
@@ -7870,7 +7870,7 @@
                           </a:solidFill>
                           <a:latin typeface="Calibri"/>
                         </a:rPr>
-                        <a:t>less accurate</a:t>
+                        <a:t>prior absent</a:t>
                       </a:r>
                     </a:p>
                   </a:txBody>
@@ -7895,7 +7895,7 @@
                           </a:solidFill>
                           <a:latin typeface="Calibri"/>
                         </a:rPr>
-                        <a:t>+ PADM residual re-ranking</a:t>
+                        <a:t>+ pose: spectral lattice</a:t>
                       </a:r>
                     </a:p>
                   </a:txBody>
@@ -7918,7 +7918,7 @@
                           </a:solidFill>
                           <a:latin typeface="Calibri"/>
                         </a:rPr>
-                        <a:t>27.5%</a:t>
+                        <a:t>22.5%</a:t>
                       </a:r>
                     </a:p>
                   </a:txBody>
@@ -7941,7 +7941,7 @@
                           </a:solidFill>
                           <a:latin typeface="Calibri"/>
                         </a:rPr>
-                        <a:t>70.0%</a:t>
+                        <a:t>46.7%</a:t>
                       </a:r>
                     </a:p>
                   </a:txBody>
@@ -7964,7 +7964,7 @@
                           </a:solidFill>
                           <a:latin typeface="Calibri"/>
                         </a:rPr>
-                        <a:t>73.3%</a:t>
+                        <a:t>60.0%</a:t>
                       </a:r>
                     </a:p>
                   </a:txBody>
@@ -7987,7 +7987,7 @@
                           </a:solidFill>
                           <a:latin typeface="Calibri"/>
                         </a:rPr>
-                        <a:t>overfit</a:t>
+                        <a:t>less accurate</a:t>
                       </a:r>
                     </a:p>
                   </a:txBody>
@@ -8012,7 +8012,7 @@
                           </a:solidFill>
                           <a:latin typeface="Calibri"/>
                         </a:rPr>
-                        <a:t>+ max-likelihood re-ranking</a:t>
+                        <a:t>+ PADM residual re-ranking</a:t>
                       </a:r>
                     </a:p>
                   </a:txBody>
@@ -8035,7 +8035,264 @@
                           </a:solidFill>
                           <a:latin typeface="Calibri"/>
                         </a:rPr>
+                        <a:t>27.5%</a:t>
+                      </a:r>
+                    </a:p>
+                  </a:txBody>
+                  <a:tcPr marL="54864" marR="54864" marT="18288" marB="18288" anchor="ctr">
+                    <a:solidFill>
+                      <a:srgbClr val="FFFFFF"/>
+                    </a:solidFill>
+                  </a:tcPr>
+                </a:tc>
+                <a:tc>
+                  <a:txBody>
+                    <a:bodyPr wrap="square"/>
+                    <a:lstStyle/>
+                    <a:p>
+                      <a:pPr algn="ctr"/>
+                      <a:r>
+                        <a:rPr sz="1050" b="0">
+                          <a:solidFill>
+                            <a:srgbClr val="35424D"/>
+                          </a:solidFill>
+                          <a:latin typeface="Calibri"/>
+                        </a:rPr>
+                        <a:t>70.0%</a:t>
+                      </a:r>
+                    </a:p>
+                  </a:txBody>
+                  <a:tcPr marL="54864" marR="54864" marT="18288" marB="18288" anchor="ctr">
+                    <a:solidFill>
+                      <a:srgbClr val="FFFFFF"/>
+                    </a:solidFill>
+                  </a:tcPr>
+                </a:tc>
+                <a:tc>
+                  <a:txBody>
+                    <a:bodyPr wrap="square"/>
+                    <a:lstStyle/>
+                    <a:p>
+                      <a:pPr algn="ctr"/>
+                      <a:r>
+                        <a:rPr sz="1050" b="0">
+                          <a:solidFill>
+                            <a:srgbClr val="35424D"/>
+                          </a:solidFill>
+                          <a:latin typeface="Calibri"/>
+                        </a:rPr>
+                        <a:t>73.3%</a:t>
+                      </a:r>
+                    </a:p>
+                  </a:txBody>
+                  <a:tcPr marL="54864" marR="54864" marT="18288" marB="18288" anchor="ctr">
+                    <a:solidFill>
+                      <a:srgbClr val="FFFFFF"/>
+                    </a:solidFill>
+                  </a:tcPr>
+                </a:tc>
+                <a:tc>
+                  <a:txBody>
+                    <a:bodyPr wrap="square"/>
+                    <a:lstStyle/>
+                    <a:p>
+                      <a:pPr algn="ctr"/>
+                      <a:r>
+                        <a:rPr sz="1050" b="0">
+                          <a:solidFill>
+                            <a:srgbClr val="35424D"/>
+                          </a:solidFill>
+                          <a:latin typeface="Calibri"/>
+                        </a:rPr>
+                        <a:t>overfit</a:t>
+                      </a:r>
+                    </a:p>
+                  </a:txBody>
+                  <a:tcPr marL="54864" marR="54864" marT="18288" marB="18288" anchor="ctr">
+                    <a:solidFill>
+                      <a:srgbClr val="FFFFFF"/>
+                    </a:solidFill>
+                  </a:tcPr>
+                </a:tc>
+              </a:tr>
+              <a:tr h="274320">
+                <a:tc>
+                  <a:txBody>
+                    <a:bodyPr wrap="square"/>
+                    <a:lstStyle/>
+                    <a:p>
+                      <a:pPr algn="l"/>
+                      <a:r>
+                        <a:rPr sz="1050" b="0">
+                          <a:solidFill>
+                            <a:srgbClr val="35424D"/>
+                          </a:solidFill>
+                          <a:latin typeface="Calibri"/>
+                        </a:rPr>
+                        <a:t>+ max-likelihood re-ranking</a:t>
+                      </a:r>
+                    </a:p>
+                  </a:txBody>
+                  <a:tcPr marL="54864" marR="54864" marT="18288" marB="18288" anchor="ctr">
+                    <a:solidFill>
+                      <a:srgbClr val="ECF1F4"/>
+                    </a:solidFill>
+                  </a:tcPr>
+                </a:tc>
+                <a:tc>
+                  <a:txBody>
+                    <a:bodyPr wrap="square"/>
+                    <a:lstStyle/>
+                    <a:p>
+                      <a:pPr algn="ctr"/>
+                      <a:r>
+                        <a:rPr sz="1050" b="0">
+                          <a:solidFill>
+                            <a:srgbClr val="35424D"/>
+                          </a:solidFill>
+                          <a:latin typeface="Calibri"/>
+                        </a:rPr>
                         <a:t>22.5%</a:t>
+                      </a:r>
+                    </a:p>
+                  </a:txBody>
+                  <a:tcPr marL="54864" marR="54864" marT="18288" marB="18288" anchor="ctr">
+                    <a:solidFill>
+                      <a:srgbClr val="ECF1F4"/>
+                    </a:solidFill>
+                  </a:tcPr>
+                </a:tc>
+                <a:tc>
+                  <a:txBody>
+                    <a:bodyPr wrap="square"/>
+                    <a:lstStyle/>
+                    <a:p>
+                      <a:pPr algn="ctr"/>
+                      <a:r>
+                        <a:rPr sz="1050" b="0">
+                          <a:solidFill>
+                            <a:srgbClr val="35424D"/>
+                          </a:solidFill>
+                          <a:latin typeface="Calibri"/>
+                        </a:rPr>
+                        <a:t>36.7%</a:t>
+                      </a:r>
+                    </a:p>
+                  </a:txBody>
+                  <a:tcPr marL="54864" marR="54864" marT="18288" marB="18288" anchor="ctr">
+                    <a:solidFill>
+                      <a:srgbClr val="ECF1F4"/>
+                    </a:solidFill>
+                  </a:tcPr>
+                </a:tc>
+                <a:tc>
+                  <a:txBody>
+                    <a:bodyPr wrap="square"/>
+                    <a:lstStyle/>
+                    <a:p>
+                      <a:pPr algn="ctr"/>
+                      <a:r>
+                        <a:rPr sz="1050" b="0">
+                          <a:solidFill>
+                            <a:srgbClr val="35424D"/>
+                          </a:solidFill>
+                          <a:latin typeface="Calibri"/>
+                        </a:rPr>
+                        <a:t>50.0%</a:t>
+                      </a:r>
+                    </a:p>
+                  </a:txBody>
+                  <a:tcPr marL="54864" marR="54864" marT="18288" marB="18288" anchor="ctr">
+                    <a:solidFill>
+                      <a:srgbClr val="ECF1F4"/>
+                    </a:solidFill>
+                  </a:tcPr>
+                </a:tc>
+                <a:tc>
+                  <a:txBody>
+                    <a:bodyPr wrap="square"/>
+                    <a:lstStyle/>
+                    <a:p>
+                      <a:pPr algn="ctr"/>
+                      <a:r>
+                        <a:rPr sz="1050" b="0">
+                          <a:solidFill>
+                            <a:srgbClr val="35424D"/>
+                          </a:solidFill>
+                          <a:latin typeface="Calibri"/>
+                        </a:rPr>
+                        <a:t>no gain</a:t>
+                      </a:r>
+                    </a:p>
+                  </a:txBody>
+                  <a:tcPr marL="54864" marR="54864" marT="18288" marB="18288" anchor="ctr">
+                    <a:solidFill>
+                      <a:srgbClr val="ECF1F4"/>
+                    </a:solidFill>
+                  </a:tcPr>
+                </a:tc>
+              </a:tr>
+              <a:tr h="274320">
+                <a:tc>
+                  <a:txBody>
+                    <a:bodyPr wrap="square"/>
+                    <a:lstStyle/>
+                    <a:p>
+                      <a:pPr algn="l"/>
+                      <a:r>
+                        <a:rPr sz="1050" b="0">
+                          <a:solidFill>
+                            <a:srgbClr val="35424D"/>
+                          </a:solidFill>
+                          <a:latin typeface="Calibri"/>
+                        </a:rPr>
+                        <a:t>+ coarse-level consensus</a:t>
+                      </a:r>
+                    </a:p>
+                  </a:txBody>
+                  <a:tcPr marL="54864" marR="54864" marT="18288" marB="18288" anchor="ctr">
+                    <a:solidFill>
+                      <a:srgbClr val="FFFFFF"/>
+                    </a:solidFill>
+                  </a:tcPr>
+                </a:tc>
+                <a:tc>
+                  <a:txBody>
+                    <a:bodyPr wrap="square"/>
+                    <a:lstStyle/>
+                    <a:p>
+                      <a:pPr algn="ctr"/>
+                      <a:r>
+                        <a:rPr sz="1050" b="0">
+                          <a:solidFill>
+                            <a:srgbClr val="35424D"/>
+                          </a:solidFill>
+                          <a:latin typeface="Calibri"/>
+                        </a:rPr>
+                        <a:t>62.5%</a:t>
+                      </a:r>
+                    </a:p>
+                  </a:txBody>
+                  <a:tcPr marL="54864" marR="54864" marT="18288" marB="18288" anchor="ctr">
+                    <a:solidFill>
+                      <a:srgbClr val="FFFFFF"/>
+                    </a:solidFill>
+                  </a:tcPr>
+                </a:tc>
+                <a:tc>
+                  <a:txBody>
+                    <a:bodyPr wrap="square"/>
+                    <a:lstStyle/>
+                    <a:p>
+                      <a:pPr algn="ctr"/>
+                      <a:r>
+                        <a:rPr sz="1050" b="0">
+                          <a:solidFill>
+                            <a:srgbClr val="35424D"/>
+                          </a:solidFill>
+                          <a:latin typeface="Calibri"/>
+                        </a:rPr>
+                        <a:t>73.3%</a:t>
                       </a:r>
                     </a:p>
                   </a:txBody>
@@ -8081,30 +8338,7 @@
                           </a:solidFill>
                           <a:latin typeface="Calibri"/>
                         </a:rPr>
-                        <a:t>50.0%</a:t>
-                      </a:r>
-                    </a:p>
-                  </a:txBody>
-                  <a:tcPr marL="54864" marR="54864" marT="18288" marB="18288" anchor="ctr">
-                    <a:solidFill>
-                      <a:srgbClr val="FFFFFF"/>
-                    </a:solidFill>
-                  </a:tcPr>
-                </a:tc>
-                <a:tc>
-                  <a:txBody>
-                    <a:bodyPr wrap="square"/>
-                    <a:lstStyle/>
-                    <a:p>
-                      <a:pPr algn="ctr"/>
-                      <a:r>
-                        <a:rPr sz="1050" b="0">
-                          <a:solidFill>
-                            <a:srgbClr val="35424D"/>
-                          </a:solidFill>
-                          <a:latin typeface="Calibri"/>
-                        </a:rPr>
-                        <a:t>no gain</a:t>
+                        <a:t>harmful</a:t>
                       </a:r>
                     </a:p>
                   </a:txBody>
@@ -8129,7 +8363,7 @@
                           </a:solidFill>
                           <a:latin typeface="Calibri"/>
                         </a:rPr>
-                        <a:t>+ coarse-level consensus</a:t>
+                        <a:t>+ row destriping</a:t>
                       </a:r>
                     </a:p>
                   </a:txBody>
@@ -8152,7 +8386,7 @@
                           </a:solidFill>
                           <a:latin typeface="Calibri"/>
                         </a:rPr>
-                        <a:t>62.5%</a:t>
+                        <a:t>35.0%</a:t>
                       </a:r>
                     </a:p>
                   </a:txBody>
@@ -8175,7 +8409,7 @@
                           </a:solidFill>
                           <a:latin typeface="Calibri"/>
                         </a:rPr>
-                        <a:t>73.3%</a:t>
+                        <a:t>90.0%</a:t>
                       </a:r>
                     </a:p>
                   </a:txBody>
@@ -8198,7 +8432,7 @@
                           </a:solidFill>
                           <a:latin typeface="Calibri"/>
                         </a:rPr>
-                        <a:t>36.7%</a:t>
+                        <a:t>90.0%</a:t>
                       </a:r>
                     </a:p>
                   </a:txBody>
@@ -8232,123 +8466,6 @@
                   </a:tcPr>
                 </a:tc>
               </a:tr>
-              <a:tr h="274320">
-                <a:tc>
-                  <a:txBody>
-                    <a:bodyPr wrap="square"/>
-                    <a:lstStyle/>
-                    <a:p>
-                      <a:pPr algn="l"/>
-                      <a:r>
-                        <a:rPr sz="1050" b="0">
-                          <a:solidFill>
-                            <a:srgbClr val="35424D"/>
-                          </a:solidFill>
-                          <a:latin typeface="Calibri"/>
-                        </a:rPr>
-                        <a:t>+ row destriping</a:t>
-                      </a:r>
-                    </a:p>
-                  </a:txBody>
-                  <a:tcPr marL="54864" marR="54864" marT="18288" marB="18288" anchor="ctr">
-                    <a:solidFill>
-                      <a:srgbClr val="FFFFFF"/>
-                    </a:solidFill>
-                  </a:tcPr>
-                </a:tc>
-                <a:tc>
-                  <a:txBody>
-                    <a:bodyPr wrap="square"/>
-                    <a:lstStyle/>
-                    <a:p>
-                      <a:pPr algn="ctr"/>
-                      <a:r>
-                        <a:rPr sz="1050" b="0">
-                          <a:solidFill>
-                            <a:srgbClr val="35424D"/>
-                          </a:solidFill>
-                          <a:latin typeface="Calibri"/>
-                        </a:rPr>
-                        <a:t>35.0%</a:t>
-                      </a:r>
-                    </a:p>
-                  </a:txBody>
-                  <a:tcPr marL="54864" marR="54864" marT="18288" marB="18288" anchor="ctr">
-                    <a:solidFill>
-                      <a:srgbClr val="FFFFFF"/>
-                    </a:solidFill>
-                  </a:tcPr>
-                </a:tc>
-                <a:tc>
-                  <a:txBody>
-                    <a:bodyPr wrap="square"/>
-                    <a:lstStyle/>
-                    <a:p>
-                      <a:pPr algn="ctr"/>
-                      <a:r>
-                        <a:rPr sz="1050" b="0">
-                          <a:solidFill>
-                            <a:srgbClr val="35424D"/>
-                          </a:solidFill>
-                          <a:latin typeface="Calibri"/>
-                        </a:rPr>
-                        <a:t>90.0%</a:t>
-                      </a:r>
-                    </a:p>
-                  </a:txBody>
-                  <a:tcPr marL="54864" marR="54864" marT="18288" marB="18288" anchor="ctr">
-                    <a:solidFill>
-                      <a:srgbClr val="FFFFFF"/>
-                    </a:solidFill>
-                  </a:tcPr>
-                </a:tc>
-                <a:tc>
-                  <a:txBody>
-                    <a:bodyPr wrap="square"/>
-                    <a:lstStyle/>
-                    <a:p>
-                      <a:pPr algn="ctr"/>
-                      <a:r>
-                        <a:rPr sz="1050" b="0">
-                          <a:solidFill>
-                            <a:srgbClr val="35424D"/>
-                          </a:solidFill>
-                          <a:latin typeface="Calibri"/>
-                        </a:rPr>
-                        <a:t>90.0%</a:t>
-                      </a:r>
-                    </a:p>
-                  </a:txBody>
-                  <a:tcPr marL="54864" marR="54864" marT="18288" marB="18288" anchor="ctr">
-                    <a:solidFill>
-                      <a:srgbClr val="FFFFFF"/>
-                    </a:solidFill>
-                  </a:tcPr>
-                </a:tc>
-                <a:tc>
-                  <a:txBody>
-                    <a:bodyPr wrap="square"/>
-                    <a:lstStyle/>
-                    <a:p>
-                      <a:pPr algn="ctr"/>
-                      <a:r>
-                        <a:rPr sz="1050" b="0">
-                          <a:solidFill>
-                            <a:srgbClr val="35424D"/>
-                          </a:solidFill>
-                          <a:latin typeface="Calibri"/>
-                        </a:rPr>
-                        <a:t>harmful</a:t>
-                      </a:r>
-                    </a:p>
-                  </a:txBody>
-                  <a:tcPr marL="54864" marR="54864" marT="18288" marB="18288" anchor="ctr">
-                    <a:solidFill>
-                      <a:srgbClr val="FFFFFF"/>
-                    </a:solidFill>
-                  </a:tcPr>
-                </a:tc>
-              </a:tr>
             </a:tbl>
           </a:graphicData>
         </a:graphic>
@@ -8361,7 +8478,7 @@
         </p:nvSpPr>
         <p:spPr>
           <a:xfrm>
-            <a:off x="548640" y="5513832"/>
+            <a:off x="548640" y="5788152"/>
             <a:ext cx="6949440" cy="256032"/>
           </a:xfrm>
           <a:prstGeom prst="rect">
@@ -8772,7 +8889,7 @@
         </p:nvSpPr>
         <p:spPr>
           <a:xfrm>
-            <a:off x="548640" y="5824728"/>
+            <a:off x="548640" y="6099048"/>
             <a:ext cx="6949440" cy="914400"/>
           </a:xfrm>
           <a:prstGeom prst="rect">
@@ -9012,7 +9129,7 @@
                 </a:solidFill>
                 <a:latin typeface="Calibri"/>
               </a:rPr>
-              <a:t>•  Euclidean error 148.57 px — a different site entirely</a:t>
+              <a:t>•  Euclidean error 628.24 px — a different site entirely</a:t>
             </a:r>
           </a:p>
           <a:p>
@@ -9028,7 +9145,7 @@
                 </a:solidFill>
                 <a:latin typeface="Calibri"/>
               </a:rPr>
-              <a:t>•  The true location never entered the candidate set at all — no ranking rule could have recovered it</a:t>
+              <a:t>•  The true location WAS a candidate, at rank 2 — it was outscored</a:t>
             </a:r>
           </a:p>
           <a:p>
@@ -9044,6 +9161,22 @@
                 </a:solidFill>
                 <a:latin typeface="Calibri"/>
               </a:rPr>
+              <a:t>•  It lost by 0.0013 of correlation — 0.15% of the winning score</a:t>
+            </a:r>
+          </a:p>
+          <a:p>
+            <a:pPr algn="l">
+              <a:spcAft>
+                <a:spcPts val="500"/>
+              </a:spcAft>
+            </a:pPr>
+            <a:r>
+              <a:rPr sz="1200" b="0" i="0">
+                <a:solidFill>
+                  <a:srgbClr val="7A3A24"/>
+                </a:solidFill>
+                <a:latin typeface="Calibri"/>
+              </a:rPr>
               <a:t>•  The pair sits in the 'med' ambiguity stratum — no landmark in view</a:t>
             </a:r>
           </a:p>
@@ -9079,7 +9212,7 @@
                 </a:solidFill>
                 <a:latin typeface="Calibri"/>
               </a:rPr>
-              <a:t>Root cause across all 8 failures: ranking, not candidate generation (5/8).</a:t>
+              <a:t>Root cause across all 6 failures: ranking, not candidate generation (4/6).</a:t>
             </a:r>
           </a:p>
         </p:txBody>
@@ -9498,7 +9631,7 @@
                           </a:solidFill>
                           <a:latin typeface="Calibri"/>
                         </a:rPr>
-                        <a:t>24</a:t>
+                        <a:t>25</a:t>
                       </a:r>
                     </a:p>
                   </a:txBody>
@@ -9521,7 +9654,7 @@
                           </a:solidFill>
                           <a:latin typeface="Calibri"/>
                         </a:rPr>
-                        <a:t>2</a:t>
+                        <a:t>1</a:t>
                       </a:r>
                     </a:p>
                   </a:txBody>
@@ -9615,7 +9748,30 @@
                           </a:solidFill>
                           <a:latin typeface="Calibri"/>
                         </a:rPr>
-                        <a:t>28</a:t>
+                        <a:t>29</a:t>
+                      </a:r>
+                    </a:p>
+                  </a:txBody>
+                  <a:tcPr marL="54864" marR="54864" marT="18288" marB="18288" anchor="ctr">
+                    <a:solidFill>
+                      <a:srgbClr val="FFFFFF"/>
+                    </a:solidFill>
+                  </a:tcPr>
+                </a:tc>
+                <a:tc>
+                  <a:txBody>
+                    <a:bodyPr wrap="square"/>
+                    <a:lstStyle/>
+                    <a:p>
+                      <a:pPr algn="ctr"/>
+                      <a:r>
+                        <a:rPr sz="1050" b="0">
+                          <a:solidFill>
+                            <a:srgbClr val="35424D"/>
+                          </a:solidFill>
+                          <a:latin typeface="Calibri"/>
+                        </a:rPr>
+                        <a:t>0</a:t>
                       </a:r>
                     </a:p>
                   </a:txBody>
@@ -9671,29 +9827,6 @@
                     </a:solidFill>
                   </a:tcPr>
                 </a:tc>
-                <a:tc>
-                  <a:txBody>
-                    <a:bodyPr wrap="square"/>
-                    <a:lstStyle/>
-                    <a:p>
-                      <a:pPr algn="ctr"/>
-                      <a:r>
-                        <a:rPr sz="1050" b="0">
-                          <a:solidFill>
-                            <a:srgbClr val="35424D"/>
-                          </a:solidFill>
-                          <a:latin typeface="Calibri"/>
-                        </a:rPr>
-                        <a:t>1</a:t>
-                      </a:r>
-                    </a:p>
-                  </a:txBody>
-                  <a:tcPr marL="54864" marR="54864" marT="18288" marB="18288" anchor="ctr">
-                    <a:solidFill>
-                      <a:srgbClr val="FFFFFF"/>
-                    </a:solidFill>
-                  </a:tcPr>
-                </a:tc>
               </a:tr>
             </a:tbl>
           </a:graphicData>
@@ -10000,7 +10133,7 @@
                 </a:solidFill>
                 <a:latin typeface="Calibri"/>
               </a:rPr>
-              <a:t>About 700 ms per pair against a 300 ms goal. The per-candidate refit is most of it; top_k is the dial. We took 9 points of mis-lock for the time.</a:t>
+              <a:t>About 625 ms per pair against a 300 ms goal. The per-candidate refit is most of it; top_k is the dial. We took 9 points of mis-lock for the time.</a:t>
             </a:r>
           </a:p>
         </p:txBody>
@@ -10260,7 +10393,7 @@
                 </a:solidFill>
                 <a:latin typeface="Cambria"/>
               </a:rPr>
-              <a:t>76.7% → 20.0%</a:t>
+              <a:t>76.7% → 16.7%</a:t>
             </a:r>
           </a:p>
         </p:txBody>
@@ -10376,7 +10509,7 @@
                 </a:solidFill>
                 <a:latin typeface="Cambria"/>
               </a:rPr>
-              <a:t>90.0% → 6.7%</a:t>
+              <a:t>90.0% → 3.3%</a:t>
             </a:r>
           </a:p>
         </p:txBody>
@@ -19355,7 +19488,7 @@
                           </a:solidFill>
                           <a:latin typeface="Calibri"/>
                         </a:rPr>
-                        <a:t>705 ms</a:t>
+                        <a:t>629 ms</a:t>
                       </a:r>
                     </a:p>
                   </a:txBody>
@@ -19635,7 +19768,7 @@
                           </a:solidFill>
                           <a:latin typeface="Calibri"/>
                         </a:rPr>
-                        <a:t>20.0%</a:t>
+                        <a:t>16.7%</a:t>
                       </a:r>
                     </a:p>
                   </a:txBody>
@@ -19658,7 +19791,30 @@
                           </a:solidFill>
                           <a:latin typeface="Calibri"/>
                         </a:rPr>
-                        <a:t>0.330</a:t>
+                        <a:t>0.300</a:t>
+                      </a:r>
+                    </a:p>
+                  </a:txBody>
+                  <a:tcPr marL="54864" marR="54864" marT="18288" marB="18288" anchor="ctr">
+                    <a:solidFill>
+                      <a:srgbClr val="ECF1F4"/>
+                    </a:solidFill>
+                  </a:tcPr>
+                </a:tc>
+                <a:tc>
+                  <a:txBody>
+                    <a:bodyPr wrap="square"/>
+                    <a:lstStyle/>
+                    <a:p>
+                      <a:pPr algn="ctr"/>
+                      <a:r>
+                        <a:rPr sz="1100" b="0">
+                          <a:solidFill>
+                            <a:srgbClr val="35424D"/>
+                          </a:solidFill>
+                          <a:latin typeface="Calibri"/>
+                        </a:rPr>
+                        <a:t>83.3%</a:t>
                       </a:r>
                     </a:p>
                   </a:txBody>
@@ -19704,7 +19860,7 @@
                           </a:solidFill>
                           <a:latin typeface="Calibri"/>
                         </a:rPr>
-                        <a:t>76.7%</a:t>
+                        <a:t>80.0%</a:t>
                       </a:r>
                     </a:p>
                   </a:txBody>
@@ -19727,7 +19883,7 @@
                           </a:solidFill>
                           <a:latin typeface="Calibri"/>
                         </a:rPr>
-                        <a:t>76.7%</a:t>
+                        <a:t>66.7%</a:t>
                       </a:r>
                     </a:p>
                   </a:txBody>
@@ -19750,30 +19906,7 @@
                           </a:solidFill>
                           <a:latin typeface="Calibri"/>
                         </a:rPr>
-                        <a:t>63.3%</a:t>
-                      </a:r>
-                    </a:p>
-                  </a:txBody>
-                  <a:tcPr marL="54864" marR="54864" marT="18288" marB="18288" anchor="ctr">
-                    <a:solidFill>
-                      <a:srgbClr val="ECF1F4"/>
-                    </a:solidFill>
-                  </a:tcPr>
-                </a:tc>
-                <a:tc>
-                  <a:txBody>
-                    <a:bodyPr wrap="square"/>
-                    <a:lstStyle/>
-                    <a:p>
-                      <a:pPr algn="ctr"/>
-                      <a:r>
-                        <a:rPr sz="1100" b="0">
-                          <a:solidFill>
-                            <a:srgbClr val="35424D"/>
-                          </a:solidFill>
-                          <a:latin typeface="Calibri"/>
-                        </a:rPr>
-                        <a:t>700 ms</a:t>
+                        <a:t>625 ms</a:t>
                       </a:r>
                     </a:p>
                   </a:txBody>
@@ -20053,7 +20186,7 @@
                           </a:solidFill>
                           <a:latin typeface="Calibri"/>
                         </a:rPr>
-                        <a:t>6.7%</a:t>
+                        <a:t>3.3%</a:t>
                       </a:r>
                     </a:p>
                   </a:txBody>
@@ -20077,6 +20210,29 @@
                           <a:latin typeface="Calibri"/>
                         </a:rPr>
                         <a:t>0.214</a:t>
+                      </a:r>
+                    </a:p>
+                  </a:txBody>
+                  <a:tcPr marL="54864" marR="54864" marT="18288" marB="18288" anchor="ctr">
+                    <a:solidFill>
+                      <a:srgbClr val="ECF1F4"/>
+                    </a:solidFill>
+                  </a:tcPr>
+                </a:tc>
+                <a:tc>
+                  <a:txBody>
+                    <a:bodyPr wrap="square"/>
+                    <a:lstStyle/>
+                    <a:p>
+                      <a:pPr algn="ctr"/>
+                      <a:r>
+                        <a:rPr sz="1100" b="0">
+                          <a:solidFill>
+                            <a:srgbClr val="35424D"/>
+                          </a:solidFill>
+                          <a:latin typeface="Calibri"/>
+                        </a:rPr>
+                        <a:t>96.7%</a:t>
                       </a:r>
                     </a:p>
                   </a:txBody>
@@ -20145,7 +20301,7 @@
                           </a:solidFill>
                           <a:latin typeface="Calibri"/>
                         </a:rPr>
-                        <a:t>86.7%</a:t>
+                        <a:t>76.7%</a:t>
                       </a:r>
                     </a:p>
                   </a:txBody>
@@ -20168,30 +20324,7 @@
                           </a:solidFill>
                           <a:latin typeface="Calibri"/>
                         </a:rPr>
-                        <a:t>73.3%</a:t>
-                      </a:r>
-                    </a:p>
-                  </a:txBody>
-                  <a:tcPr marL="54864" marR="54864" marT="18288" marB="18288" anchor="ctr">
-                    <a:solidFill>
-                      <a:srgbClr val="ECF1F4"/>
-                    </a:solidFill>
-                  </a:tcPr>
-                </a:tc>
-                <a:tc>
-                  <a:txBody>
-                    <a:bodyPr wrap="square"/>
-                    <a:lstStyle/>
-                    <a:p>
-                      <a:pPr algn="ctr"/>
-                      <a:r>
-                        <a:rPr sz="1100" b="0">
-                          <a:solidFill>
-                            <a:srgbClr val="35424D"/>
-                          </a:solidFill>
-                          <a:latin typeface="Calibri"/>
-                        </a:rPr>
-                        <a:t>723 ms</a:t>
+                        <a:t>642 ms</a:t>
                       </a:r>
                     </a:p>
                   </a:txBody>
@@ -20272,7 +20405,7 @@
                 <a:latin typeface="Calibri"/>
               </a:rPr>
               <a:t>On the sponsor's fixed 10:1 data the task is precision: median error improves from 1.102 px to 0.179 px and the sub-pixel pass rate rises from 17.5% to 92.5%.
-On our own data — the 9:1–11:1 and ±2° envelope the problem statement says will be tested — the baseline does not work at all (76.7% mis-lock against 20.0%). That axis is invisible to anyone validating only on the published generator, because it produces neither rotation nor scale variation.</a:t>
+On our own data — the 9:1–11:1 and ±2° envelope the problem statement says will be tested — the baseline does not work at all (76.7% mis-lock against 16.7%). That axis is invisible to anyone validating only on the published generator, because it produces neither rotation nor scale variation.</a:t>
             </a:r>
           </a:p>
         </p:txBody>

--- a/solution_presentation.pptx
+++ b/solution_presentation.pptx
@@ -248,7 +248,7 @@
                   <c:v>0.0</c:v>
                 </c:pt>
                 <c:pt idx="1">
-                  <c:v>16.666700000000002</c:v>
+                  <c:v>13.333300000000001</c:v>
                 </c:pt>
                 <c:pt idx="2">
                   <c:v>3.33333</c:v>
@@ -4096,7 +4096,7 @@
                 </a:solidFill>
                 <a:latin typeface="Cambria"/>
               </a:rPr>
-              <a:t>16.7%</a:t>
+              <a:t>13.3%</a:t>
             </a:r>
           </a:p>
         </p:txBody>
@@ -4166,7 +4166,7 @@
                 </a:solidFill>
                 <a:latin typeface="Cambria"/>
               </a:rPr>
-              <a:t>0.188 px</a:t>
+              <a:t>0.216 px</a:t>
             </a:r>
           </a:p>
         </p:txBody>
@@ -6696,7 +6696,7 @@
         </p:nvGraphicFramePr>
         <p:xfrm>
           <a:off x="548640" y="1572768"/>
-          <a:ext cx="6949440" cy="4114800"/>
+          <a:ext cx="6949440" cy="4389120"/>
         </p:xfrm>
         <a:graphic>
           <a:graphicData uri="http://schemas.openxmlformats.org/drawingml/2006/table">
@@ -7356,7 +7356,7 @@
                           </a:solidFill>
                           <a:latin typeface="Calibri"/>
                         </a:rPr>
-                        <a:t>16.7%</a:t>
+                        <a:t>13.3%</a:t>
                       </a:r>
                     </a:p>
                   </a:txBody>
@@ -7473,7 +7473,7 @@
                           </a:solidFill>
                           <a:latin typeface="Calibri"/>
                         </a:rPr>
-                        <a:t>23.3%</a:t>
+                        <a:t>20.0%</a:t>
                       </a:r>
                     </a:p>
                   </a:txBody>
@@ -7590,7 +7590,7 @@
                           </a:solidFill>
                           <a:latin typeface="Calibri"/>
                         </a:rPr>
-                        <a:t>20.0%</a:t>
+                        <a:t>16.7%</a:t>
                       </a:r>
                     </a:p>
                   </a:txBody>
@@ -7778,7 +7778,7 @@
                           </a:solidFill>
                           <a:latin typeface="Calibri"/>
                         </a:rPr>
-                        <a:t>+ spec's centre rule</a:t>
+                        <a:t>+ drift guard   ← shipped</a:t>
                       </a:r>
                     </a:p>
                   </a:txBody>
@@ -7801,7 +7801,7 @@
                           </a:solidFill>
                           <a:latin typeface="Calibri"/>
                         </a:rPr>
-                        <a:t>32.5%</a:t>
+                        <a:t>0.0%</a:t>
                       </a:r>
                     </a:p>
                   </a:txBody>
@@ -7824,7 +7824,7 @@
                           </a:solidFill>
                           <a:latin typeface="Calibri"/>
                         </a:rPr>
-                        <a:t>20.0%</a:t>
+                        <a:t>13.3%</a:t>
                       </a:r>
                     </a:p>
                   </a:txBody>
@@ -7847,7 +7847,7 @@
                           </a:solidFill>
                           <a:latin typeface="Calibri"/>
                         </a:rPr>
-                        <a:t>16.7%</a:t>
+                        <a:t>3.3%</a:t>
                       </a:r>
                     </a:p>
                   </a:txBody>
@@ -7870,7 +7870,7 @@
                           </a:solidFill>
                           <a:latin typeface="Calibri"/>
                         </a:rPr>
-                        <a:t>prior absent</a:t>
+                        <a:t>guards refinement</a:t>
                       </a:r>
                     </a:p>
                   </a:txBody>
@@ -7895,7 +7895,7 @@
                           </a:solidFill>
                           <a:latin typeface="Calibri"/>
                         </a:rPr>
-                        <a:t>+ pose: spectral lattice</a:t>
+                        <a:t>+ spec's centre rule</a:t>
                       </a:r>
                     </a:p>
                   </a:txBody>
@@ -7918,7 +7918,7 @@
                           </a:solidFill>
                           <a:latin typeface="Calibri"/>
                         </a:rPr>
-                        <a:t>22.5%</a:t>
+                        <a:t>32.5%</a:t>
                       </a:r>
                     </a:p>
                   </a:txBody>
@@ -7941,7 +7941,7 @@
                           </a:solidFill>
                           <a:latin typeface="Calibri"/>
                         </a:rPr>
-                        <a:t>46.7%</a:t>
+                        <a:t>20.0%</a:t>
                       </a:r>
                     </a:p>
                   </a:txBody>
@@ -7964,7 +7964,7 @@
                           </a:solidFill>
                           <a:latin typeface="Calibri"/>
                         </a:rPr>
-                        <a:t>60.0%</a:t>
+                        <a:t>16.7%</a:t>
                       </a:r>
                     </a:p>
                   </a:txBody>
@@ -7987,7 +7987,7 @@
                           </a:solidFill>
                           <a:latin typeface="Calibri"/>
                         </a:rPr>
-                        <a:t>less accurate</a:t>
+                        <a:t>prior absent</a:t>
                       </a:r>
                     </a:p>
                   </a:txBody>
@@ -8012,7 +8012,7 @@
                           </a:solidFill>
                           <a:latin typeface="Calibri"/>
                         </a:rPr>
-                        <a:t>+ PADM residual re-ranking</a:t>
+                        <a:t>+ pose: spectral lattice</a:t>
                       </a:r>
                     </a:p>
                   </a:txBody>
@@ -8035,7 +8035,7 @@
                           </a:solidFill>
                           <a:latin typeface="Calibri"/>
                         </a:rPr>
-                        <a:t>27.5%</a:t>
+                        <a:t>22.5%</a:t>
                       </a:r>
                     </a:p>
                   </a:txBody>
@@ -8058,7 +8058,7 @@
                           </a:solidFill>
                           <a:latin typeface="Calibri"/>
                         </a:rPr>
-                        <a:t>70.0%</a:t>
+                        <a:t>46.7%</a:t>
                       </a:r>
                     </a:p>
                   </a:txBody>
@@ -8081,7 +8081,7 @@
                           </a:solidFill>
                           <a:latin typeface="Calibri"/>
                         </a:rPr>
-                        <a:t>73.3%</a:t>
+                        <a:t>60.0%</a:t>
                       </a:r>
                     </a:p>
                   </a:txBody>
@@ -8104,7 +8104,7 @@
                           </a:solidFill>
                           <a:latin typeface="Calibri"/>
                         </a:rPr>
-                        <a:t>overfit</a:t>
+                        <a:t>less accurate</a:t>
                       </a:r>
                     </a:p>
                   </a:txBody>
@@ -8129,7 +8129,7 @@
                           </a:solidFill>
                           <a:latin typeface="Calibri"/>
                         </a:rPr>
-                        <a:t>+ max-likelihood re-ranking</a:t>
+                        <a:t>+ PADM residual re-ranking</a:t>
                       </a:r>
                     </a:p>
                   </a:txBody>
@@ -8152,7 +8152,264 @@
                           </a:solidFill>
                           <a:latin typeface="Calibri"/>
                         </a:rPr>
+                        <a:t>27.5%</a:t>
+                      </a:r>
+                    </a:p>
+                  </a:txBody>
+                  <a:tcPr marL="54864" marR="54864" marT="18288" marB="18288" anchor="ctr">
+                    <a:solidFill>
+                      <a:srgbClr val="ECF1F4"/>
+                    </a:solidFill>
+                  </a:tcPr>
+                </a:tc>
+                <a:tc>
+                  <a:txBody>
+                    <a:bodyPr wrap="square"/>
+                    <a:lstStyle/>
+                    <a:p>
+                      <a:pPr algn="ctr"/>
+                      <a:r>
+                        <a:rPr sz="1050" b="0">
+                          <a:solidFill>
+                            <a:srgbClr val="35424D"/>
+                          </a:solidFill>
+                          <a:latin typeface="Calibri"/>
+                        </a:rPr>
+                        <a:t>70.0%</a:t>
+                      </a:r>
+                    </a:p>
+                  </a:txBody>
+                  <a:tcPr marL="54864" marR="54864" marT="18288" marB="18288" anchor="ctr">
+                    <a:solidFill>
+                      <a:srgbClr val="ECF1F4"/>
+                    </a:solidFill>
+                  </a:tcPr>
+                </a:tc>
+                <a:tc>
+                  <a:txBody>
+                    <a:bodyPr wrap="square"/>
+                    <a:lstStyle/>
+                    <a:p>
+                      <a:pPr algn="ctr"/>
+                      <a:r>
+                        <a:rPr sz="1050" b="0">
+                          <a:solidFill>
+                            <a:srgbClr val="35424D"/>
+                          </a:solidFill>
+                          <a:latin typeface="Calibri"/>
+                        </a:rPr>
+                        <a:t>73.3%</a:t>
+                      </a:r>
+                    </a:p>
+                  </a:txBody>
+                  <a:tcPr marL="54864" marR="54864" marT="18288" marB="18288" anchor="ctr">
+                    <a:solidFill>
+                      <a:srgbClr val="ECF1F4"/>
+                    </a:solidFill>
+                  </a:tcPr>
+                </a:tc>
+                <a:tc>
+                  <a:txBody>
+                    <a:bodyPr wrap="square"/>
+                    <a:lstStyle/>
+                    <a:p>
+                      <a:pPr algn="ctr"/>
+                      <a:r>
+                        <a:rPr sz="1050" b="0">
+                          <a:solidFill>
+                            <a:srgbClr val="35424D"/>
+                          </a:solidFill>
+                          <a:latin typeface="Calibri"/>
+                        </a:rPr>
+                        <a:t>overfit</a:t>
+                      </a:r>
+                    </a:p>
+                  </a:txBody>
+                  <a:tcPr marL="54864" marR="54864" marT="18288" marB="18288" anchor="ctr">
+                    <a:solidFill>
+                      <a:srgbClr val="ECF1F4"/>
+                    </a:solidFill>
+                  </a:tcPr>
+                </a:tc>
+              </a:tr>
+              <a:tr h="274320">
+                <a:tc>
+                  <a:txBody>
+                    <a:bodyPr wrap="square"/>
+                    <a:lstStyle/>
+                    <a:p>
+                      <a:pPr algn="l"/>
+                      <a:r>
+                        <a:rPr sz="1050" b="0">
+                          <a:solidFill>
+                            <a:srgbClr val="35424D"/>
+                          </a:solidFill>
+                          <a:latin typeface="Calibri"/>
+                        </a:rPr>
+                        <a:t>+ max-likelihood re-ranking</a:t>
+                      </a:r>
+                    </a:p>
+                  </a:txBody>
+                  <a:tcPr marL="54864" marR="54864" marT="18288" marB="18288" anchor="ctr">
+                    <a:solidFill>
+                      <a:srgbClr val="FFFFFF"/>
+                    </a:solidFill>
+                  </a:tcPr>
+                </a:tc>
+                <a:tc>
+                  <a:txBody>
+                    <a:bodyPr wrap="square"/>
+                    <a:lstStyle/>
+                    <a:p>
+                      <a:pPr algn="ctr"/>
+                      <a:r>
+                        <a:rPr sz="1050" b="0">
+                          <a:solidFill>
+                            <a:srgbClr val="35424D"/>
+                          </a:solidFill>
+                          <a:latin typeface="Calibri"/>
+                        </a:rPr>
                         <a:t>22.5%</a:t>
+                      </a:r>
+                    </a:p>
+                  </a:txBody>
+                  <a:tcPr marL="54864" marR="54864" marT="18288" marB="18288" anchor="ctr">
+                    <a:solidFill>
+                      <a:srgbClr val="FFFFFF"/>
+                    </a:solidFill>
+                  </a:tcPr>
+                </a:tc>
+                <a:tc>
+                  <a:txBody>
+                    <a:bodyPr wrap="square"/>
+                    <a:lstStyle/>
+                    <a:p>
+                      <a:pPr algn="ctr"/>
+                      <a:r>
+                        <a:rPr sz="1050" b="0">
+                          <a:solidFill>
+                            <a:srgbClr val="35424D"/>
+                          </a:solidFill>
+                          <a:latin typeface="Calibri"/>
+                        </a:rPr>
+                        <a:t>36.7%</a:t>
+                      </a:r>
+                    </a:p>
+                  </a:txBody>
+                  <a:tcPr marL="54864" marR="54864" marT="18288" marB="18288" anchor="ctr">
+                    <a:solidFill>
+                      <a:srgbClr val="FFFFFF"/>
+                    </a:solidFill>
+                  </a:tcPr>
+                </a:tc>
+                <a:tc>
+                  <a:txBody>
+                    <a:bodyPr wrap="square"/>
+                    <a:lstStyle/>
+                    <a:p>
+                      <a:pPr algn="ctr"/>
+                      <a:r>
+                        <a:rPr sz="1050" b="0">
+                          <a:solidFill>
+                            <a:srgbClr val="35424D"/>
+                          </a:solidFill>
+                          <a:latin typeface="Calibri"/>
+                        </a:rPr>
+                        <a:t>50.0%</a:t>
+                      </a:r>
+                    </a:p>
+                  </a:txBody>
+                  <a:tcPr marL="54864" marR="54864" marT="18288" marB="18288" anchor="ctr">
+                    <a:solidFill>
+                      <a:srgbClr val="FFFFFF"/>
+                    </a:solidFill>
+                  </a:tcPr>
+                </a:tc>
+                <a:tc>
+                  <a:txBody>
+                    <a:bodyPr wrap="square"/>
+                    <a:lstStyle/>
+                    <a:p>
+                      <a:pPr algn="ctr"/>
+                      <a:r>
+                        <a:rPr sz="1050" b="0">
+                          <a:solidFill>
+                            <a:srgbClr val="35424D"/>
+                          </a:solidFill>
+                          <a:latin typeface="Calibri"/>
+                        </a:rPr>
+                        <a:t>no gain</a:t>
+                      </a:r>
+                    </a:p>
+                  </a:txBody>
+                  <a:tcPr marL="54864" marR="54864" marT="18288" marB="18288" anchor="ctr">
+                    <a:solidFill>
+                      <a:srgbClr val="FFFFFF"/>
+                    </a:solidFill>
+                  </a:tcPr>
+                </a:tc>
+              </a:tr>
+              <a:tr h="274320">
+                <a:tc>
+                  <a:txBody>
+                    <a:bodyPr wrap="square"/>
+                    <a:lstStyle/>
+                    <a:p>
+                      <a:pPr algn="l"/>
+                      <a:r>
+                        <a:rPr sz="1050" b="0">
+                          <a:solidFill>
+                            <a:srgbClr val="35424D"/>
+                          </a:solidFill>
+                          <a:latin typeface="Calibri"/>
+                        </a:rPr>
+                        <a:t>+ coarse-level consensus</a:t>
+                      </a:r>
+                    </a:p>
+                  </a:txBody>
+                  <a:tcPr marL="54864" marR="54864" marT="18288" marB="18288" anchor="ctr">
+                    <a:solidFill>
+                      <a:srgbClr val="ECF1F4"/>
+                    </a:solidFill>
+                  </a:tcPr>
+                </a:tc>
+                <a:tc>
+                  <a:txBody>
+                    <a:bodyPr wrap="square"/>
+                    <a:lstStyle/>
+                    <a:p>
+                      <a:pPr algn="ctr"/>
+                      <a:r>
+                        <a:rPr sz="1050" b="0">
+                          <a:solidFill>
+                            <a:srgbClr val="35424D"/>
+                          </a:solidFill>
+                          <a:latin typeface="Calibri"/>
+                        </a:rPr>
+                        <a:t>62.5%</a:t>
+                      </a:r>
+                    </a:p>
+                  </a:txBody>
+                  <a:tcPr marL="54864" marR="54864" marT="18288" marB="18288" anchor="ctr">
+                    <a:solidFill>
+                      <a:srgbClr val="ECF1F4"/>
+                    </a:solidFill>
+                  </a:tcPr>
+                </a:tc>
+                <a:tc>
+                  <a:txBody>
+                    <a:bodyPr wrap="square"/>
+                    <a:lstStyle/>
+                    <a:p>
+                      <a:pPr algn="ctr"/>
+                      <a:r>
+                        <a:rPr sz="1050" b="0">
+                          <a:solidFill>
+                            <a:srgbClr val="35424D"/>
+                          </a:solidFill>
+                          <a:latin typeface="Calibri"/>
+                        </a:rPr>
+                        <a:t>73.3%</a:t>
                       </a:r>
                     </a:p>
                   </a:txBody>
@@ -8198,30 +8455,7 @@
                           </a:solidFill>
                           <a:latin typeface="Calibri"/>
                         </a:rPr>
-                        <a:t>50.0%</a:t>
-                      </a:r>
-                    </a:p>
-                  </a:txBody>
-                  <a:tcPr marL="54864" marR="54864" marT="18288" marB="18288" anchor="ctr">
-                    <a:solidFill>
-                      <a:srgbClr val="ECF1F4"/>
-                    </a:solidFill>
-                  </a:tcPr>
-                </a:tc>
-                <a:tc>
-                  <a:txBody>
-                    <a:bodyPr wrap="square"/>
-                    <a:lstStyle/>
-                    <a:p>
-                      <a:pPr algn="ctr"/>
-                      <a:r>
-                        <a:rPr sz="1050" b="0">
-                          <a:solidFill>
-                            <a:srgbClr val="35424D"/>
-                          </a:solidFill>
-                          <a:latin typeface="Calibri"/>
-                        </a:rPr>
-                        <a:t>no gain</a:t>
+                        <a:t>harmful</a:t>
                       </a:r>
                     </a:p>
                   </a:txBody>
@@ -8246,7 +8480,7 @@
                           </a:solidFill>
                           <a:latin typeface="Calibri"/>
                         </a:rPr>
-                        <a:t>+ coarse-level consensus</a:t>
+                        <a:t>+ row destriping</a:t>
                       </a:r>
                     </a:p>
                   </a:txBody>
@@ -8269,7 +8503,7 @@
                           </a:solidFill>
                           <a:latin typeface="Calibri"/>
                         </a:rPr>
-                        <a:t>62.5%</a:t>
+                        <a:t>35.0%</a:t>
                       </a:r>
                     </a:p>
                   </a:txBody>
@@ -8292,7 +8526,7 @@
                           </a:solidFill>
                           <a:latin typeface="Calibri"/>
                         </a:rPr>
-                        <a:t>73.3%</a:t>
+                        <a:t>90.0%</a:t>
                       </a:r>
                     </a:p>
                   </a:txBody>
@@ -8315,7 +8549,7 @@
                           </a:solidFill>
                           <a:latin typeface="Calibri"/>
                         </a:rPr>
-                        <a:t>36.7%</a:t>
+                        <a:t>90.0%</a:t>
                       </a:r>
                     </a:p>
                   </a:txBody>
@@ -8349,123 +8583,6 @@
                   </a:tcPr>
                 </a:tc>
               </a:tr>
-              <a:tr h="274320">
-                <a:tc>
-                  <a:txBody>
-                    <a:bodyPr wrap="square"/>
-                    <a:lstStyle/>
-                    <a:p>
-                      <a:pPr algn="l"/>
-                      <a:r>
-                        <a:rPr sz="1050" b="0">
-                          <a:solidFill>
-                            <a:srgbClr val="35424D"/>
-                          </a:solidFill>
-                          <a:latin typeface="Calibri"/>
-                        </a:rPr>
-                        <a:t>+ row destriping</a:t>
-                      </a:r>
-                    </a:p>
-                  </a:txBody>
-                  <a:tcPr marL="54864" marR="54864" marT="18288" marB="18288" anchor="ctr">
-                    <a:solidFill>
-                      <a:srgbClr val="ECF1F4"/>
-                    </a:solidFill>
-                  </a:tcPr>
-                </a:tc>
-                <a:tc>
-                  <a:txBody>
-                    <a:bodyPr wrap="square"/>
-                    <a:lstStyle/>
-                    <a:p>
-                      <a:pPr algn="ctr"/>
-                      <a:r>
-                        <a:rPr sz="1050" b="0">
-                          <a:solidFill>
-                            <a:srgbClr val="35424D"/>
-                          </a:solidFill>
-                          <a:latin typeface="Calibri"/>
-                        </a:rPr>
-                        <a:t>35.0%</a:t>
-                      </a:r>
-                    </a:p>
-                  </a:txBody>
-                  <a:tcPr marL="54864" marR="54864" marT="18288" marB="18288" anchor="ctr">
-                    <a:solidFill>
-                      <a:srgbClr val="ECF1F4"/>
-                    </a:solidFill>
-                  </a:tcPr>
-                </a:tc>
-                <a:tc>
-                  <a:txBody>
-                    <a:bodyPr wrap="square"/>
-                    <a:lstStyle/>
-                    <a:p>
-                      <a:pPr algn="ctr"/>
-                      <a:r>
-                        <a:rPr sz="1050" b="0">
-                          <a:solidFill>
-                            <a:srgbClr val="35424D"/>
-                          </a:solidFill>
-                          <a:latin typeface="Calibri"/>
-                        </a:rPr>
-                        <a:t>90.0%</a:t>
-                      </a:r>
-                    </a:p>
-                  </a:txBody>
-                  <a:tcPr marL="54864" marR="54864" marT="18288" marB="18288" anchor="ctr">
-                    <a:solidFill>
-                      <a:srgbClr val="ECF1F4"/>
-                    </a:solidFill>
-                  </a:tcPr>
-                </a:tc>
-                <a:tc>
-                  <a:txBody>
-                    <a:bodyPr wrap="square"/>
-                    <a:lstStyle/>
-                    <a:p>
-                      <a:pPr algn="ctr"/>
-                      <a:r>
-                        <a:rPr sz="1050" b="0">
-                          <a:solidFill>
-                            <a:srgbClr val="35424D"/>
-                          </a:solidFill>
-                          <a:latin typeface="Calibri"/>
-                        </a:rPr>
-                        <a:t>90.0%</a:t>
-                      </a:r>
-                    </a:p>
-                  </a:txBody>
-                  <a:tcPr marL="54864" marR="54864" marT="18288" marB="18288" anchor="ctr">
-                    <a:solidFill>
-                      <a:srgbClr val="ECF1F4"/>
-                    </a:solidFill>
-                  </a:tcPr>
-                </a:tc>
-                <a:tc>
-                  <a:txBody>
-                    <a:bodyPr wrap="square"/>
-                    <a:lstStyle/>
-                    <a:p>
-                      <a:pPr algn="ctr"/>
-                      <a:r>
-                        <a:rPr sz="1050" b="0">
-                          <a:solidFill>
-                            <a:srgbClr val="35424D"/>
-                          </a:solidFill>
-                          <a:latin typeface="Calibri"/>
-                        </a:rPr>
-                        <a:t>harmful</a:t>
-                      </a:r>
-                    </a:p>
-                  </a:txBody>
-                  <a:tcPr marL="54864" marR="54864" marT="18288" marB="18288" anchor="ctr">
-                    <a:solidFill>
-                      <a:srgbClr val="ECF1F4"/>
-                    </a:solidFill>
-                  </a:tcPr>
-                </a:tc>
-              </a:tr>
             </a:tbl>
           </a:graphicData>
         </a:graphic>
@@ -8478,7 +8595,7 @@
         </p:nvSpPr>
         <p:spPr>
           <a:xfrm>
-            <a:off x="548640" y="5788152"/>
+            <a:off x="548640" y="6062472"/>
             <a:ext cx="6949440" cy="256032"/>
           </a:xfrm>
           <a:prstGeom prst="rect">
@@ -8889,7 +9006,7 @@
         </p:nvSpPr>
         <p:spPr>
           <a:xfrm>
-            <a:off x="548640" y="6099048"/>
+            <a:off x="548640" y="6373368"/>
             <a:ext cx="6949440" cy="914400"/>
           </a:xfrm>
           <a:prstGeom prst="rect">
@@ -9212,7 +9329,7 @@
                 </a:solidFill>
                 <a:latin typeface="Calibri"/>
               </a:rPr>
-              <a:t>Root cause across all 6 failures: ranking, not candidate generation (4/6).</a:t>
+              <a:t>Root cause across all 5 failures: ranking, not candidate generation (3/5).</a:t>
             </a:r>
           </a:p>
         </p:txBody>
@@ -9631,7 +9748,7 @@
                           </a:solidFill>
                           <a:latin typeface="Calibri"/>
                         </a:rPr>
-                        <a:t>25</a:t>
+                        <a:t>26</a:t>
                       </a:r>
                     </a:p>
                   </a:txBody>
@@ -9700,7 +9817,7 @@
                           </a:solidFill>
                           <a:latin typeface="Calibri"/>
                         </a:rPr>
-                        <a:t>4</a:t>
+                        <a:t>3</a:t>
                       </a:r>
                     </a:p>
                   </a:txBody>
@@ -10133,7 +10250,7 @@
                 </a:solidFill>
                 <a:latin typeface="Calibri"/>
               </a:rPr>
-              <a:t>About 625 ms per pair against a 300 ms goal. The per-candidate refit is most of it; top_k is the dial. We took 9 points of mis-lock for the time.</a:t>
+              <a:t>About 1063 ms per pair against a 300 ms goal. The per-candidate refit is most of it; top_k is the dial. We took 9 points of mis-lock for the time.</a:t>
             </a:r>
           </a:p>
         </p:txBody>
@@ -10393,7 +10510,7 @@
                 </a:solidFill>
                 <a:latin typeface="Cambria"/>
               </a:rPr>
-              <a:t>76.7% → 16.7%</a:t>
+              <a:t>76.7% → 13.3%</a:t>
             </a:r>
           </a:p>
         </p:txBody>
@@ -18555,7 +18672,7 @@
                           </a:solidFill>
                           <a:latin typeface="Calibri"/>
                         </a:rPr>
-                        <a:t>20.0%</a:t>
+                        <a:t>13.3%</a:t>
                       </a:r>
                     </a:p>
                   </a:txBody>
@@ -18697,7 +18814,7 @@
                           </a:solidFill>
                           <a:latin typeface="Calibri"/>
                         </a:rPr>
-                        <a:t>33.3%</a:t>
+                        <a:t>23.3%</a:t>
                       </a:r>
                     </a:p>
                   </a:txBody>
@@ -19488,7 +19605,7 @@
                           </a:solidFill>
                           <a:latin typeface="Calibri"/>
                         </a:rPr>
-                        <a:t>629 ms</a:t>
+                        <a:t>1008 ms</a:t>
                       </a:r>
                     </a:p>
                   </a:txBody>
@@ -19768,7 +19885,7 @@
                           </a:solidFill>
                           <a:latin typeface="Calibri"/>
                         </a:rPr>
-                        <a:t>16.7%</a:t>
+                        <a:t>13.3%</a:t>
                       </a:r>
                     </a:p>
                   </a:txBody>
@@ -19814,6 +19931,29 @@
                           </a:solidFill>
                           <a:latin typeface="Calibri"/>
                         </a:rPr>
+                        <a:t>86.7%</a:t>
+                      </a:r>
+                    </a:p>
+                  </a:txBody>
+                  <a:tcPr marL="54864" marR="54864" marT="18288" marB="18288" anchor="ctr">
+                    <a:solidFill>
+                      <a:srgbClr val="ECF1F4"/>
+                    </a:solidFill>
+                  </a:tcPr>
+                </a:tc>
+                <a:tc>
+                  <a:txBody>
+                    <a:bodyPr wrap="square"/>
+                    <a:lstStyle/>
+                    <a:p>
+                      <a:pPr algn="ctr"/>
+                      <a:r>
+                        <a:rPr sz="1100" b="0">
+                          <a:solidFill>
+                            <a:srgbClr val="35424D"/>
+                          </a:solidFill>
+                          <a:latin typeface="Calibri"/>
+                        </a:rPr>
                         <a:t>83.3%</a:t>
                       </a:r>
                     </a:p>
@@ -19837,30 +19977,7 @@
                           </a:solidFill>
                           <a:latin typeface="Calibri"/>
                         </a:rPr>
-                        <a:t>80.0%</a:t>
-                      </a:r>
-                    </a:p>
-                  </a:txBody>
-                  <a:tcPr marL="54864" marR="54864" marT="18288" marB="18288" anchor="ctr">
-                    <a:solidFill>
-                      <a:srgbClr val="ECF1F4"/>
-                    </a:solidFill>
-                  </a:tcPr>
-                </a:tc>
-                <a:tc>
-                  <a:txBody>
-                    <a:bodyPr wrap="square"/>
-                    <a:lstStyle/>
-                    <a:p>
-                      <a:pPr algn="ctr"/>
-                      <a:r>
-                        <a:rPr sz="1100" b="0">
-                          <a:solidFill>
-                            <a:srgbClr val="35424D"/>
-                          </a:solidFill>
-                          <a:latin typeface="Calibri"/>
-                        </a:rPr>
-                        <a:t>80.0%</a:t>
+                        <a:t>83.3%</a:t>
                       </a:r>
                     </a:p>
                   </a:txBody>
@@ -19906,7 +20023,7 @@
                           </a:solidFill>
                           <a:latin typeface="Calibri"/>
                         </a:rPr>
-                        <a:t>625 ms</a:t>
+                        <a:t>1063 ms</a:t>
                       </a:r>
                     </a:p>
                   </a:txBody>
@@ -20324,7 +20441,7 @@
                           </a:solidFill>
                           <a:latin typeface="Calibri"/>
                         </a:rPr>
-                        <a:t>642 ms</a:t>
+                        <a:t>1118 ms</a:t>
                       </a:r>
                     </a:p>
                   </a:txBody>
@@ -20405,7 +20522,7 @@
                 <a:latin typeface="Calibri"/>
               </a:rPr>
               <a:t>On the sponsor's fixed 10:1 data the task is precision: median error improves from 1.102 px to 0.179 px and the sub-pixel pass rate rises from 17.5% to 92.5%.
-On our own data — the 9:1–11:1 and ±2° envelope the problem statement says will be tested — the baseline does not work at all (76.7% mis-lock against 16.7%). That axis is invisible to anyone validating only on the published generator, because it produces neither rotation nor scale variation.</a:t>
+On our own data — the 9:1–11:1 and ±2° envelope the problem statement says will be tested — the baseline does not work at all (76.7% mis-lock against 13.3%). That axis is invisible to anyone validating only on the published generator, because it produces neither rotation nor scale variation.</a:t>
             </a:r>
           </a:p>
         </p:txBody>

--- a/solution_presentation.pptx
+++ b/solution_presentation.pptx
@@ -7544,7 +7544,7 @@
                           </a:solidFill>
                           <a:latin typeface="Calibri"/>
                         </a:rPr>
-                        <a:t>+ wider screen (top 30)   ← shipped</a:t>
+                        <a:t>+ wider screen (top 40)   ← shipped</a:t>
                       </a:r>
                     </a:p>
                   </a:txBody>
@@ -9329,7 +9329,7 @@
                 </a:solidFill>
                 <a:latin typeface="Calibri"/>
               </a:rPr>
-              <a:t>Root cause across all 5 failures: ranking, not candidate generation (3/5).</a:t>
+              <a:t>Root cause across all 5 failures: ranking, not candidate generation (4/5).</a:t>
             </a:r>
           </a:p>
         </p:txBody>
@@ -9911,7 +9911,7 @@
                           </a:solidFill>
                           <a:latin typeface="Calibri"/>
                         </a:rPr>
-                        <a:t>1</a:t>
+                        <a:t>0</a:t>
                       </a:r>
                     </a:p>
                   </a:txBody>
@@ -9934,7 +9934,7 @@
                           </a:solidFill>
                           <a:latin typeface="Calibri"/>
                         </a:rPr>
-                        <a:t>0</a:t>
+                        <a:t>1</a:t>
                       </a:r>
                     </a:p>
                   </a:txBody>
@@ -10250,7 +10250,7 @@
                 </a:solidFill>
                 <a:latin typeface="Calibri"/>
               </a:rPr>
-              <a:t>About 1063 ms per pair against a 300 ms goal. The per-candidate refit is most of it; top_k is the dial. We took 9 points of mis-lock for the time.</a:t>
+              <a:t>About 622 ms per pair against a 300 ms goal. The per-candidate refit is most of it; top_k is the dial. We took 9 points of mis-lock for the time.</a:t>
             </a:r>
           </a:p>
         </p:txBody>
@@ -18601,7 +18601,7 @@
                           </a:solidFill>
                           <a:latin typeface="Calibri"/>
                         </a:rPr>
-                        <a:t>16.7%</a:t>
+                        <a:t>13.3%</a:t>
                       </a:r>
                     </a:p>
                   </a:txBody>
@@ -18743,7 +18743,7 @@
                           </a:solidFill>
                           <a:latin typeface="Calibri"/>
                         </a:rPr>
-                        <a:t>36.7%</a:t>
+                        <a:t>33.3%</a:t>
                       </a:r>
                     </a:p>
                   </a:txBody>
@@ -18814,7 +18814,7 @@
                           </a:solidFill>
                           <a:latin typeface="Calibri"/>
                         </a:rPr>
-                        <a:t>23.3%</a:t>
+                        <a:t>20.0%</a:t>
                       </a:r>
                     </a:p>
                   </a:txBody>
@@ -19605,7 +19605,7 @@
                           </a:solidFill>
                           <a:latin typeface="Calibri"/>
                         </a:rPr>
-                        <a:t>1008 ms</a:t>
+                        <a:t>646 ms</a:t>
                       </a:r>
                     </a:p>
                   </a:txBody>
@@ -20023,7 +20023,7 @@
                           </a:solidFill>
                           <a:latin typeface="Calibri"/>
                         </a:rPr>
-                        <a:t>1063 ms</a:t>
+                        <a:t>622 ms</a:t>
                       </a:r>
                     </a:p>
                   </a:txBody>
@@ -20441,7 +20441,7 @@
                           </a:solidFill>
                           <a:latin typeface="Calibri"/>
                         </a:rPr>
-                        <a:t>1118 ms</a:t>
+                        <a:t>654 ms</a:t>
                       </a:r>
                     </a:p>
                   </a:txBody>
